--- a/ICCPROFILE_0920.pptx
+++ b/ICCPROFILE_0920.pptx
@@ -16,10 +16,10 @@
     <p:sldId id="1998" r:id="rId7"/>
     <p:sldId id="2001" r:id="rId8"/>
     <p:sldId id="2008" r:id="rId9"/>
-    <p:sldId id="2007" r:id="rId10"/>
+    <p:sldId id="2013" r:id="rId10"/>
     <p:sldId id="2010" r:id="rId11"/>
-    <p:sldId id="2011" r:id="rId12"/>
-    <p:sldId id="2013" r:id="rId13"/>
+    <p:sldId id="2015" r:id="rId12"/>
+    <p:sldId id="2007" r:id="rId13"/>
     <p:sldId id="2014" r:id="rId14"/>
     <p:sldId id="286" r:id="rId15"/>
     <p:sldId id="2002" r:id="rId16"/>
@@ -284,16 +284,12 @@
             <p14:sldId id="2008"/>
           </p14:sldIdLst>
         </p14:section>
-        <p14:section name="校正資料" id="{E65D862C-83D1-46B7-B7EA-AEC9D994F1E4}">
+        <p14:section name="ICC與校正資料" id="{E65D862C-83D1-46B7-B7EA-AEC9D994F1E4}">
           <p14:sldIdLst>
+            <p14:sldId id="2013"/>
+            <p14:sldId id="2010"/>
+            <p14:sldId id="2015"/>
             <p14:sldId id="2007"/>
-            <p14:sldId id="2010"/>
-          </p14:sldIdLst>
-        </p14:section>
-        <p14:section name="Windows 的 ICC 流程" id="{3EBD1429-0FEE-4018-BB86-07D61313B0B5}">
-          <p14:sldIdLst>
-            <p14:sldId id="2011"/>
-            <p14:sldId id="2013"/>
           </p14:sldIdLst>
         </p14:section>
         <p14:section name="未來方向" id="{5971402B-6926-431D-89B8-CB51A2DAAEFC}">
@@ -1832,7 +1828,7 @@
         <p:cNvPr id="1" name="">
           <a:extLst>
             <a:ext uri="{FF2B5EF4-FFF2-40B4-BE49-F238E27FC236}">
-              <a16:creationId xmlns:a16="http://schemas.microsoft.com/office/drawing/2014/main" id="{23FE19B2-ABEC-6DE9-55AD-024BF954736E}"/>
+              <a16:creationId xmlns:a16="http://schemas.microsoft.com/office/drawing/2014/main" id="{93F86EDD-7E59-3AB8-C679-CC30FFE7F48E}"/>
             </a:ext>
           </a:extLst>
         </p:cNvPr>
@@ -1852,7 +1848,7 @@
           <p:cNvPr id="2" name="投影片影像版面配置區 1">
             <a:extLst>
               <a:ext uri="{FF2B5EF4-FFF2-40B4-BE49-F238E27FC236}">
-                <a16:creationId xmlns:a16="http://schemas.microsoft.com/office/drawing/2014/main" id="{DD96164B-6F6A-F99F-A28F-284EF3A829E2}"/>
+                <a16:creationId xmlns:a16="http://schemas.microsoft.com/office/drawing/2014/main" id="{9A434257-F0DE-AEE9-04C9-D329750FF22A}"/>
               </a:ext>
             </a:extLst>
           </p:cNvPr>
@@ -1870,7 +1866,7 @@
           <p:cNvPr id="3" name="備忘稿版面配置區 2">
             <a:extLst>
               <a:ext uri="{FF2B5EF4-FFF2-40B4-BE49-F238E27FC236}">
-                <a16:creationId xmlns:a16="http://schemas.microsoft.com/office/drawing/2014/main" id="{155EFC9E-A30B-0CA0-922D-797A535BE3FB}"/>
+                <a16:creationId xmlns:a16="http://schemas.microsoft.com/office/drawing/2014/main" id="{F4FC723B-B57F-C33D-0C03-279471C75A88}"/>
               </a:ext>
             </a:extLst>
           </p:cNvPr>
@@ -1895,7 +1891,7 @@
           <p:cNvPr id="4" name="投影片編號版面配置區 3">
             <a:extLst>
               <a:ext uri="{FF2B5EF4-FFF2-40B4-BE49-F238E27FC236}">
-                <a16:creationId xmlns:a16="http://schemas.microsoft.com/office/drawing/2014/main" id="{7C37864C-6FF7-4968-2A77-9DB87CAB2852}"/>
+                <a16:creationId xmlns:a16="http://schemas.microsoft.com/office/drawing/2014/main" id="{8AE0FC2C-7562-289F-30A1-6202FD9A3C36}"/>
               </a:ext>
             </a:extLst>
           </p:cNvPr>
@@ -1947,7 +1943,7 @@
     </p:spTree>
     <p:extLst>
       <p:ext uri="{BB962C8B-B14F-4D97-AF65-F5344CB8AC3E}">
-        <p14:creationId xmlns:p14="http://schemas.microsoft.com/office/powerpoint/2010/main" val="3140108788"/>
+        <p14:creationId xmlns:p14="http://schemas.microsoft.com/office/powerpoint/2010/main" val="3853299142"/>
       </p:ext>
     </p:extLst>
   </p:cSld>
@@ -1965,7 +1961,7 @@
         <p:cNvPr id="1" name="">
           <a:extLst>
             <a:ext uri="{FF2B5EF4-FFF2-40B4-BE49-F238E27FC236}">
-              <a16:creationId xmlns:a16="http://schemas.microsoft.com/office/drawing/2014/main" id="{12EB7DC1-8982-FBBF-D79C-E8A85E11B329}"/>
+              <a16:creationId xmlns:a16="http://schemas.microsoft.com/office/drawing/2014/main" id="{9F75C3F7-F131-3F7D-0332-B853C81F541B}"/>
             </a:ext>
           </a:extLst>
         </p:cNvPr>
@@ -1985,7 +1981,7 @@
           <p:cNvPr id="2" name="投影片影像版面配置區 1">
             <a:extLst>
               <a:ext uri="{FF2B5EF4-FFF2-40B4-BE49-F238E27FC236}">
-                <a16:creationId xmlns:a16="http://schemas.microsoft.com/office/drawing/2014/main" id="{747EDAF3-B8EA-0C16-8FC2-00C5C1AACCA4}"/>
+                <a16:creationId xmlns:a16="http://schemas.microsoft.com/office/drawing/2014/main" id="{F8E069C7-B926-F35E-EA2C-86335228DDDA}"/>
               </a:ext>
             </a:extLst>
           </p:cNvPr>
@@ -2003,7 +1999,7 @@
           <p:cNvPr id="3" name="備忘稿版面配置區 2">
             <a:extLst>
               <a:ext uri="{FF2B5EF4-FFF2-40B4-BE49-F238E27FC236}">
-                <a16:creationId xmlns:a16="http://schemas.microsoft.com/office/drawing/2014/main" id="{2AFC5512-2ACA-40AC-FE98-A0E260C52EAF}"/>
+                <a16:creationId xmlns:a16="http://schemas.microsoft.com/office/drawing/2014/main" id="{55E942C1-E03C-D970-B419-17F1785ADDD6}"/>
               </a:ext>
             </a:extLst>
           </p:cNvPr>
@@ -2019,7 +2015,30 @@
           <a:bodyPr/>
           <a:lstStyle/>
           <a:p>
-            <a:endParaRPr lang="zh-TW" altLang="en-US" dirty="0"/>
+            <a:r>
+              <a:rPr lang="zh-TW" altLang="en-US" b="0" dirty="0"/>
+              <a:t>簡單說就是</a:t>
+            </a:r>
+            <a:r>
+              <a:rPr lang="zh-TW" altLang="zh-TW" b="0" dirty="0"/>
+              <a:t>提供</a:t>
+            </a:r>
+            <a:r>
+              <a:rPr lang="en-US" altLang="zh-TW" b="0" dirty="0"/>
+              <a:t>CMS</a:t>
+            </a:r>
+            <a:r>
+              <a:rPr lang="zh-TW" altLang="zh-TW" b="0" dirty="0"/>
+              <a:t>所需的裝置色彩資訊，使裝置原生色彩空間與裝置無關色彩空間之間可以進行轉換。</a:t>
+            </a:r>
+            <a:endParaRPr lang="en-US" altLang="zh-TW" b="0" dirty="0"/>
+          </a:p>
+          <a:p>
+            <a:r>
+              <a:rPr lang="zh-TW" altLang="zh-TW" dirty="0"/>
+              <a:t>ICC Profile 本身的核心功能是「描述」而不是「校正」；在典型的校正流程中，是先將 Display 校正至目標行為，再對校正後的 Display 進行 profiling，建立 ICC Profile。</a:t>
+            </a:r>
+            <a:endParaRPr lang="zh-TW" altLang="en-US" b="0" dirty="0"/>
           </a:p>
         </p:txBody>
       </p:sp>
@@ -2028,7 +2047,7 @@
           <p:cNvPr id="4" name="投影片編號版面配置區 3">
             <a:extLst>
               <a:ext uri="{FF2B5EF4-FFF2-40B4-BE49-F238E27FC236}">
-                <a16:creationId xmlns:a16="http://schemas.microsoft.com/office/drawing/2014/main" id="{513566B9-8C8D-F476-4186-FD06F269D3E2}"/>
+                <a16:creationId xmlns:a16="http://schemas.microsoft.com/office/drawing/2014/main" id="{31B50614-590C-CC48-8F4F-397D496E53D9}"/>
               </a:ext>
             </a:extLst>
           </p:cNvPr>
@@ -2080,7 +2099,7 @@
     </p:spTree>
     <p:extLst>
       <p:ext uri="{BB962C8B-B14F-4D97-AF65-F5344CB8AC3E}">
-        <p14:creationId xmlns:p14="http://schemas.microsoft.com/office/powerpoint/2010/main" val="3045617372"/>
+        <p14:creationId xmlns:p14="http://schemas.microsoft.com/office/powerpoint/2010/main" val="1729299408"/>
       </p:ext>
     </p:extLst>
   </p:cSld>
@@ -4130,7 +4149,7 @@
         <p:cNvPr id="1" name="">
           <a:extLst>
             <a:ext uri="{FF2B5EF4-FFF2-40B4-BE49-F238E27FC236}">
-              <a16:creationId xmlns:a16="http://schemas.microsoft.com/office/drawing/2014/main" id="{9F75C3F7-F131-3F7D-0332-B853C81F541B}"/>
+              <a16:creationId xmlns:a16="http://schemas.microsoft.com/office/drawing/2014/main" id="{12EB7DC1-8982-FBBF-D79C-E8A85E11B329}"/>
             </a:ext>
           </a:extLst>
         </p:cNvPr>
@@ -4150,7 +4169,7 @@
           <p:cNvPr id="2" name="投影片影像版面配置區 1">
             <a:extLst>
               <a:ext uri="{FF2B5EF4-FFF2-40B4-BE49-F238E27FC236}">
-                <a16:creationId xmlns:a16="http://schemas.microsoft.com/office/drawing/2014/main" id="{F8E069C7-B926-F35E-EA2C-86335228DDDA}"/>
+                <a16:creationId xmlns:a16="http://schemas.microsoft.com/office/drawing/2014/main" id="{747EDAF3-B8EA-0C16-8FC2-00C5C1AACCA4}"/>
               </a:ext>
             </a:extLst>
           </p:cNvPr>
@@ -4168,7 +4187,7 @@
           <p:cNvPr id="3" name="備忘稿版面配置區 2">
             <a:extLst>
               <a:ext uri="{FF2B5EF4-FFF2-40B4-BE49-F238E27FC236}">
-                <a16:creationId xmlns:a16="http://schemas.microsoft.com/office/drawing/2014/main" id="{55E942C1-E03C-D970-B419-17F1785ADDD6}"/>
+                <a16:creationId xmlns:a16="http://schemas.microsoft.com/office/drawing/2014/main" id="{2AFC5512-2ACA-40AC-FE98-A0E260C52EAF}"/>
               </a:ext>
             </a:extLst>
           </p:cNvPr>
@@ -4184,30 +4203,7 @@
           <a:bodyPr/>
           <a:lstStyle/>
           <a:p>
-            <a:r>
-              <a:rPr lang="zh-TW" altLang="en-US" b="0" dirty="0"/>
-              <a:t>簡單說就是</a:t>
-            </a:r>
-            <a:r>
-              <a:rPr lang="zh-TW" altLang="zh-TW" b="0" dirty="0"/>
-              <a:t>提供</a:t>
-            </a:r>
-            <a:r>
-              <a:rPr lang="en-US" altLang="zh-TW" b="0" dirty="0"/>
-              <a:t>CMS</a:t>
-            </a:r>
-            <a:r>
-              <a:rPr lang="zh-TW" altLang="zh-TW" b="0" dirty="0"/>
-              <a:t>所需的裝置色彩資訊，使裝置原生色彩空間與裝置無關色彩空間之間可以進行轉換。</a:t>
-            </a:r>
-            <a:endParaRPr lang="en-US" altLang="zh-TW" b="0" dirty="0"/>
-          </a:p>
-          <a:p>
-            <a:r>
-              <a:rPr lang="zh-TW" altLang="zh-TW" dirty="0"/>
-              <a:t>ICC Profile 本身的核心功能是「描述」而不是「校正」；在典型的校正流程中，是先將 Display 校正至目標行為，再對校正後的 Display 進行 profiling，建立 ICC Profile。</a:t>
-            </a:r>
-            <a:endParaRPr lang="zh-TW" altLang="en-US" b="0" dirty="0"/>
+            <a:endParaRPr lang="zh-TW" altLang="en-US" dirty="0"/>
           </a:p>
         </p:txBody>
       </p:sp>
@@ -4216,7 +4212,7 @@
           <p:cNvPr id="4" name="投影片編號版面配置區 3">
             <a:extLst>
               <a:ext uri="{FF2B5EF4-FFF2-40B4-BE49-F238E27FC236}">
-                <a16:creationId xmlns:a16="http://schemas.microsoft.com/office/drawing/2014/main" id="{31B50614-590C-CC48-8F4F-397D496E53D9}"/>
+                <a16:creationId xmlns:a16="http://schemas.microsoft.com/office/drawing/2014/main" id="{513566B9-8C8D-F476-4186-FD06F269D3E2}"/>
               </a:ext>
             </a:extLst>
           </p:cNvPr>
@@ -4268,7 +4264,7 @@
     </p:spTree>
     <p:extLst>
       <p:ext uri="{BB962C8B-B14F-4D97-AF65-F5344CB8AC3E}">
-        <p14:creationId xmlns:p14="http://schemas.microsoft.com/office/powerpoint/2010/main" val="1729299408"/>
+        <p14:creationId xmlns:p14="http://schemas.microsoft.com/office/powerpoint/2010/main" val="3045617372"/>
       </p:ext>
     </p:extLst>
   </p:cSld>
@@ -9318,7 +9314,7 @@
                 <a:ea typeface="標楷體" panose="03000509000000000000" pitchFamily="65" charset="-120"/>
                 <a:cs typeface="Times New Roman" panose="02020603050405020304" pitchFamily="18" charset="0"/>
               </a:rPr>
-              <a:t>:ICC</a:t>
+              <a:t>: ICC</a:t>
             </a:r>
             <a:r>
               <a:rPr lang="zh-TW" altLang="en-US" dirty="0">
@@ -9326,7 +9322,7 @@
                 <a:ea typeface="標楷體" panose="03000509000000000000" pitchFamily="65" charset="-120"/>
                 <a:cs typeface="Times New Roman" panose="02020603050405020304" pitchFamily="18" charset="0"/>
               </a:rPr>
-              <a:t>內的</a:t>
+              <a:t>與</a:t>
             </a:r>
             <a:r>
               <a:rPr lang="zh-TW" altLang="zh-TW" dirty="0">
@@ -9842,14 +9838,6 @@
               </a:rPr>
               <a:t>MHC2（Microsoft Hardware Calibration 2）</a:t>
             </a:r>
-            <a:r>
-              <a:rPr lang="en-US" altLang="zh-TW" sz="2000" baseline="-25000" dirty="0">
-                <a:latin typeface="Times New Roman" panose="02020603050405020304" pitchFamily="18" charset="0"/>
-                <a:ea typeface="標楷體" panose="03000509000000000000" pitchFamily="65" charset="-120"/>
-                <a:cs typeface="Times New Roman" panose="02020603050405020304" pitchFamily="18" charset="0"/>
-              </a:rPr>
-              <a:t>[5]</a:t>
-            </a:r>
             <a:endParaRPr lang="en-US" altLang="zh-TW" sz="2000" dirty="0">
               <a:latin typeface="Times New Roman" panose="02020603050405020304" pitchFamily="18" charset="0"/>
               <a:ea typeface="標楷體" panose="03000509000000000000" pitchFamily="65" charset="-120"/>
@@ -9978,7 +9966,7 @@
                 <a:latin typeface="Times New Roman" panose="02020603050405020304" pitchFamily="18" charset="0"/>
                 <a:cs typeface="Times New Roman" panose="02020603050405020304" pitchFamily="18" charset="0"/>
               </a:rPr>
-              <a:t>5</a:t>
+              <a:t>2</a:t>
             </a:r>
             <a:r>
               <a:rPr lang="zh-TW" altLang="zh-TW" dirty="0">
@@ -10044,7 +10032,7 @@
         <p:cNvPr id="1" name="">
           <a:extLst>
             <a:ext uri="{FF2B5EF4-FFF2-40B4-BE49-F238E27FC236}">
-              <a16:creationId xmlns:a16="http://schemas.microsoft.com/office/drawing/2014/main" id="{B3FA60D0-DA23-62EF-BED9-B852F2D4C346}"/>
+              <a16:creationId xmlns:a16="http://schemas.microsoft.com/office/drawing/2014/main" id="{DA799D7F-E903-4B27-15E3-697CE8ADC96F}"/>
             </a:ext>
           </a:extLst>
         </p:cNvPr>
@@ -10061,10 +10049,10 @@
       </p:grpSpPr>
       <p:sp>
         <p:nvSpPr>
-          <p:cNvPr id="8" name="文字版面配置區 6">
+          <p:cNvPr id="3" name="文字版面配置區 6">
             <a:extLst>
               <a:ext uri="{FF2B5EF4-FFF2-40B4-BE49-F238E27FC236}">
-                <a16:creationId xmlns:a16="http://schemas.microsoft.com/office/drawing/2014/main" id="{4EF1E714-37EB-F1B4-6C63-607FCFB2A157}"/>
+                <a16:creationId xmlns:a16="http://schemas.microsoft.com/office/drawing/2014/main" id="{161D35D4-6F09-EBFD-1918-7D9D97D108CE}"/>
               </a:ext>
             </a:extLst>
           </p:cNvPr>
@@ -10347,7 +10335,153 @@
               <a:buFont typeface="Noto Sans Symbols"/>
               <a:buChar char="❖"/>
             </a:pPr>
-            <a:endParaRPr lang="en-US" altLang="zh-TW" dirty="0">
+            <a:r>
+              <a:rPr lang="en-US" altLang="zh-TW" sz="2000" dirty="0">
+                <a:latin typeface="Times New Roman" panose="02020603050405020304" pitchFamily="18" charset="0"/>
+                <a:ea typeface="標楷體" panose="03000509000000000000" pitchFamily="65" charset="-120"/>
+                <a:cs typeface="Times New Roman" panose="02020603050405020304" pitchFamily="18" charset="0"/>
+              </a:rPr>
+              <a:t>VCGT/MS00</a:t>
+            </a:r>
+            <a:r>
+              <a:rPr lang="zh-TW" altLang="en-US" sz="2000" dirty="0">
+                <a:latin typeface="Times New Roman" panose="02020603050405020304" pitchFamily="18" charset="0"/>
+                <a:ea typeface="標楷體" panose="03000509000000000000" pitchFamily="65" charset="-120"/>
+                <a:cs typeface="Times New Roman" panose="02020603050405020304" pitchFamily="18" charset="0"/>
+              </a:rPr>
+              <a:t>流程圖</a:t>
+            </a:r>
+            <a:endParaRPr lang="en-US" altLang="zh-TW" sz="2000" dirty="0">
+              <a:latin typeface="Times New Roman" panose="02020603050405020304" pitchFamily="18" charset="0"/>
+              <a:ea typeface="標楷體" panose="03000509000000000000" pitchFamily="65" charset="-120"/>
+              <a:cs typeface="Times New Roman" panose="02020603050405020304" pitchFamily="18" charset="0"/>
+            </a:endParaRPr>
+          </a:p>
+          <a:p>
+            <a:pPr marL="457200" lvl="1" indent="-406400">
+              <a:spcBef>
+                <a:spcPts val="560"/>
+              </a:spcBef>
+              <a:buClr>
+                <a:schemeClr val="accent2"/>
+              </a:buClr>
+              <a:buSzPts val="2800"/>
+              <a:buFont typeface="Noto Sans Symbols"/>
+              <a:buChar char="❖"/>
+            </a:pPr>
+            <a:endParaRPr lang="en-US" altLang="zh-TW" sz="2000" dirty="0">
+              <a:latin typeface="Times New Roman" panose="02020603050405020304" pitchFamily="18" charset="0"/>
+              <a:ea typeface="標楷體" panose="03000509000000000000" pitchFamily="65" charset="-120"/>
+              <a:cs typeface="Times New Roman" panose="02020603050405020304" pitchFamily="18" charset="0"/>
+            </a:endParaRPr>
+          </a:p>
+          <a:p>
+            <a:pPr marL="457200" lvl="1" indent="-406400">
+              <a:spcBef>
+                <a:spcPts val="560"/>
+              </a:spcBef>
+              <a:buClr>
+                <a:schemeClr val="accent2"/>
+              </a:buClr>
+              <a:buSzPts val="2800"/>
+              <a:buFont typeface="Noto Sans Symbols"/>
+              <a:buChar char="❖"/>
+            </a:pPr>
+            <a:endParaRPr lang="en-US" altLang="zh-TW" sz="2000" dirty="0">
+              <a:latin typeface="Times New Roman" panose="02020603050405020304" pitchFamily="18" charset="0"/>
+              <a:ea typeface="標楷體" panose="03000509000000000000" pitchFamily="65" charset="-120"/>
+              <a:cs typeface="Times New Roman" panose="02020603050405020304" pitchFamily="18" charset="0"/>
+            </a:endParaRPr>
+          </a:p>
+          <a:p>
+            <a:pPr marL="457200" lvl="1" indent="-406400">
+              <a:spcBef>
+                <a:spcPts val="560"/>
+              </a:spcBef>
+              <a:buClr>
+                <a:schemeClr val="accent2"/>
+              </a:buClr>
+              <a:buSzPts val="2800"/>
+              <a:buFont typeface="Noto Sans Symbols"/>
+              <a:buChar char="❖"/>
+            </a:pPr>
+            <a:endParaRPr lang="en-US" altLang="zh-TW" sz="2000" dirty="0">
+              <a:latin typeface="Times New Roman" panose="02020603050405020304" pitchFamily="18" charset="0"/>
+              <a:ea typeface="標楷體" panose="03000509000000000000" pitchFamily="65" charset="-120"/>
+              <a:cs typeface="Times New Roman" panose="02020603050405020304" pitchFamily="18" charset="0"/>
+            </a:endParaRPr>
+          </a:p>
+          <a:p>
+            <a:pPr marL="457200" lvl="1" indent="-406400">
+              <a:spcBef>
+                <a:spcPts val="560"/>
+              </a:spcBef>
+              <a:buClr>
+                <a:schemeClr val="accent2"/>
+              </a:buClr>
+              <a:buSzPts val="2800"/>
+              <a:buFont typeface="Noto Sans Symbols"/>
+              <a:buChar char="❖"/>
+            </a:pPr>
+            <a:endParaRPr lang="en-US" altLang="zh-TW" sz="2000" dirty="0">
+              <a:solidFill>
+                <a:schemeClr val="tx1"/>
+              </a:solidFill>
+              <a:latin typeface="Times New Roman" panose="02020603050405020304" pitchFamily="18" charset="0"/>
+              <a:ea typeface="標楷體" panose="03000509000000000000" pitchFamily="65" charset="-120"/>
+              <a:cs typeface="Times New Roman" panose="02020603050405020304" pitchFamily="18" charset="0"/>
+            </a:endParaRPr>
+          </a:p>
+          <a:p>
+            <a:pPr marL="457200" lvl="1" indent="-406400">
+              <a:spcBef>
+                <a:spcPts val="560"/>
+              </a:spcBef>
+              <a:buClr>
+                <a:schemeClr val="accent2"/>
+              </a:buClr>
+              <a:buSzPts val="2800"/>
+              <a:buFont typeface="Noto Sans Symbols"/>
+              <a:buChar char="❖"/>
+            </a:pPr>
+            <a:r>
+              <a:rPr lang="en-US" altLang="zh-TW" sz="2000" dirty="0">
+                <a:solidFill>
+                  <a:schemeClr val="tx1"/>
+                </a:solidFill>
+                <a:latin typeface="Times New Roman" panose="02020603050405020304" pitchFamily="18" charset="0"/>
+                <a:ea typeface="標楷體" panose="03000509000000000000" pitchFamily="65" charset="-120"/>
+                <a:cs typeface="Times New Roman" panose="02020603050405020304" pitchFamily="18" charset="0"/>
+              </a:rPr>
+              <a:t>MHC2</a:t>
+            </a:r>
+            <a:r>
+              <a:rPr lang="zh-TW" altLang="en-US" sz="2000" dirty="0">
+                <a:latin typeface="Times New Roman" panose="02020603050405020304" pitchFamily="18" charset="0"/>
+                <a:ea typeface="標楷體" panose="03000509000000000000" pitchFamily="65" charset="-120"/>
+                <a:cs typeface="Times New Roman" panose="02020603050405020304" pitchFamily="18" charset="0"/>
+              </a:rPr>
+              <a:t>流程圖</a:t>
+            </a:r>
+            <a:endParaRPr lang="en-US" altLang="zh-TW" sz="2000" dirty="0">
+              <a:latin typeface="Times New Roman" panose="02020603050405020304" pitchFamily="18" charset="0"/>
+              <a:ea typeface="標楷體" panose="03000509000000000000" pitchFamily="65" charset="-120"/>
+              <a:cs typeface="Times New Roman" panose="02020603050405020304" pitchFamily="18" charset="0"/>
+            </a:endParaRPr>
+          </a:p>
+          <a:p>
+            <a:pPr marL="457200" lvl="1" indent="-406400">
+              <a:spcBef>
+                <a:spcPts val="560"/>
+              </a:spcBef>
+              <a:buClr>
+                <a:schemeClr val="accent2"/>
+              </a:buClr>
+              <a:buSzPts val="2800"/>
+              <a:buFont typeface="Noto Sans Symbols"/>
+              <a:buChar char="❖"/>
+            </a:pPr>
+            <a:endParaRPr lang="en-US" altLang="zh-TW" sz="2000" dirty="0">
               <a:solidFill>
                 <a:schemeClr val="tx1"/>
               </a:solidFill>
@@ -10363,7 +10497,7 @@
           <p:cNvPr id="10" name="標題 1">
             <a:extLst>
               <a:ext uri="{FF2B5EF4-FFF2-40B4-BE49-F238E27FC236}">
-                <a16:creationId xmlns:a16="http://schemas.microsoft.com/office/drawing/2014/main" id="{70403DB2-C02C-E0B4-BA8E-46343BF47DF7}"/>
+                <a16:creationId xmlns:a16="http://schemas.microsoft.com/office/drawing/2014/main" id="{19BC2AD8-2B49-2773-92DC-5F6F876713E0}"/>
               </a:ext>
             </a:extLst>
           </p:cNvPr>
@@ -10401,7 +10535,15 @@
                 <a:ea typeface="標楷體" panose="03000509000000000000" pitchFamily="65" charset="-120"/>
                 <a:cs typeface="Times New Roman" panose="02020603050405020304" pitchFamily="18" charset="0"/>
               </a:rPr>
-              <a:t>:</a:t>
+              <a:t>: ICC</a:t>
+            </a:r>
+            <a:r>
+              <a:rPr lang="zh-TW" altLang="en-US" dirty="0">
+                <a:latin typeface="Times New Roman" panose="02020603050405020304" pitchFamily="18" charset="0"/>
+                <a:ea typeface="標楷體" panose="03000509000000000000" pitchFamily="65" charset="-120"/>
+                <a:cs typeface="Times New Roman" panose="02020603050405020304" pitchFamily="18" charset="0"/>
+              </a:rPr>
+              <a:t>與</a:t>
             </a:r>
             <a:r>
               <a:rPr lang="zh-TW" altLang="zh-TW" dirty="0">
@@ -10409,15 +10551,7 @@
                 <a:ea typeface="標楷體" panose="03000509000000000000" pitchFamily="65" charset="-120"/>
                 <a:cs typeface="Times New Roman" panose="02020603050405020304" pitchFamily="18" charset="0"/>
               </a:rPr>
-              <a:t>Windows 的 ICC 流程</a:t>
-            </a:r>
-            <a:r>
-              <a:rPr lang="en-US" altLang="zh-TW" dirty="0">
-                <a:latin typeface="Times New Roman" panose="02020603050405020304" pitchFamily="18" charset="0"/>
-                <a:ea typeface="標楷體" panose="03000509000000000000" pitchFamily="65" charset="-120"/>
-                <a:cs typeface="Times New Roman" panose="02020603050405020304" pitchFamily="18" charset="0"/>
-              </a:rPr>
-              <a:t> </a:t>
+              <a:t>校正資料</a:t>
             </a:r>
             <a:endParaRPr lang="zh-TW" altLang="en-US" dirty="0">
               <a:latin typeface="Times New Roman" panose="02020603050405020304" pitchFamily="18" charset="0"/>
@@ -10429,10 +10563,1205 @@
       </p:sp>
       <p:sp>
         <p:nvSpPr>
-          <p:cNvPr id="12" name="矩形 11">
+          <p:cNvPr id="4" name="文字方塊 3">
             <a:extLst>
               <a:ext uri="{FF2B5EF4-FFF2-40B4-BE49-F238E27FC236}">
-                <a16:creationId xmlns:a16="http://schemas.microsoft.com/office/drawing/2014/main" id="{46E63229-17C8-FACD-109B-03F49B37A229}"/>
+                <a16:creationId xmlns:a16="http://schemas.microsoft.com/office/drawing/2014/main" id="{31FAD839-1E58-2001-020F-CFFD68E35C3C}"/>
+              </a:ext>
+            </a:extLst>
+          </p:cNvPr>
+          <p:cNvSpPr txBox="1"/>
+          <p:nvPr/>
+        </p:nvSpPr>
+        <p:spPr>
+          <a:xfrm>
+            <a:off x="1734818" y="6361271"/>
+            <a:ext cx="7744462" cy="523220"/>
+          </a:xfrm>
+          <a:prstGeom prst="rect">
+            <a:avLst/>
+          </a:prstGeom>
+          <a:noFill/>
+        </p:spPr>
+        <p:txBody>
+          <a:bodyPr wrap="square">
+            <a:spAutoFit/>
+          </a:bodyPr>
+          <a:lstStyle/>
+          <a:p>
+            <a:r>
+              <a:rPr lang="zh-TW" altLang="zh-TW" dirty="0">
+                <a:latin typeface="Times New Roman" panose="02020603050405020304" pitchFamily="18" charset="0"/>
+                <a:ea typeface="標楷體" panose="03000509000000000000" pitchFamily="65" charset="-120"/>
+                <a:cs typeface="Times New Roman" panose="02020603050405020304" pitchFamily="18" charset="0"/>
+              </a:rPr>
+              <a:t>[</a:t>
+            </a:r>
+            <a:r>
+              <a:rPr lang="en-US" altLang="zh-TW" dirty="0">
+                <a:latin typeface="Times New Roman" panose="02020603050405020304" pitchFamily="18" charset="0"/>
+                <a:ea typeface="標楷體" panose="03000509000000000000" pitchFamily="65" charset="-120"/>
+                <a:cs typeface="Times New Roman" panose="02020603050405020304" pitchFamily="18" charset="0"/>
+              </a:rPr>
+              <a:t>2</a:t>
+            </a:r>
+            <a:r>
+              <a:rPr lang="zh-TW" altLang="zh-TW" dirty="0">
+                <a:latin typeface="Times New Roman" panose="02020603050405020304" pitchFamily="18" charset="0"/>
+                <a:ea typeface="標楷體" panose="03000509000000000000" pitchFamily="65" charset="-120"/>
+                <a:cs typeface="Times New Roman" panose="02020603050405020304" pitchFamily="18" charset="0"/>
+              </a:rPr>
+              <a:t>] Microsoft, “Windows hardware display color calibration pipeline,” </a:t>
+            </a:r>
+            <a:r>
+              <a:rPr lang="zh-TW" altLang="zh-TW" i="1" dirty="0">
+                <a:latin typeface="Times New Roman" panose="02020603050405020304" pitchFamily="18" charset="0"/>
+                <a:ea typeface="標楷體" panose="03000509000000000000" pitchFamily="65" charset="-120"/>
+                <a:cs typeface="Times New Roman" panose="02020603050405020304" pitchFamily="18" charset="0"/>
+              </a:rPr>
+              <a:t>Microsoft Learn</a:t>
+            </a:r>
+            <a:r>
+              <a:rPr lang="zh-TW" altLang="zh-TW" dirty="0">
+                <a:latin typeface="Times New Roman" panose="02020603050405020304" pitchFamily="18" charset="0"/>
+                <a:ea typeface="標楷體" panose="03000509000000000000" pitchFamily="65" charset="-120"/>
+                <a:cs typeface="Times New Roman" panose="02020603050405020304" pitchFamily="18" charset="0"/>
+              </a:rPr>
+              <a:t>, Aug. 28, 2024. [Online]. Available: </a:t>
+            </a:r>
+            <a:r>
+              <a:rPr lang="zh-TW" altLang="zh-TW" dirty="0">
+                <a:latin typeface="Times New Roman" panose="02020603050405020304" pitchFamily="18" charset="0"/>
+                <a:ea typeface="標楷體" panose="03000509000000000000" pitchFamily="65" charset="-120"/>
+                <a:cs typeface="Times New Roman" panose="02020603050405020304" pitchFamily="18" charset="0"/>
+                <a:hlinkClick r:id="rId3"/>
+              </a:rPr>
+              <a:t>https://learn.microsoft.com/en-us/windows/win32/wcs/display-calibration-mhc</a:t>
+            </a:r>
+            <a:r>
+              <a:rPr lang="zh-TW" altLang="zh-TW" dirty="0">
+                <a:latin typeface="Times New Roman" panose="02020603050405020304" pitchFamily="18" charset="0"/>
+                <a:ea typeface="標楷體" panose="03000509000000000000" pitchFamily="65" charset="-120"/>
+                <a:cs typeface="Times New Roman" panose="02020603050405020304" pitchFamily="18" charset="0"/>
+              </a:rPr>
+              <a:t>. </a:t>
+            </a:r>
+            <a:endParaRPr lang="zh-TW" altLang="en-US" dirty="0">
+              <a:latin typeface="Times New Roman" panose="02020603050405020304" pitchFamily="18" charset="0"/>
+              <a:ea typeface="標楷體" panose="03000509000000000000" pitchFamily="65" charset="-120"/>
+              <a:cs typeface="Times New Roman" panose="02020603050405020304" pitchFamily="18" charset="0"/>
+            </a:endParaRPr>
+          </a:p>
+        </p:txBody>
+      </p:sp>
+      <p:pic>
+        <p:nvPicPr>
+          <p:cNvPr id="30" name="圖片 29">
+            <a:extLst>
+              <a:ext uri="{FF2B5EF4-FFF2-40B4-BE49-F238E27FC236}">
+                <a16:creationId xmlns:a16="http://schemas.microsoft.com/office/drawing/2014/main" id="{A6AB86EA-2ADD-01A2-6126-4C71201A6777}"/>
+              </a:ext>
+            </a:extLst>
+          </p:cNvPr>
+          <p:cNvPicPr>
+            <a:picLocks noChangeAspect="1"/>
+          </p:cNvPicPr>
+          <p:nvPr/>
+        </p:nvPicPr>
+        <p:blipFill>
+          <a:blip r:embed="rId4"/>
+          <a:stretch>
+            <a:fillRect/>
+          </a:stretch>
+        </p:blipFill>
+        <p:spPr>
+          <a:xfrm>
+            <a:off x="812553" y="3638568"/>
+            <a:ext cx="8567075" cy="1192632"/>
+          </a:xfrm>
+          <a:prstGeom prst="rect">
+            <a:avLst/>
+          </a:prstGeom>
+        </p:spPr>
+      </p:pic>
+      <p:pic>
+        <p:nvPicPr>
+          <p:cNvPr id="33" name="圖片 32">
+            <a:extLst>
+              <a:ext uri="{FF2B5EF4-FFF2-40B4-BE49-F238E27FC236}">
+                <a16:creationId xmlns:a16="http://schemas.microsoft.com/office/drawing/2014/main" id="{39AD4A49-7455-859B-60E7-1808BA856F7A}"/>
+              </a:ext>
+            </a:extLst>
+          </p:cNvPr>
+          <p:cNvPicPr>
+            <a:picLocks noChangeAspect="1"/>
+          </p:cNvPicPr>
+          <p:nvPr/>
+        </p:nvPicPr>
+        <p:blipFill>
+          <a:blip r:embed="rId5"/>
+          <a:stretch>
+            <a:fillRect/>
+          </a:stretch>
+        </p:blipFill>
+        <p:spPr>
+          <a:xfrm>
+            <a:off x="812553" y="4944071"/>
+            <a:ext cx="8567075" cy="1304329"/>
+          </a:xfrm>
+          <a:prstGeom prst="rect">
+            <a:avLst/>
+          </a:prstGeom>
+        </p:spPr>
+      </p:pic>
+      <p:grpSp>
+        <p:nvGrpSpPr>
+          <p:cNvPr id="5" name="群組 4">
+            <a:extLst>
+              <a:ext uri="{FF2B5EF4-FFF2-40B4-BE49-F238E27FC236}">
+                <a16:creationId xmlns:a16="http://schemas.microsoft.com/office/drawing/2014/main" id="{56A3B310-6A7B-3F10-03D3-D5F024F3CC49}"/>
+              </a:ext>
+            </a:extLst>
+          </p:cNvPr>
+          <p:cNvGrpSpPr/>
+          <p:nvPr/>
+        </p:nvGrpSpPr>
+        <p:grpSpPr>
+          <a:xfrm>
+            <a:off x="812553" y="1808025"/>
+            <a:ext cx="8567076" cy="1302785"/>
+            <a:chOff x="609602" y="2042327"/>
+            <a:chExt cx="8686797" cy="1320991"/>
+          </a:xfrm>
+        </p:grpSpPr>
+        <p:sp>
+          <p:nvSpPr>
+            <p:cNvPr id="6" name="矩形 5">
+              <a:extLst>
+                <a:ext uri="{FF2B5EF4-FFF2-40B4-BE49-F238E27FC236}">
+                  <a16:creationId xmlns:a16="http://schemas.microsoft.com/office/drawing/2014/main" id="{4642A86A-FC43-2EAF-96D1-1331549B29AC}"/>
+                </a:ext>
+              </a:extLst>
+            </p:cNvPr>
+            <p:cNvSpPr/>
+            <p:nvPr/>
+          </p:nvSpPr>
+          <p:spPr>
+            <a:xfrm>
+              <a:off x="609602" y="2443838"/>
+              <a:ext cx="1747520" cy="919480"/>
+            </a:xfrm>
+            <a:prstGeom prst="rect">
+              <a:avLst/>
+            </a:prstGeom>
+            <a:solidFill>
+              <a:schemeClr val="bg1"/>
+            </a:solidFill>
+            <a:ln>
+              <a:solidFill>
+                <a:schemeClr val="tx1"/>
+              </a:solidFill>
+            </a:ln>
+          </p:spPr>
+          <p:style>
+            <a:lnRef idx="2">
+              <a:schemeClr val="accent1">
+                <a:shade val="15000"/>
+              </a:schemeClr>
+            </a:lnRef>
+            <a:fillRef idx="1">
+              <a:schemeClr val="accent1"/>
+            </a:fillRef>
+            <a:effectRef idx="0">
+              <a:schemeClr val="accent1"/>
+            </a:effectRef>
+            <a:fontRef idx="minor">
+              <a:schemeClr val="lt1"/>
+            </a:fontRef>
+          </p:style>
+          <p:txBody>
+            <a:bodyPr rtlCol="0" anchor="ctr"/>
+            <a:lstStyle/>
+            <a:p>
+              <a:pPr algn="ctr"/>
+              <a:r>
+                <a:rPr lang="zh-TW" altLang="zh-TW" sz="1600" dirty="0">
+                  <a:solidFill>
+                    <a:schemeClr val="tx1"/>
+                  </a:solidFill>
+                  <a:latin typeface="Times New Roman" panose="02020603050405020304" pitchFamily="18" charset="0"/>
+                  <a:ea typeface="標楷體" panose="03000509000000000000" pitchFamily="65" charset="-120"/>
+                  <a:cs typeface="Times New Roman" panose="02020603050405020304" pitchFamily="18" charset="0"/>
+                </a:rPr>
+                <a:t>Windows Display Calibration Loader</a:t>
+              </a:r>
+              <a:endParaRPr lang="zh-TW" altLang="en-US" sz="1600" dirty="0">
+                <a:solidFill>
+                  <a:schemeClr val="tx1"/>
+                </a:solidFill>
+                <a:latin typeface="Times New Roman" panose="02020603050405020304" pitchFamily="18" charset="0"/>
+                <a:ea typeface="標楷體" panose="03000509000000000000" pitchFamily="65" charset="-120"/>
+                <a:cs typeface="Times New Roman" panose="02020603050405020304" pitchFamily="18" charset="0"/>
+              </a:endParaRPr>
+            </a:p>
+          </p:txBody>
+        </p:sp>
+        <p:sp>
+          <p:nvSpPr>
+            <p:cNvPr id="7" name="矩形 6">
+              <a:extLst>
+                <a:ext uri="{FF2B5EF4-FFF2-40B4-BE49-F238E27FC236}">
+                  <a16:creationId xmlns:a16="http://schemas.microsoft.com/office/drawing/2014/main" id="{56536FC2-9F3A-F481-C2A6-72416A5FA411}"/>
+                </a:ext>
+              </a:extLst>
+            </p:cNvPr>
+            <p:cNvSpPr/>
+            <p:nvPr/>
+          </p:nvSpPr>
+          <p:spPr>
+            <a:xfrm>
+              <a:off x="2854961" y="2443838"/>
+              <a:ext cx="1747520" cy="919480"/>
+            </a:xfrm>
+            <a:prstGeom prst="rect">
+              <a:avLst/>
+            </a:prstGeom>
+            <a:solidFill>
+              <a:schemeClr val="bg1"/>
+            </a:solidFill>
+            <a:ln>
+              <a:solidFill>
+                <a:schemeClr val="tx1"/>
+              </a:solidFill>
+            </a:ln>
+          </p:spPr>
+          <p:style>
+            <a:lnRef idx="2">
+              <a:schemeClr val="accent1">
+                <a:shade val="15000"/>
+              </a:schemeClr>
+            </a:lnRef>
+            <a:fillRef idx="1">
+              <a:schemeClr val="accent1"/>
+            </a:fillRef>
+            <a:effectRef idx="0">
+              <a:schemeClr val="accent1"/>
+            </a:effectRef>
+            <a:fontRef idx="minor">
+              <a:schemeClr val="lt1"/>
+            </a:fontRef>
+          </p:style>
+          <p:txBody>
+            <a:bodyPr rtlCol="0" anchor="ctr"/>
+            <a:lstStyle/>
+            <a:p>
+              <a:pPr algn="ctr"/>
+              <a:r>
+                <a:rPr lang="zh-TW" altLang="zh-TW" sz="1600" dirty="0">
+                  <a:solidFill>
+                    <a:schemeClr val="tx1"/>
+                  </a:solidFill>
+                  <a:latin typeface="Times New Roman" panose="02020603050405020304" pitchFamily="18" charset="0"/>
+                  <a:ea typeface="標楷體" panose="03000509000000000000" pitchFamily="65" charset="-120"/>
+                  <a:cs typeface="Times New Roman" panose="02020603050405020304" pitchFamily="18" charset="0"/>
+                </a:rPr>
+                <a:t>Gamma Ramp</a:t>
+              </a:r>
+              <a:endParaRPr lang="zh-TW" altLang="en-US" sz="1600" dirty="0">
+                <a:solidFill>
+                  <a:schemeClr val="tx1"/>
+                </a:solidFill>
+                <a:latin typeface="Times New Roman" panose="02020603050405020304" pitchFamily="18" charset="0"/>
+                <a:ea typeface="標楷體" panose="03000509000000000000" pitchFamily="65" charset="-120"/>
+                <a:cs typeface="Times New Roman" panose="02020603050405020304" pitchFamily="18" charset="0"/>
+              </a:endParaRPr>
+            </a:p>
+          </p:txBody>
+        </p:sp>
+        <p:sp>
+          <p:nvSpPr>
+            <p:cNvPr id="8" name="矩形 7">
+              <a:extLst>
+                <a:ext uri="{FF2B5EF4-FFF2-40B4-BE49-F238E27FC236}">
+                  <a16:creationId xmlns:a16="http://schemas.microsoft.com/office/drawing/2014/main" id="{40DCE551-06B4-E071-C23C-EDE269E74CEA}"/>
+                </a:ext>
+              </a:extLst>
+            </p:cNvPr>
+            <p:cNvSpPr/>
+            <p:nvPr/>
+          </p:nvSpPr>
+          <p:spPr>
+            <a:xfrm>
+              <a:off x="5190143" y="2443838"/>
+              <a:ext cx="1747520" cy="919480"/>
+            </a:xfrm>
+            <a:prstGeom prst="rect">
+              <a:avLst/>
+            </a:prstGeom>
+            <a:solidFill>
+              <a:schemeClr val="bg1"/>
+            </a:solidFill>
+            <a:ln>
+              <a:solidFill>
+                <a:schemeClr val="tx1"/>
+              </a:solidFill>
+            </a:ln>
+          </p:spPr>
+          <p:style>
+            <a:lnRef idx="2">
+              <a:schemeClr val="accent1">
+                <a:shade val="15000"/>
+              </a:schemeClr>
+            </a:lnRef>
+            <a:fillRef idx="1">
+              <a:schemeClr val="accent1"/>
+            </a:fillRef>
+            <a:effectRef idx="0">
+              <a:schemeClr val="accent1"/>
+            </a:effectRef>
+            <a:fontRef idx="minor">
+              <a:schemeClr val="lt1"/>
+            </a:fontRef>
+          </p:style>
+          <p:txBody>
+            <a:bodyPr rtlCol="0" anchor="ctr"/>
+            <a:lstStyle/>
+            <a:p>
+              <a:pPr algn="ctr"/>
+              <a:r>
+                <a:rPr lang="zh-TW" altLang="zh-TW" sz="1600" dirty="0">
+                  <a:solidFill>
+                    <a:schemeClr val="tx1"/>
+                  </a:solidFill>
+                  <a:latin typeface="Times New Roman" panose="02020603050405020304" pitchFamily="18" charset="0"/>
+                  <a:ea typeface="標楷體" panose="03000509000000000000" pitchFamily="65" charset="-120"/>
+                  <a:cs typeface="Times New Roman" panose="02020603050405020304" pitchFamily="18" charset="0"/>
+                </a:rPr>
+                <a:t>DAC</a:t>
+              </a:r>
+              <a:endParaRPr lang="zh-TW" altLang="en-US" sz="1600" dirty="0">
+                <a:solidFill>
+                  <a:schemeClr val="tx1"/>
+                </a:solidFill>
+                <a:latin typeface="Times New Roman" panose="02020603050405020304" pitchFamily="18" charset="0"/>
+                <a:ea typeface="標楷體" panose="03000509000000000000" pitchFamily="65" charset="-120"/>
+                <a:cs typeface="Times New Roman" panose="02020603050405020304" pitchFamily="18" charset="0"/>
+              </a:endParaRPr>
+            </a:p>
+          </p:txBody>
+        </p:sp>
+        <p:sp>
+          <p:nvSpPr>
+            <p:cNvPr id="9" name="矩形 8">
+              <a:extLst>
+                <a:ext uri="{FF2B5EF4-FFF2-40B4-BE49-F238E27FC236}">
+                  <a16:creationId xmlns:a16="http://schemas.microsoft.com/office/drawing/2014/main" id="{B5D1CBB8-5BA9-F291-BAC3-50A74FEE2ED2}"/>
+                </a:ext>
+              </a:extLst>
+            </p:cNvPr>
+            <p:cNvSpPr/>
+            <p:nvPr/>
+          </p:nvSpPr>
+          <p:spPr>
+            <a:xfrm>
+              <a:off x="7548879" y="2443838"/>
+              <a:ext cx="1747520" cy="919480"/>
+            </a:xfrm>
+            <a:prstGeom prst="rect">
+              <a:avLst/>
+            </a:prstGeom>
+            <a:solidFill>
+              <a:schemeClr val="bg1"/>
+            </a:solidFill>
+            <a:ln>
+              <a:solidFill>
+                <a:schemeClr val="tx1"/>
+              </a:solidFill>
+            </a:ln>
+          </p:spPr>
+          <p:style>
+            <a:lnRef idx="2">
+              <a:schemeClr val="accent1">
+                <a:shade val="15000"/>
+              </a:schemeClr>
+            </a:lnRef>
+            <a:fillRef idx="1">
+              <a:schemeClr val="accent1"/>
+            </a:fillRef>
+            <a:effectRef idx="0">
+              <a:schemeClr val="accent1"/>
+            </a:effectRef>
+            <a:fontRef idx="minor">
+              <a:schemeClr val="lt1"/>
+            </a:fontRef>
+          </p:style>
+          <p:txBody>
+            <a:bodyPr rtlCol="0" anchor="ctr"/>
+            <a:lstStyle/>
+            <a:p>
+              <a:pPr algn="ctr"/>
+              <a:r>
+                <a:rPr lang="zh-TW" altLang="zh-TW" sz="1600" dirty="0">
+                  <a:solidFill>
+                    <a:schemeClr val="tx1"/>
+                  </a:solidFill>
+                  <a:latin typeface="Times New Roman" panose="02020603050405020304" pitchFamily="18" charset="0"/>
+                  <a:ea typeface="標楷體" panose="03000509000000000000" pitchFamily="65" charset="-120"/>
+                  <a:cs typeface="Times New Roman" panose="02020603050405020304" pitchFamily="18" charset="0"/>
+                </a:rPr>
+                <a:t>Displa</a:t>
+              </a:r>
+              <a:r>
+                <a:rPr lang="en-US" altLang="zh-TW" sz="1600" dirty="0">
+                  <a:solidFill>
+                    <a:schemeClr val="tx1"/>
+                  </a:solidFill>
+                  <a:latin typeface="Times New Roman" panose="02020603050405020304" pitchFamily="18" charset="0"/>
+                  <a:ea typeface="標楷體" panose="03000509000000000000" pitchFamily="65" charset="-120"/>
+                  <a:cs typeface="Times New Roman" panose="02020603050405020304" pitchFamily="18" charset="0"/>
+                </a:rPr>
+                <a:t>y</a:t>
+              </a:r>
+              <a:endParaRPr lang="zh-TW" altLang="en-US" sz="1600" dirty="0">
+                <a:solidFill>
+                  <a:schemeClr val="tx1"/>
+                </a:solidFill>
+                <a:latin typeface="Times New Roman" panose="02020603050405020304" pitchFamily="18" charset="0"/>
+                <a:ea typeface="標楷體" panose="03000509000000000000" pitchFamily="65" charset="-120"/>
+                <a:cs typeface="Times New Roman" panose="02020603050405020304" pitchFamily="18" charset="0"/>
+              </a:endParaRPr>
+            </a:p>
+          </p:txBody>
+        </p:sp>
+        <p:sp>
+          <p:nvSpPr>
+            <p:cNvPr id="11" name="矩形 10">
+              <a:extLst>
+                <a:ext uri="{FF2B5EF4-FFF2-40B4-BE49-F238E27FC236}">
+                  <a16:creationId xmlns:a16="http://schemas.microsoft.com/office/drawing/2014/main" id="{DCD17EEB-CD4E-69B7-71BB-6A428E5B4CD5}"/>
+                </a:ext>
+              </a:extLst>
+            </p:cNvPr>
+            <p:cNvSpPr/>
+            <p:nvPr/>
+          </p:nvSpPr>
+          <p:spPr>
+            <a:xfrm>
+              <a:off x="1483362" y="2042327"/>
+              <a:ext cx="1352674" cy="343285"/>
+            </a:xfrm>
+            <a:prstGeom prst="rect">
+              <a:avLst/>
+            </a:prstGeom>
+            <a:noFill/>
+          </p:spPr>
+          <p:txBody>
+            <a:bodyPr wrap="square" lIns="91440" tIns="45720" rIns="91440" bIns="45720">
+              <a:spAutoFit/>
+            </a:bodyPr>
+            <a:lstStyle/>
+            <a:p>
+              <a:pPr algn="ctr"/>
+              <a:r>
+                <a:rPr lang="en-US" altLang="zh-TW" sz="1600" b="0" cap="none" spc="0" dirty="0">
+                  <a:ln w="0"/>
+                  <a:solidFill>
+                    <a:schemeClr val="tx1"/>
+                  </a:solidFill>
+                  <a:effectLst>
+                    <a:outerShdw blurRad="38100" dist="19050" dir="2700000" algn="tl" rotWithShape="0">
+                      <a:schemeClr val="dk1">
+                        <a:alpha val="40000"/>
+                      </a:schemeClr>
+                    </a:outerShdw>
+                  </a:effectLst>
+                  <a:latin typeface="Times New Roman" panose="02020603050405020304" pitchFamily="18" charset="0"/>
+                  <a:ea typeface="標楷體" panose="03000509000000000000" pitchFamily="65" charset="-120"/>
+                  <a:cs typeface="Times New Roman" panose="02020603050405020304" pitchFamily="18" charset="0"/>
+                </a:rPr>
+                <a:t>VCGT/MS00</a:t>
+              </a:r>
+              <a:endParaRPr lang="zh-TW" altLang="en-US" sz="1600" b="0" cap="none" spc="0" dirty="0">
+                <a:ln w="0"/>
+                <a:solidFill>
+                  <a:schemeClr val="tx1"/>
+                </a:solidFill>
+                <a:effectLst>
+                  <a:outerShdw blurRad="38100" dist="19050" dir="2700000" algn="tl" rotWithShape="0">
+                    <a:schemeClr val="dk1">
+                      <a:alpha val="40000"/>
+                    </a:schemeClr>
+                  </a:outerShdw>
+                </a:effectLst>
+                <a:latin typeface="Times New Roman" panose="02020603050405020304" pitchFamily="18" charset="0"/>
+                <a:ea typeface="標楷體" panose="03000509000000000000" pitchFamily="65" charset="-120"/>
+                <a:cs typeface="Times New Roman" panose="02020603050405020304" pitchFamily="18" charset="0"/>
+              </a:endParaRPr>
+            </a:p>
+          </p:txBody>
+        </p:sp>
+        <p:cxnSp>
+          <p:nvCxnSpPr>
+            <p:cNvPr id="12" name="直線單箭頭接點 11">
+              <a:extLst>
+                <a:ext uri="{FF2B5EF4-FFF2-40B4-BE49-F238E27FC236}">
+                  <a16:creationId xmlns:a16="http://schemas.microsoft.com/office/drawing/2014/main" id="{9969ED2C-45EF-25F3-1394-5600F62400AE}"/>
+                </a:ext>
+              </a:extLst>
+            </p:cNvPr>
+            <p:cNvCxnSpPr>
+              <a:stCxn id="6" idx="3"/>
+              <a:endCxn id="7" idx="1"/>
+            </p:cNvCxnSpPr>
+            <p:nvPr/>
+          </p:nvCxnSpPr>
+          <p:spPr>
+            <a:xfrm>
+              <a:off x="2357122" y="2903578"/>
+              <a:ext cx="497839" cy="0"/>
+            </a:xfrm>
+            <a:prstGeom prst="straightConnector1">
+              <a:avLst/>
+            </a:prstGeom>
+            <a:ln w="19050" cap="flat" cmpd="sng" algn="ctr">
+              <a:solidFill>
+                <a:schemeClr val="dk1"/>
+              </a:solidFill>
+              <a:prstDash val="solid"/>
+              <a:round/>
+              <a:headEnd type="none" w="med" len="med"/>
+              <a:tailEnd type="arrow" w="med" len="med"/>
+            </a:ln>
+          </p:spPr>
+          <p:style>
+            <a:lnRef idx="0">
+              <a:scrgbClr r="0" g="0" b="0"/>
+            </a:lnRef>
+            <a:fillRef idx="0">
+              <a:scrgbClr r="0" g="0" b="0"/>
+            </a:fillRef>
+            <a:effectRef idx="0">
+              <a:scrgbClr r="0" g="0" b="0"/>
+            </a:effectRef>
+            <a:fontRef idx="minor">
+              <a:schemeClr val="tx1"/>
+            </a:fontRef>
+          </p:style>
+        </p:cxnSp>
+        <p:cxnSp>
+          <p:nvCxnSpPr>
+            <p:cNvPr id="13" name="直線單箭頭接點 12">
+              <a:extLst>
+                <a:ext uri="{FF2B5EF4-FFF2-40B4-BE49-F238E27FC236}">
+                  <a16:creationId xmlns:a16="http://schemas.microsoft.com/office/drawing/2014/main" id="{1AC56062-280E-C720-F432-3A262E194D70}"/>
+                </a:ext>
+              </a:extLst>
+            </p:cNvPr>
+            <p:cNvCxnSpPr>
+              <a:cxnSpLocks/>
+              <a:stCxn id="7" idx="3"/>
+              <a:endCxn id="8" idx="1"/>
+            </p:cNvCxnSpPr>
+            <p:nvPr/>
+          </p:nvCxnSpPr>
+          <p:spPr>
+            <a:xfrm>
+              <a:off x="4602481" y="2903578"/>
+              <a:ext cx="587662" cy="0"/>
+            </a:xfrm>
+            <a:prstGeom prst="straightConnector1">
+              <a:avLst/>
+            </a:prstGeom>
+            <a:ln w="19050" cap="flat" cmpd="sng" algn="ctr">
+              <a:solidFill>
+                <a:schemeClr val="dk1"/>
+              </a:solidFill>
+              <a:prstDash val="solid"/>
+              <a:round/>
+              <a:headEnd type="none" w="med" len="med"/>
+              <a:tailEnd type="arrow" w="med" len="med"/>
+            </a:ln>
+          </p:spPr>
+          <p:style>
+            <a:lnRef idx="0">
+              <a:scrgbClr r="0" g="0" b="0"/>
+            </a:lnRef>
+            <a:fillRef idx="0">
+              <a:scrgbClr r="0" g="0" b="0"/>
+            </a:fillRef>
+            <a:effectRef idx="0">
+              <a:scrgbClr r="0" g="0" b="0"/>
+            </a:effectRef>
+            <a:fontRef idx="minor">
+              <a:schemeClr val="tx1"/>
+            </a:fontRef>
+          </p:style>
+        </p:cxnSp>
+        <p:cxnSp>
+          <p:nvCxnSpPr>
+            <p:cNvPr id="14" name="直線單箭頭接點 13">
+              <a:extLst>
+                <a:ext uri="{FF2B5EF4-FFF2-40B4-BE49-F238E27FC236}">
+                  <a16:creationId xmlns:a16="http://schemas.microsoft.com/office/drawing/2014/main" id="{0C105470-4C73-0E37-6049-70A2667DC6FD}"/>
+                </a:ext>
+              </a:extLst>
+            </p:cNvPr>
+            <p:cNvCxnSpPr>
+              <a:cxnSpLocks/>
+            </p:cNvCxnSpPr>
+            <p:nvPr/>
+          </p:nvCxnSpPr>
+          <p:spPr>
+            <a:xfrm>
+              <a:off x="1483362" y="2085481"/>
+              <a:ext cx="0" cy="358357"/>
+            </a:xfrm>
+            <a:prstGeom prst="straightConnector1">
+              <a:avLst/>
+            </a:prstGeom>
+            <a:ln w="19050" cap="flat" cmpd="sng" algn="ctr">
+              <a:solidFill>
+                <a:schemeClr val="dk1"/>
+              </a:solidFill>
+              <a:prstDash val="solid"/>
+              <a:round/>
+              <a:headEnd type="none" w="med" len="med"/>
+              <a:tailEnd type="arrow" w="med" len="med"/>
+            </a:ln>
+          </p:spPr>
+          <p:style>
+            <a:lnRef idx="0">
+              <a:scrgbClr r="0" g="0" b="0"/>
+            </a:lnRef>
+            <a:fillRef idx="0">
+              <a:scrgbClr r="0" g="0" b="0"/>
+            </a:fillRef>
+            <a:effectRef idx="0">
+              <a:scrgbClr r="0" g="0" b="0"/>
+            </a:effectRef>
+            <a:fontRef idx="minor">
+              <a:schemeClr val="tx1"/>
+            </a:fontRef>
+          </p:style>
+        </p:cxnSp>
+        <p:cxnSp>
+          <p:nvCxnSpPr>
+            <p:cNvPr id="15" name="直線單箭頭接點 14">
+              <a:extLst>
+                <a:ext uri="{FF2B5EF4-FFF2-40B4-BE49-F238E27FC236}">
+                  <a16:creationId xmlns:a16="http://schemas.microsoft.com/office/drawing/2014/main" id="{7F27D7D5-15AF-E272-3A29-2FA9F78EE03D}"/>
+                </a:ext>
+              </a:extLst>
+            </p:cNvPr>
+            <p:cNvCxnSpPr>
+              <a:cxnSpLocks/>
+              <a:stCxn id="8" idx="3"/>
+              <a:endCxn id="9" idx="1"/>
+            </p:cNvCxnSpPr>
+            <p:nvPr/>
+          </p:nvCxnSpPr>
+          <p:spPr>
+            <a:xfrm>
+              <a:off x="6937663" y="2903578"/>
+              <a:ext cx="611216" cy="0"/>
+            </a:xfrm>
+            <a:prstGeom prst="straightConnector1">
+              <a:avLst/>
+            </a:prstGeom>
+            <a:ln w="19050" cap="flat" cmpd="sng" algn="ctr">
+              <a:solidFill>
+                <a:schemeClr val="dk1"/>
+              </a:solidFill>
+              <a:prstDash val="solid"/>
+              <a:round/>
+              <a:headEnd type="none" w="med" len="med"/>
+              <a:tailEnd type="arrow" w="med" len="med"/>
+            </a:ln>
+          </p:spPr>
+          <p:style>
+            <a:lnRef idx="0">
+              <a:scrgbClr r="0" g="0" b="0"/>
+            </a:lnRef>
+            <a:fillRef idx="0">
+              <a:scrgbClr r="0" g="0" b="0"/>
+            </a:fillRef>
+            <a:effectRef idx="0">
+              <a:scrgbClr r="0" g="0" b="0"/>
+            </a:effectRef>
+            <a:fontRef idx="minor">
+              <a:schemeClr val="tx1"/>
+            </a:fontRef>
+          </p:style>
+        </p:cxnSp>
+      </p:grpSp>
+    </p:spTree>
+    <p:extLst>
+      <p:ext uri="{BB962C8B-B14F-4D97-AF65-F5344CB8AC3E}">
+        <p14:creationId xmlns:p14="http://schemas.microsoft.com/office/powerpoint/2010/main" val="483395619"/>
+      </p:ext>
+    </p:extLst>
+  </p:cSld>
+  <p:clrMapOvr>
+    <a:masterClrMapping/>
+  </p:clrMapOvr>
+</p:sld>
+</file>
+
+<file path=ppt/slides/slide12.xml><?xml version="1.0" encoding="utf-8"?>
+<p:sld xmlns:a="http://schemas.openxmlformats.org/drawingml/2006/main" xmlns:r="http://schemas.openxmlformats.org/officeDocument/2006/relationships" xmlns:p="http://schemas.openxmlformats.org/presentationml/2006/main" show="0">
+  <p:cSld>
+    <p:spTree>
+      <p:nvGrpSpPr>
+        <p:cNvPr id="1" name="">
+          <a:extLst>
+            <a:ext uri="{FF2B5EF4-FFF2-40B4-BE49-F238E27FC236}">
+              <a16:creationId xmlns:a16="http://schemas.microsoft.com/office/drawing/2014/main" id="{00E3FA89-4E74-50B1-9E1F-3455B72FC7C8}"/>
+            </a:ext>
+          </a:extLst>
+        </p:cNvPr>
+        <p:cNvGrpSpPr/>
+        <p:nvPr/>
+      </p:nvGrpSpPr>
+      <p:grpSpPr>
+        <a:xfrm>
+          <a:off x="0" y="0"/>
+          <a:ext cx="0" cy="0"/>
+          <a:chOff x="0" y="0"/>
+          <a:chExt cx="0" cy="0"/>
+        </a:xfrm>
+      </p:grpSpPr>
+      <p:sp>
+        <p:nvSpPr>
+          <p:cNvPr id="5" name="標題 1">
+            <a:extLst>
+              <a:ext uri="{FF2B5EF4-FFF2-40B4-BE49-F238E27FC236}">
+                <a16:creationId xmlns:a16="http://schemas.microsoft.com/office/drawing/2014/main" id="{5A496009-97E3-5EBF-303F-885B565890A2}"/>
+              </a:ext>
+            </a:extLst>
+          </p:cNvPr>
+          <p:cNvSpPr>
+            <a:spLocks noGrp="1"/>
+          </p:cNvSpPr>
+          <p:nvPr>
+            <p:ph type="title"/>
+          </p:nvPr>
+        </p:nvSpPr>
+        <p:spPr>
+          <a:xfrm>
+            <a:off x="609602" y="609600"/>
+            <a:ext cx="8077200" cy="533400"/>
+          </a:xfrm>
+        </p:spPr>
+        <p:txBody>
+          <a:bodyPr/>
+          <a:lstStyle/>
+          <a:p>
+            <a:r>
+              <a:rPr lang="zh-TW" altLang="en-US" dirty="0">
+                <a:latin typeface="Times New Roman" panose="02020603050405020304" pitchFamily="18" charset="0"/>
+                <a:ea typeface="標楷體" panose="03000509000000000000" pitchFamily="65" charset="-120"/>
+                <a:cs typeface="Times New Roman" panose="02020603050405020304" pitchFamily="18" charset="0"/>
+              </a:rPr>
+              <a:t>本次進度</a:t>
+            </a:r>
+            <a:r>
+              <a:rPr lang="en-US" altLang="zh-TW" dirty="0">
+                <a:latin typeface="Times New Roman" panose="02020603050405020304" pitchFamily="18" charset="0"/>
+                <a:ea typeface="標楷體" panose="03000509000000000000" pitchFamily="65" charset="-120"/>
+                <a:cs typeface="Times New Roman" panose="02020603050405020304" pitchFamily="18" charset="0"/>
+              </a:rPr>
+              <a:t>: ICC</a:t>
+            </a:r>
+            <a:r>
+              <a:rPr lang="zh-TW" altLang="en-US" dirty="0">
+                <a:latin typeface="Times New Roman" panose="02020603050405020304" pitchFamily="18" charset="0"/>
+                <a:ea typeface="標楷體" panose="03000509000000000000" pitchFamily="65" charset="-120"/>
+                <a:cs typeface="Times New Roman" panose="02020603050405020304" pitchFamily="18" charset="0"/>
+              </a:rPr>
+              <a:t>與</a:t>
+            </a:r>
+            <a:r>
+              <a:rPr lang="zh-TW" altLang="zh-TW" dirty="0">
+                <a:latin typeface="Times New Roman" panose="02020603050405020304" pitchFamily="18" charset="0"/>
+                <a:ea typeface="標楷體" panose="03000509000000000000" pitchFamily="65" charset="-120"/>
+                <a:cs typeface="Times New Roman" panose="02020603050405020304" pitchFamily="18" charset="0"/>
+              </a:rPr>
+              <a:t>校正資料</a:t>
+            </a:r>
+            <a:endParaRPr lang="zh-TW" altLang="en-US" dirty="0">
+              <a:latin typeface="Times New Roman" panose="02020603050405020304" pitchFamily="18" charset="0"/>
+              <a:ea typeface="標楷體" panose="03000509000000000000" pitchFamily="65" charset="-120"/>
+              <a:cs typeface="Times New Roman" panose="02020603050405020304" pitchFamily="18" charset="0"/>
+            </a:endParaRPr>
+          </a:p>
+        </p:txBody>
+      </p:sp>
+      <p:sp>
+        <p:nvSpPr>
+          <p:cNvPr id="8" name="文字版面配置區 6">
+            <a:extLst>
+              <a:ext uri="{FF2B5EF4-FFF2-40B4-BE49-F238E27FC236}">
+                <a16:creationId xmlns:a16="http://schemas.microsoft.com/office/drawing/2014/main" id="{195C21E2-F9E7-4DB1-C25F-84B88D0BB972}"/>
+              </a:ext>
+            </a:extLst>
+          </p:cNvPr>
+          <p:cNvSpPr txBox="1"/>
+          <p:nvPr/>
+        </p:nvSpPr>
+        <p:spPr>
+          <a:xfrm>
+            <a:off x="609602" y="1223724"/>
+            <a:ext cx="8686796" cy="4700685"/>
+          </a:xfrm>
+          <a:prstGeom prst="rect">
+            <a:avLst/>
+          </a:prstGeom>
+          <a:noFill/>
+          <a:ln>
+            <a:noFill/>
+          </a:ln>
+        </p:spPr>
+        <p:txBody>
+          <a:bodyPr spcFirstLastPara="1" wrap="square" lIns="91425" tIns="45700" rIns="91425" bIns="45700" anchor="t" anchorCtr="0">
+            <a:noAutofit/>
+          </a:bodyPr>
+          <a:lstStyle>
+            <a:defPPr marR="0" lvl="0" algn="l" rtl="0">
+              <a:lnSpc>
+                <a:spcPct val="100000"/>
+              </a:lnSpc>
+              <a:spcBef>
+                <a:spcPts val="0"/>
+              </a:spcBef>
+              <a:spcAft>
+                <a:spcPts val="0"/>
+              </a:spcAft>
+            </a:defPPr>
+            <a:lvl1pPr marL="457200" marR="0" lvl="0" indent="-406400" algn="l" rtl="0">
+              <a:lnSpc>
+                <a:spcPct val="100000"/>
+              </a:lnSpc>
+              <a:spcBef>
+                <a:spcPts val="560"/>
+              </a:spcBef>
+              <a:spcAft>
+                <a:spcPts val="0"/>
+              </a:spcAft>
+              <a:buClr>
+                <a:schemeClr val="accent2"/>
+              </a:buClr>
+              <a:buSzPts val="2800"/>
+              <a:buFont typeface="Noto Sans Symbols"/>
+              <a:buChar char="❖"/>
+              <a:defRPr sz="2800" b="0" i="0" u="none" strike="noStrike" cap="none">
+                <a:solidFill>
+                  <a:schemeClr val="dk1"/>
+                </a:solidFill>
+                <a:latin typeface="Times New Roman"/>
+                <a:ea typeface="Times New Roman"/>
+                <a:cs typeface="Times New Roman"/>
+                <a:sym typeface="Times New Roman"/>
+              </a:defRPr>
+            </a:lvl1pPr>
+            <a:lvl2pPr marL="914400" marR="0" lvl="1" indent="-381000" algn="l" rtl="0">
+              <a:lnSpc>
+                <a:spcPct val="100000"/>
+              </a:lnSpc>
+              <a:spcBef>
+                <a:spcPts val="480"/>
+              </a:spcBef>
+              <a:spcAft>
+                <a:spcPts val="0"/>
+              </a:spcAft>
+              <a:buClr>
+                <a:srgbClr val="FF5050"/>
+              </a:buClr>
+              <a:buSzPts val="2400"/>
+              <a:buFont typeface="Noto Sans Symbols"/>
+              <a:buChar char="▪"/>
+              <a:defRPr sz="2400" b="0" i="0" u="none" strike="noStrike" cap="none">
+                <a:solidFill>
+                  <a:schemeClr val="dk1"/>
+                </a:solidFill>
+                <a:latin typeface="Times New Roman"/>
+                <a:ea typeface="Times New Roman"/>
+                <a:cs typeface="Times New Roman"/>
+                <a:sym typeface="Times New Roman"/>
+              </a:defRPr>
+            </a:lvl2pPr>
+            <a:lvl3pPr marL="1371600" marR="0" lvl="2" indent="-355600" algn="l" rtl="0">
+              <a:lnSpc>
+                <a:spcPct val="100000"/>
+              </a:lnSpc>
+              <a:spcBef>
+                <a:spcPts val="400"/>
+              </a:spcBef>
+              <a:spcAft>
+                <a:spcPts val="0"/>
+              </a:spcAft>
+              <a:buClr>
+                <a:srgbClr val="6699FF"/>
+              </a:buClr>
+              <a:buSzPts val="2000"/>
+              <a:buFont typeface="Times New Roman"/>
+              <a:buChar char="•"/>
+              <a:defRPr sz="2000" b="0" i="0" u="none" strike="noStrike" cap="none">
+                <a:solidFill>
+                  <a:schemeClr val="dk1"/>
+                </a:solidFill>
+                <a:latin typeface="Times New Roman"/>
+                <a:ea typeface="Times New Roman"/>
+                <a:cs typeface="Times New Roman"/>
+                <a:sym typeface="Times New Roman"/>
+              </a:defRPr>
+            </a:lvl3pPr>
+            <a:lvl4pPr marL="1828800" marR="0" lvl="3" indent="-355600" algn="l" rtl="0">
+              <a:lnSpc>
+                <a:spcPct val="100000"/>
+              </a:lnSpc>
+              <a:spcBef>
+                <a:spcPts val="400"/>
+              </a:spcBef>
+              <a:spcAft>
+                <a:spcPts val="0"/>
+              </a:spcAft>
+              <a:buClr>
+                <a:srgbClr val="FF5050"/>
+              </a:buClr>
+              <a:buSzPts val="2000"/>
+              <a:buFont typeface="Times New Roman"/>
+              <a:buChar char="o"/>
+              <a:defRPr sz="2000" b="0" i="0" u="none" strike="noStrike" cap="none">
+                <a:solidFill>
+                  <a:schemeClr val="dk1"/>
+                </a:solidFill>
+                <a:latin typeface="Times New Roman"/>
+                <a:ea typeface="Times New Roman"/>
+                <a:cs typeface="Times New Roman"/>
+                <a:sym typeface="Times New Roman"/>
+              </a:defRPr>
+            </a:lvl4pPr>
+            <a:lvl5pPr marL="2286000" marR="0" lvl="4" indent="-355600" algn="l" rtl="0">
+              <a:lnSpc>
+                <a:spcPct val="100000"/>
+              </a:lnSpc>
+              <a:spcBef>
+                <a:spcPts val="400"/>
+              </a:spcBef>
+              <a:spcAft>
+                <a:spcPts val="0"/>
+              </a:spcAft>
+              <a:buClr>
+                <a:srgbClr val="FF5050"/>
+              </a:buClr>
+              <a:buSzPts val="2000"/>
+              <a:buFont typeface="Times New Roman"/>
+              <a:buChar char="o"/>
+              <a:defRPr sz="2000" b="0" i="0" u="none" strike="noStrike" cap="none">
+                <a:solidFill>
+                  <a:schemeClr val="dk1"/>
+                </a:solidFill>
+                <a:latin typeface="Times New Roman"/>
+                <a:ea typeface="Times New Roman"/>
+                <a:cs typeface="Times New Roman"/>
+                <a:sym typeface="Times New Roman"/>
+              </a:defRPr>
+            </a:lvl5pPr>
+            <a:lvl6pPr marL="2743200" marR="0" lvl="5" indent="-355600" algn="l" rtl="0">
+              <a:lnSpc>
+                <a:spcPct val="100000"/>
+              </a:lnSpc>
+              <a:spcBef>
+                <a:spcPts val="400"/>
+              </a:spcBef>
+              <a:spcAft>
+                <a:spcPts val="0"/>
+              </a:spcAft>
+              <a:buClr>
+                <a:srgbClr val="FF5050"/>
+              </a:buClr>
+              <a:buSzPts val="2000"/>
+              <a:buFont typeface="Times New Roman"/>
+              <a:buChar char="o"/>
+              <a:defRPr sz="2000" b="0" i="0" u="none" strike="noStrike" cap="none">
+                <a:solidFill>
+                  <a:schemeClr val="dk1"/>
+                </a:solidFill>
+                <a:latin typeface="Times New Roman"/>
+                <a:ea typeface="Times New Roman"/>
+                <a:cs typeface="Times New Roman"/>
+                <a:sym typeface="Times New Roman"/>
+              </a:defRPr>
+            </a:lvl6pPr>
+            <a:lvl7pPr marL="3200400" marR="0" lvl="6" indent="-355600" algn="l" rtl="0">
+              <a:lnSpc>
+                <a:spcPct val="100000"/>
+              </a:lnSpc>
+              <a:spcBef>
+                <a:spcPts val="400"/>
+              </a:spcBef>
+              <a:spcAft>
+                <a:spcPts val="0"/>
+              </a:spcAft>
+              <a:buClr>
+                <a:srgbClr val="FF5050"/>
+              </a:buClr>
+              <a:buSzPts val="2000"/>
+              <a:buFont typeface="Times New Roman"/>
+              <a:buChar char="o"/>
+              <a:defRPr sz="2000" b="0" i="0" u="none" strike="noStrike" cap="none">
+                <a:solidFill>
+                  <a:schemeClr val="dk1"/>
+                </a:solidFill>
+                <a:latin typeface="Times New Roman"/>
+                <a:ea typeface="Times New Roman"/>
+                <a:cs typeface="Times New Roman"/>
+                <a:sym typeface="Times New Roman"/>
+              </a:defRPr>
+            </a:lvl7pPr>
+            <a:lvl8pPr marL="3657600" marR="0" lvl="7" indent="-355600" algn="l" rtl="0">
+              <a:lnSpc>
+                <a:spcPct val="100000"/>
+              </a:lnSpc>
+              <a:spcBef>
+                <a:spcPts val="400"/>
+              </a:spcBef>
+              <a:spcAft>
+                <a:spcPts val="0"/>
+              </a:spcAft>
+              <a:buClr>
+                <a:srgbClr val="FF5050"/>
+              </a:buClr>
+              <a:buSzPts val="2000"/>
+              <a:buFont typeface="Times New Roman"/>
+              <a:buChar char="o"/>
+              <a:defRPr sz="2000" b="0" i="0" u="none" strike="noStrike" cap="none">
+                <a:solidFill>
+                  <a:schemeClr val="dk1"/>
+                </a:solidFill>
+                <a:latin typeface="Times New Roman"/>
+                <a:ea typeface="Times New Roman"/>
+                <a:cs typeface="Times New Roman"/>
+                <a:sym typeface="Times New Roman"/>
+              </a:defRPr>
+            </a:lvl8pPr>
+            <a:lvl9pPr marL="4114800" marR="0" lvl="8" indent="-355600" algn="l" rtl="0">
+              <a:lnSpc>
+                <a:spcPct val="100000"/>
+              </a:lnSpc>
+              <a:spcBef>
+                <a:spcPts val="400"/>
+              </a:spcBef>
+              <a:spcAft>
+                <a:spcPts val="0"/>
+              </a:spcAft>
+              <a:buClr>
+                <a:srgbClr val="FF5050"/>
+              </a:buClr>
+              <a:buSzPts val="2000"/>
+              <a:buFont typeface="Times New Roman"/>
+              <a:buChar char="o"/>
+              <a:defRPr sz="2000" b="0" i="0" u="none" strike="noStrike" cap="none">
+                <a:solidFill>
+                  <a:schemeClr val="dk1"/>
+                </a:solidFill>
+                <a:latin typeface="Times New Roman"/>
+                <a:ea typeface="Times New Roman"/>
+                <a:cs typeface="Times New Roman"/>
+                <a:sym typeface="Times New Roman"/>
+              </a:defRPr>
+            </a:lvl9pPr>
+          </a:lstStyle>
+          <a:p>
+            <a:pPr marL="457200" lvl="1" indent="-406400">
+              <a:lnSpc>
+                <a:spcPct val="150000"/>
+              </a:lnSpc>
+              <a:spcBef>
+                <a:spcPts val="560"/>
+              </a:spcBef>
+              <a:buClr>
+                <a:schemeClr val="accent2"/>
+              </a:buClr>
+              <a:buSzPts val="2800"/>
+              <a:buFont typeface="Noto Sans Symbols"/>
+              <a:buChar char="❖"/>
+            </a:pPr>
+            <a:r>
+              <a:rPr lang="zh-TW" altLang="zh-TW" sz="2000" dirty="0">
+                <a:solidFill>
+                  <a:schemeClr val="tx1"/>
+                </a:solidFill>
+                <a:latin typeface="Times New Roman" panose="02020603050405020304" pitchFamily="18" charset="0"/>
+                <a:ea typeface="標楷體" panose="03000509000000000000" pitchFamily="65" charset="-120"/>
+                <a:cs typeface="Times New Roman" panose="02020603050405020304" pitchFamily="18" charset="0"/>
+              </a:rPr>
+              <a:t>ICC 官方對 Device Profile 的定義</a:t>
+            </a:r>
+            <a:r>
+              <a:rPr lang="en-US" altLang="zh-TW" sz="2000" dirty="0">
+                <a:solidFill>
+                  <a:schemeClr val="tx1"/>
+                </a:solidFill>
+                <a:latin typeface="Times New Roman" panose="02020603050405020304" pitchFamily="18" charset="0"/>
+                <a:ea typeface="標楷體" panose="03000509000000000000" pitchFamily="65" charset="-120"/>
+                <a:cs typeface="Times New Roman" panose="02020603050405020304" pitchFamily="18" charset="0"/>
+              </a:rPr>
+              <a:t> </a:t>
+            </a:r>
+            <a:endParaRPr lang="en-US" altLang="zh-TW" dirty="0">
+              <a:solidFill>
+                <a:schemeClr val="tx1"/>
+              </a:solidFill>
+              <a:latin typeface="Times New Roman" panose="02020603050405020304" pitchFamily="18" charset="0"/>
+              <a:ea typeface="標楷體" panose="03000509000000000000" pitchFamily="65" charset="-120"/>
+              <a:cs typeface="Times New Roman" panose="02020603050405020304" pitchFamily="18" charset="0"/>
+            </a:endParaRPr>
+          </a:p>
+          <a:p>
+            <a:pPr lvl="1">
+              <a:lnSpc>
+                <a:spcPct val="150000"/>
+              </a:lnSpc>
+            </a:pPr>
+            <a:r>
+              <a:rPr lang="zh-TW" altLang="zh-TW" sz="1600" dirty="0">
+                <a:solidFill>
+                  <a:schemeClr val="tx1"/>
+                </a:solidFill>
+                <a:latin typeface="Times New Roman" panose="02020603050405020304" pitchFamily="18" charset="0"/>
+                <a:ea typeface="標楷體" panose="03000509000000000000" pitchFamily="65" charset="-120"/>
+                <a:cs typeface="Times New Roman" panose="02020603050405020304" pitchFamily="18" charset="0"/>
+              </a:rPr>
+              <a:t>Device profiles provide color management systems with the information necessary to convert color data between native device color spaces and device independent color spaces.</a:t>
+            </a:r>
+            <a:endParaRPr lang="en-US" altLang="zh-TW" sz="1600" dirty="0">
+              <a:solidFill>
+                <a:schemeClr val="tx1"/>
+              </a:solidFill>
+              <a:latin typeface="Times New Roman" panose="02020603050405020304" pitchFamily="18" charset="0"/>
+              <a:ea typeface="標楷體" panose="03000509000000000000" pitchFamily="65" charset="-120"/>
+              <a:cs typeface="Times New Roman" panose="02020603050405020304" pitchFamily="18" charset="0"/>
+            </a:endParaRPr>
+          </a:p>
+          <a:p>
+            <a:endParaRPr lang="en-US" altLang="zh-TW" sz="2000" dirty="0">
+              <a:solidFill>
+                <a:schemeClr val="tx1"/>
+              </a:solidFill>
+              <a:latin typeface="Times New Roman" panose="02020603050405020304" pitchFamily="18" charset="0"/>
+              <a:ea typeface="標楷體" panose="03000509000000000000" pitchFamily="65" charset="-120"/>
+              <a:cs typeface="Times New Roman" panose="02020603050405020304" pitchFamily="18" charset="0"/>
+            </a:endParaRPr>
+          </a:p>
+        </p:txBody>
+      </p:sp>
+      <p:sp>
+        <p:nvSpPr>
+          <p:cNvPr id="9" name="矩形 8">
+            <a:extLst>
+              <a:ext uri="{FF2B5EF4-FFF2-40B4-BE49-F238E27FC236}">
+                <a16:creationId xmlns:a16="http://schemas.microsoft.com/office/drawing/2014/main" id="{48A74D8B-01C0-F984-0DEB-2EB41E60D81B}"/>
               </a:ext>
             </a:extLst>
           </p:cNvPr>
@@ -10441,8 +11770,8 @@
         </p:nvSpPr>
         <p:spPr>
           <a:xfrm>
-            <a:off x="436881" y="2827020"/>
-            <a:ext cx="1747520" cy="919480"/>
+            <a:off x="609602" y="3800404"/>
+            <a:ext cx="1910080" cy="985520"/>
           </a:xfrm>
           <a:prstGeom prst="rect">
             <a:avLst/>
@@ -10478,7 +11807,7 @@
           <a:p>
             <a:pPr algn="ctr"/>
             <a:r>
-              <a:rPr lang="zh-TW" altLang="zh-TW" sz="1600" dirty="0">
+              <a:rPr lang="zh-TW" altLang="zh-TW" dirty="0">
                 <a:solidFill>
                   <a:schemeClr val="tx1"/>
                 </a:solidFill>
@@ -10486,9 +11815,9 @@
                 <a:ea typeface="標楷體" panose="03000509000000000000" pitchFamily="65" charset="-120"/>
                 <a:cs typeface="Times New Roman" panose="02020603050405020304" pitchFamily="18" charset="0"/>
               </a:rPr>
-              <a:t>Source RGB</a:t>
-            </a:r>
-            <a:endParaRPr lang="zh-TW" altLang="en-US" sz="1600" dirty="0">
+              <a:t>原始 Display</a:t>
+            </a:r>
+            <a:endParaRPr lang="zh-TW" altLang="en-US" dirty="0">
               <a:solidFill>
                 <a:schemeClr val="tx1"/>
               </a:solidFill>
@@ -10501,10 +11830,10 @@
       </p:sp>
       <p:sp>
         <p:nvSpPr>
-          <p:cNvPr id="14" name="矩形 13">
+          <p:cNvPr id="12" name="矩形 11">
             <a:extLst>
               <a:ext uri="{FF2B5EF4-FFF2-40B4-BE49-F238E27FC236}">
-                <a16:creationId xmlns:a16="http://schemas.microsoft.com/office/drawing/2014/main" id="{17F45311-622E-98AF-2582-5A7EB0EA7155}"/>
+                <a16:creationId xmlns:a16="http://schemas.microsoft.com/office/drawing/2014/main" id="{E64E068D-36E8-16DA-CE03-C31A60F79A4C}"/>
               </a:ext>
             </a:extLst>
           </p:cNvPr>
@@ -10513,8 +11842,8 @@
         </p:nvSpPr>
         <p:spPr>
           <a:xfrm>
-            <a:off x="2682240" y="2827020"/>
-            <a:ext cx="1747520" cy="919480"/>
+            <a:off x="3996692" y="3800404"/>
+            <a:ext cx="1910080" cy="985520"/>
           </a:xfrm>
           <a:prstGeom prst="rect">
             <a:avLst/>
@@ -10550,7 +11879,7 @@
           <a:p>
             <a:pPr algn="ctr"/>
             <a:r>
-              <a:rPr lang="zh-TW" altLang="zh-TW" sz="1600" dirty="0">
+              <a:rPr lang="zh-TW" altLang="zh-TW" dirty="0">
                 <a:solidFill>
                   <a:schemeClr val="tx1"/>
                 </a:solidFill>
@@ -10558,20 +11887,9 @@
                 <a:ea typeface="標楷體" panose="03000509000000000000" pitchFamily="65" charset="-120"/>
                 <a:cs typeface="Times New Roman" panose="02020603050405020304" pitchFamily="18" charset="0"/>
               </a:rPr>
-              <a:t>CM</a:t>
-            </a:r>
-            <a:r>
-              <a:rPr lang="en-US" altLang="zh-TW" sz="1600" dirty="0">
-                <a:solidFill>
-                  <a:schemeClr val="tx1"/>
-                </a:solidFill>
-                <a:latin typeface="Times New Roman" panose="02020603050405020304" pitchFamily="18" charset="0"/>
-                <a:ea typeface="標楷體" panose="03000509000000000000" pitchFamily="65" charset="-120"/>
-                <a:cs typeface="Times New Roman" panose="02020603050405020304" pitchFamily="18" charset="0"/>
-              </a:rPr>
-              <a:t>S</a:t>
-            </a:r>
-            <a:endParaRPr lang="zh-TW" altLang="en-US" sz="1600" dirty="0">
+              <a:t>校正後的 Display</a:t>
+            </a:r>
+            <a:endParaRPr lang="zh-TW" altLang="en-US" dirty="0">
               <a:solidFill>
                 <a:schemeClr val="tx1"/>
               </a:solidFill>
@@ -10584,10 +11902,10 @@
       </p:sp>
       <p:sp>
         <p:nvSpPr>
-          <p:cNvPr id="16" name="矩形 15">
+          <p:cNvPr id="14" name="矩形 13">
             <a:extLst>
               <a:ext uri="{FF2B5EF4-FFF2-40B4-BE49-F238E27FC236}">
-                <a16:creationId xmlns:a16="http://schemas.microsoft.com/office/drawing/2014/main" id="{5F2779D4-24A9-9C33-502B-385D73312A87}"/>
+                <a16:creationId xmlns:a16="http://schemas.microsoft.com/office/drawing/2014/main" id="{8153D5B5-9C99-8FF4-3F82-CBB9E77B433E}"/>
               </a:ext>
             </a:extLst>
           </p:cNvPr>
@@ -10596,8 +11914,8 @@
         </p:nvSpPr>
         <p:spPr>
           <a:xfrm>
-            <a:off x="4927599" y="2827020"/>
-            <a:ext cx="1747520" cy="919480"/>
+            <a:off x="7193282" y="3800404"/>
+            <a:ext cx="1910080" cy="985520"/>
           </a:xfrm>
           <a:prstGeom prst="rect">
             <a:avLst/>
@@ -10633,7 +11951,7 @@
           <a:p>
             <a:pPr algn="ctr"/>
             <a:r>
-              <a:rPr lang="en-US" altLang="zh-TW" sz="1600" dirty="0">
+              <a:rPr lang="zh-TW" altLang="zh-TW" dirty="0">
                 <a:solidFill>
                   <a:schemeClr val="tx1"/>
                 </a:solidFill>
@@ -10641,9 +11959,64 @@
                 <a:ea typeface="標楷體" panose="03000509000000000000" pitchFamily="65" charset="-120"/>
                 <a:cs typeface="Times New Roman" panose="02020603050405020304" pitchFamily="18" charset="0"/>
               </a:rPr>
-              <a:t>OS</a:t>
-            </a:r>
-            <a:endParaRPr lang="zh-TW" altLang="en-US" sz="1600" dirty="0">
+              <a:t>ICC Profile</a:t>
+            </a:r>
+            <a:endParaRPr lang="en-US" altLang="zh-TW" dirty="0">
+              <a:solidFill>
+                <a:schemeClr val="tx1"/>
+              </a:solidFill>
+              <a:latin typeface="Times New Roman" panose="02020603050405020304" pitchFamily="18" charset="0"/>
+              <a:ea typeface="標楷體" panose="03000509000000000000" pitchFamily="65" charset="-120"/>
+              <a:cs typeface="Times New Roman" panose="02020603050405020304" pitchFamily="18" charset="0"/>
+            </a:endParaRPr>
+          </a:p>
+          <a:p>
+            <a:pPr algn="ctr"/>
+            <a:r>
+              <a:rPr lang="en-US" altLang="zh-TW" dirty="0">
+                <a:solidFill>
+                  <a:schemeClr val="tx1"/>
+                </a:solidFill>
+                <a:latin typeface="Times New Roman" panose="02020603050405020304" pitchFamily="18" charset="0"/>
+                <a:ea typeface="標楷體" panose="03000509000000000000" pitchFamily="65" charset="-120"/>
+                <a:cs typeface="Times New Roman" panose="02020603050405020304" pitchFamily="18" charset="0"/>
+              </a:rPr>
+              <a:t>(</a:t>
+            </a:r>
+            <a:r>
+              <a:rPr lang="zh-TW" altLang="en-US" dirty="0">
+                <a:solidFill>
+                  <a:schemeClr val="tx1"/>
+                </a:solidFill>
+                <a:latin typeface="Times New Roman" panose="02020603050405020304" pitchFamily="18" charset="0"/>
+                <a:ea typeface="標楷體" panose="03000509000000000000" pitchFamily="65" charset="-120"/>
+                <a:cs typeface="Times New Roman" panose="02020603050405020304" pitchFamily="18" charset="0"/>
+              </a:rPr>
+              <a:t>描述</a:t>
+            </a:r>
+            <a:r>
+              <a:rPr lang="zh-TW" altLang="zh-TW" dirty="0">
+                <a:solidFill>
+                  <a:schemeClr val="tx1"/>
+                </a:solidFill>
+                <a:latin typeface="Times New Roman" panose="02020603050405020304" pitchFamily="18" charset="0"/>
+                <a:ea typeface="標楷體" panose="03000509000000000000" pitchFamily="65" charset="-120"/>
+                <a:cs typeface="Times New Roman" panose="02020603050405020304" pitchFamily="18" charset="0"/>
+              </a:rPr>
+              <a:t>校正後的 Display</a:t>
+            </a:r>
+            <a:r>
+              <a:rPr lang="en-US" altLang="zh-TW" dirty="0">
+                <a:solidFill>
+                  <a:schemeClr val="tx1"/>
+                </a:solidFill>
+                <a:latin typeface="Times New Roman" panose="02020603050405020304" pitchFamily="18" charset="0"/>
+                <a:ea typeface="標楷體" panose="03000509000000000000" pitchFamily="65" charset="-120"/>
+                <a:cs typeface="Times New Roman" panose="02020603050405020304" pitchFamily="18" charset="0"/>
+              </a:rPr>
+              <a:t>)</a:t>
+            </a:r>
+            <a:endParaRPr lang="zh-TW" altLang="en-US" dirty="0">
               <a:solidFill>
                 <a:schemeClr val="tx1"/>
               </a:solidFill>
@@ -10656,56 +12029,34 @@
       </p:sp>
       <p:sp>
         <p:nvSpPr>
-          <p:cNvPr id="18" name="矩形 17">
+          <p:cNvPr id="16" name="文字方塊 15">
             <a:extLst>
               <a:ext uri="{FF2B5EF4-FFF2-40B4-BE49-F238E27FC236}">
-                <a16:creationId xmlns:a16="http://schemas.microsoft.com/office/drawing/2014/main" id="{46EC9586-84CB-A0BF-6B10-04A5B793E27E}"/>
+                <a16:creationId xmlns:a16="http://schemas.microsoft.com/office/drawing/2014/main" id="{97D640E0-2062-5E74-A18D-25594149EC78}"/>
               </a:ext>
             </a:extLst>
           </p:cNvPr>
-          <p:cNvSpPr/>
+          <p:cNvSpPr txBox="1"/>
           <p:nvPr/>
         </p:nvSpPr>
         <p:spPr>
           <a:xfrm>
-            <a:off x="7172958" y="2827020"/>
-            <a:ext cx="1747520" cy="919480"/>
+            <a:off x="2675892" y="3787426"/>
+            <a:ext cx="1130300" cy="307777"/>
           </a:xfrm>
           <a:prstGeom prst="rect">
             <a:avLst/>
           </a:prstGeom>
-          <a:solidFill>
-            <a:schemeClr val="bg1"/>
-          </a:solidFill>
-          <a:ln>
-            <a:solidFill>
-              <a:schemeClr val="tx1"/>
-            </a:solidFill>
-          </a:ln>
+          <a:noFill/>
         </p:spPr>
-        <p:style>
-          <a:lnRef idx="2">
-            <a:schemeClr val="accent1">
-              <a:shade val="15000"/>
-            </a:schemeClr>
-          </a:lnRef>
-          <a:fillRef idx="1">
-            <a:schemeClr val="accent1"/>
-          </a:fillRef>
-          <a:effectRef idx="0">
-            <a:schemeClr val="accent1"/>
-          </a:effectRef>
-          <a:fontRef idx="minor">
-            <a:schemeClr val="lt1"/>
-          </a:fontRef>
-        </p:style>
         <p:txBody>
-          <a:bodyPr rtlCol="0" anchor="ctr"/>
+          <a:bodyPr wrap="square">
+            <a:spAutoFit/>
+          </a:bodyPr>
           <a:lstStyle/>
           <a:p>
-            <a:pPr algn="ctr"/>
-            <a:r>
-              <a:rPr lang="zh-TW" altLang="zh-TW" sz="1600" dirty="0">
+            <a:r>
+              <a:rPr lang="zh-TW" altLang="zh-TW" dirty="0">
                 <a:solidFill>
                   <a:schemeClr val="tx1"/>
                 </a:solidFill>
@@ -10713,9 +12064,9 @@
                 <a:ea typeface="標楷體" panose="03000509000000000000" pitchFamily="65" charset="-120"/>
                 <a:cs typeface="Times New Roman" panose="02020603050405020304" pitchFamily="18" charset="0"/>
               </a:rPr>
-              <a:t>GPU RGB</a:t>
-            </a:r>
-            <a:endParaRPr lang="zh-TW" altLang="en-US" sz="1600" dirty="0">
+              <a:t>Calibration</a:t>
+            </a:r>
+            <a:endParaRPr lang="zh-TW" altLang="en-US" dirty="0">
               <a:solidFill>
                 <a:schemeClr val="tx1"/>
               </a:solidFill>
@@ -10728,160 +12079,10 @@
       </p:sp>
       <p:sp>
         <p:nvSpPr>
-          <p:cNvPr id="20" name="矩形 19">
+          <p:cNvPr id="18" name="文字方塊 17">
             <a:extLst>
               <a:ext uri="{FF2B5EF4-FFF2-40B4-BE49-F238E27FC236}">
-                <a16:creationId xmlns:a16="http://schemas.microsoft.com/office/drawing/2014/main" id="{851EF44B-2B61-0095-583E-47CA1F443B80}"/>
-              </a:ext>
-            </a:extLst>
-          </p:cNvPr>
-          <p:cNvSpPr/>
-          <p:nvPr/>
-        </p:nvSpPr>
-        <p:spPr>
-          <a:xfrm>
-            <a:off x="7172958" y="4259580"/>
-            <a:ext cx="1747520" cy="919480"/>
-          </a:xfrm>
-          <a:prstGeom prst="rect">
-            <a:avLst/>
-          </a:prstGeom>
-          <a:solidFill>
-            <a:schemeClr val="bg1"/>
-          </a:solidFill>
-          <a:ln>
-            <a:solidFill>
-              <a:schemeClr val="tx1"/>
-            </a:solidFill>
-          </a:ln>
-        </p:spPr>
-        <p:style>
-          <a:lnRef idx="2">
-            <a:schemeClr val="accent1">
-              <a:shade val="15000"/>
-            </a:schemeClr>
-          </a:lnRef>
-          <a:fillRef idx="1">
-            <a:schemeClr val="accent1"/>
-          </a:fillRef>
-          <a:effectRef idx="0">
-            <a:schemeClr val="accent1"/>
-          </a:effectRef>
-          <a:fontRef idx="minor">
-            <a:schemeClr val="lt1"/>
-          </a:fontRef>
-        </p:style>
-        <p:txBody>
-          <a:bodyPr rtlCol="0" anchor="ctr"/>
-          <a:lstStyle/>
-          <a:p>
-            <a:pPr algn="ctr"/>
-            <a:r>
-              <a:rPr lang="zh-TW" altLang="zh-TW" sz="1600" dirty="0">
-                <a:solidFill>
-                  <a:schemeClr val="tx1"/>
-                </a:solidFill>
-                <a:latin typeface="Times New Roman" panose="02020603050405020304" pitchFamily="18" charset="0"/>
-                <a:ea typeface="標楷體" panose="03000509000000000000" pitchFamily="65" charset="-120"/>
-                <a:cs typeface="Times New Roman" panose="02020603050405020304" pitchFamily="18" charset="0"/>
-              </a:rPr>
-              <a:t>Displa</a:t>
-            </a:r>
-            <a:r>
-              <a:rPr lang="en-US" altLang="zh-TW" sz="1600" dirty="0">
-                <a:solidFill>
-                  <a:schemeClr val="tx1"/>
-                </a:solidFill>
-                <a:latin typeface="Times New Roman" panose="02020603050405020304" pitchFamily="18" charset="0"/>
-                <a:ea typeface="標楷體" panose="03000509000000000000" pitchFamily="65" charset="-120"/>
-                <a:cs typeface="Times New Roman" panose="02020603050405020304" pitchFamily="18" charset="0"/>
-              </a:rPr>
-              <a:t>y</a:t>
-            </a:r>
-            <a:endParaRPr lang="zh-TW" altLang="en-US" sz="1600" dirty="0">
-              <a:solidFill>
-                <a:schemeClr val="tx1"/>
-              </a:solidFill>
-              <a:latin typeface="Times New Roman" panose="02020603050405020304" pitchFamily="18" charset="0"/>
-              <a:ea typeface="標楷體" panose="03000509000000000000" pitchFamily="65" charset="-120"/>
-              <a:cs typeface="Times New Roman" panose="02020603050405020304" pitchFamily="18" charset="0"/>
-            </a:endParaRPr>
-          </a:p>
-        </p:txBody>
-      </p:sp>
-      <p:sp>
-        <p:nvSpPr>
-          <p:cNvPr id="21" name="矩形 20">
-            <a:extLst>
-              <a:ext uri="{FF2B5EF4-FFF2-40B4-BE49-F238E27FC236}">
-                <a16:creationId xmlns:a16="http://schemas.microsoft.com/office/drawing/2014/main" id="{70AB1DD2-2258-7E54-D8FA-BD021CC0AF3A}"/>
-              </a:ext>
-            </a:extLst>
-          </p:cNvPr>
-          <p:cNvSpPr/>
-          <p:nvPr/>
-        </p:nvSpPr>
-        <p:spPr>
-          <a:xfrm>
-            <a:off x="2924686" y="2049385"/>
-            <a:ext cx="1262628" cy="338554"/>
-          </a:xfrm>
-          <a:prstGeom prst="rect">
-            <a:avLst/>
-          </a:prstGeom>
-          <a:noFill/>
-        </p:spPr>
-        <p:txBody>
-          <a:bodyPr wrap="square" lIns="91440" tIns="45720" rIns="91440" bIns="45720">
-            <a:spAutoFit/>
-          </a:bodyPr>
-          <a:lstStyle/>
-          <a:p>
-            <a:pPr algn="ctr"/>
-            <a:r>
-              <a:rPr lang="en-US" altLang="zh-TW" sz="1600" b="0" cap="none" spc="0" dirty="0">
-                <a:ln w="0"/>
-                <a:solidFill>
-                  <a:schemeClr val="tx1"/>
-                </a:solidFill>
-                <a:effectLst>
-                  <a:outerShdw blurRad="38100" dist="19050" dir="2700000" algn="tl" rotWithShape="0">
-                    <a:schemeClr val="dk1">
-                      <a:alpha val="40000"/>
-                    </a:schemeClr>
-                  </a:outerShdw>
-                </a:effectLst>
-                <a:latin typeface="Times New Roman" panose="02020603050405020304" pitchFamily="18" charset="0"/>
-                <a:ea typeface="標楷體" panose="03000509000000000000" pitchFamily="65" charset="-120"/>
-                <a:cs typeface="Times New Roman" panose="02020603050405020304" pitchFamily="18" charset="0"/>
-              </a:rPr>
-              <a:t>ICC Profile</a:t>
-            </a:r>
-            <a:endParaRPr lang="zh-TW" altLang="en-US" sz="1600" b="0" cap="none" spc="0" dirty="0">
-              <a:ln w="0"/>
-              <a:solidFill>
-                <a:schemeClr val="tx1"/>
-              </a:solidFill>
-              <a:effectLst>
-                <a:outerShdw blurRad="38100" dist="19050" dir="2700000" algn="tl" rotWithShape="0">
-                  <a:schemeClr val="dk1">
-                    <a:alpha val="40000"/>
-                  </a:schemeClr>
-                </a:outerShdw>
-              </a:effectLst>
-              <a:latin typeface="Times New Roman" panose="02020603050405020304" pitchFamily="18" charset="0"/>
-              <a:ea typeface="標楷體" panose="03000509000000000000" pitchFamily="65" charset="-120"/>
-              <a:cs typeface="Times New Roman" panose="02020603050405020304" pitchFamily="18" charset="0"/>
-            </a:endParaRPr>
-          </a:p>
-        </p:txBody>
-      </p:sp>
-      <p:sp>
-        <p:nvSpPr>
-          <p:cNvPr id="23" name="文字方塊 22">
-            <a:extLst>
-              <a:ext uri="{FF2B5EF4-FFF2-40B4-BE49-F238E27FC236}">
-                <a16:creationId xmlns:a16="http://schemas.microsoft.com/office/drawing/2014/main" id="{5BFD6925-85BB-C9ED-D30E-6E8D594CB249}"/>
+                <a16:creationId xmlns:a16="http://schemas.microsoft.com/office/drawing/2014/main" id="{53FAAD05-5423-8425-D079-E87F7D7D0DF4}"/>
               </a:ext>
             </a:extLst>
           </p:cNvPr>
@@ -10890,8 +12091,8 @@
         </p:nvSpPr>
         <p:spPr>
           <a:xfrm>
-            <a:off x="4143661" y="3746500"/>
-            <a:ext cx="1322419" cy="338554"/>
+            <a:off x="6097272" y="3800968"/>
+            <a:ext cx="977900" cy="307777"/>
           </a:xfrm>
           <a:prstGeom prst="rect">
             <a:avLst/>
@@ -10905,58 +12106,20 @@
           <a:lstStyle/>
           <a:p>
             <a:r>
-              <a:rPr lang="zh-TW" altLang="zh-TW" sz="1600" dirty="0">
-                <a:latin typeface="Times New Roman" panose="02020603050405020304" pitchFamily="18" charset="0"/>
-                <a:ea typeface="標楷體" panose="03000509000000000000" pitchFamily="65" charset="-120"/>
-                <a:cs typeface="Times New Roman" panose="02020603050405020304" pitchFamily="18" charset="0"/>
-              </a:rPr>
-              <a:t>RGB Signal</a:t>
-            </a:r>
-            <a:endParaRPr lang="zh-TW" altLang="en-US" sz="1600" dirty="0">
-              <a:latin typeface="Times New Roman" panose="02020603050405020304" pitchFamily="18" charset="0"/>
-              <a:ea typeface="標楷體" panose="03000509000000000000" pitchFamily="65" charset="-120"/>
-              <a:cs typeface="Times New Roman" panose="02020603050405020304" pitchFamily="18" charset="0"/>
-            </a:endParaRPr>
-          </a:p>
-        </p:txBody>
-      </p:sp>
-      <p:sp>
-        <p:nvSpPr>
-          <p:cNvPr id="25" name="文字方塊 24">
-            <a:extLst>
-              <a:ext uri="{FF2B5EF4-FFF2-40B4-BE49-F238E27FC236}">
-                <a16:creationId xmlns:a16="http://schemas.microsoft.com/office/drawing/2014/main" id="{6AA3145F-E794-D512-CC6B-7188DD6FC01F}"/>
-              </a:ext>
-            </a:extLst>
-          </p:cNvPr>
-          <p:cNvSpPr txBox="1"/>
-          <p:nvPr/>
-        </p:nvSpPr>
-        <p:spPr>
-          <a:xfrm>
-            <a:off x="8412482" y="3846897"/>
-            <a:ext cx="1219196" cy="338554"/>
-          </a:xfrm>
-          <a:prstGeom prst="rect">
-            <a:avLst/>
-          </a:prstGeom>
-          <a:noFill/>
-        </p:spPr>
-        <p:txBody>
-          <a:bodyPr wrap="square">
-            <a:spAutoFit/>
-          </a:bodyPr>
-          <a:lstStyle/>
-          <a:p>
-            <a:r>
-              <a:rPr lang="zh-TW" altLang="zh-TW" sz="1600" dirty="0">
-                <a:latin typeface="Times New Roman" panose="02020603050405020304" pitchFamily="18" charset="0"/>
-                <a:ea typeface="標楷體" panose="03000509000000000000" pitchFamily="65" charset="-120"/>
-                <a:cs typeface="Times New Roman" panose="02020603050405020304" pitchFamily="18" charset="0"/>
-              </a:rPr>
-              <a:t>RGB Signal</a:t>
-            </a:r>
-            <a:endParaRPr lang="zh-TW" altLang="en-US" sz="1600" dirty="0">
+              <a:rPr lang="zh-TW" altLang="zh-TW" dirty="0">
+                <a:solidFill>
+                  <a:schemeClr val="tx1"/>
+                </a:solidFill>
+                <a:latin typeface="Times New Roman" panose="02020603050405020304" pitchFamily="18" charset="0"/>
+                <a:ea typeface="標楷體" panose="03000509000000000000" pitchFamily="65" charset="-120"/>
+                <a:cs typeface="Times New Roman" panose="02020603050405020304" pitchFamily="18" charset="0"/>
+              </a:rPr>
+              <a:t>Profiling</a:t>
+            </a:r>
+            <a:endParaRPr lang="zh-TW" altLang="en-US" dirty="0">
+              <a:solidFill>
+                <a:schemeClr val="tx1"/>
+              </a:solidFill>
               <a:latin typeface="Times New Roman" panose="02020603050405020304" pitchFamily="18" charset="0"/>
               <a:ea typeface="標楷體" panose="03000509000000000000" pitchFamily="65" charset="-120"/>
               <a:cs typeface="Times New Roman" panose="02020603050405020304" pitchFamily="18" charset="0"/>
@@ -10966,23 +12129,23 @@
       </p:sp>
       <p:cxnSp>
         <p:nvCxnSpPr>
-          <p:cNvPr id="27" name="直線單箭頭接點 26">
+          <p:cNvPr id="20" name="直線單箭頭接點 19">
             <a:extLst>
               <a:ext uri="{FF2B5EF4-FFF2-40B4-BE49-F238E27FC236}">
-                <a16:creationId xmlns:a16="http://schemas.microsoft.com/office/drawing/2014/main" id="{4F7D1C07-82A2-8CB6-C4DB-4E8A9A5F2249}"/>
+                <a16:creationId xmlns:a16="http://schemas.microsoft.com/office/drawing/2014/main" id="{A28111C5-679B-4B99-F41B-CF93AF10E80A}"/>
               </a:ext>
             </a:extLst>
           </p:cNvPr>
           <p:cNvCxnSpPr>
-            <a:stCxn id="12" idx="3"/>
-            <a:endCxn id="14" idx="1"/>
+            <a:stCxn id="9" idx="3"/>
+            <a:endCxn id="12" idx="1"/>
           </p:cNvCxnSpPr>
           <p:nvPr/>
         </p:nvCxnSpPr>
         <p:spPr>
           <a:xfrm>
-            <a:off x="2184401" y="3286760"/>
-            <a:ext cx="497839" cy="0"/>
+            <a:off x="2519682" y="4293164"/>
+            <a:ext cx="1477010" cy="0"/>
           </a:xfrm>
           <a:prstGeom prst="straightConnector1">
             <a:avLst/>
@@ -11014,24 +12177,24 @@
       </p:cxnSp>
       <p:cxnSp>
         <p:nvCxnSpPr>
-          <p:cNvPr id="28" name="直線單箭頭接點 27">
+          <p:cNvPr id="21" name="直線單箭頭接點 20">
             <a:extLst>
               <a:ext uri="{FF2B5EF4-FFF2-40B4-BE49-F238E27FC236}">
-                <a16:creationId xmlns:a16="http://schemas.microsoft.com/office/drawing/2014/main" id="{BE2F8492-9FC4-38C6-25B2-064EE269DD07}"/>
+                <a16:creationId xmlns:a16="http://schemas.microsoft.com/office/drawing/2014/main" id="{83BD4C12-E585-313C-A3BF-2862C76AFCC5}"/>
               </a:ext>
             </a:extLst>
           </p:cNvPr>
           <p:cNvCxnSpPr>
             <a:cxnSpLocks/>
-            <a:stCxn id="14" idx="3"/>
-            <a:endCxn id="16" idx="1"/>
+            <a:stCxn id="12" idx="3"/>
+            <a:endCxn id="14" idx="1"/>
           </p:cNvCxnSpPr>
           <p:nvPr/>
         </p:nvCxnSpPr>
         <p:spPr>
           <a:xfrm>
-            <a:off x="4429760" y="3286760"/>
-            <a:ext cx="497839" cy="0"/>
+            <a:off x="5906772" y="4293164"/>
+            <a:ext cx="1286510" cy="0"/>
           </a:xfrm>
           <a:prstGeom prst="straightConnector1">
             <a:avLst/>
@@ -11061,1545 +12224,10 @@
           </a:fontRef>
         </p:style>
       </p:cxnSp>
-      <p:cxnSp>
-        <p:nvCxnSpPr>
-          <p:cNvPr id="31" name="直線單箭頭接點 30">
-            <a:extLst>
-              <a:ext uri="{FF2B5EF4-FFF2-40B4-BE49-F238E27FC236}">
-                <a16:creationId xmlns:a16="http://schemas.microsoft.com/office/drawing/2014/main" id="{D9E8603D-CBB2-62FD-99B0-F2B375A683D3}"/>
-              </a:ext>
-            </a:extLst>
-          </p:cNvPr>
-          <p:cNvCxnSpPr>
-            <a:cxnSpLocks/>
-          </p:cNvCxnSpPr>
-          <p:nvPr/>
-        </p:nvCxnSpPr>
-        <p:spPr>
-          <a:xfrm flipV="1">
-            <a:off x="6675119" y="3362960"/>
-            <a:ext cx="497839" cy="1"/>
-          </a:xfrm>
-          <a:prstGeom prst="straightConnector1">
-            <a:avLst/>
-          </a:prstGeom>
-          <a:ln w="19050" cap="flat" cmpd="sng" algn="ctr">
-            <a:solidFill>
-              <a:schemeClr val="dk1"/>
-            </a:solidFill>
-            <a:prstDash val="solid"/>
-            <a:round/>
-            <a:headEnd type="none" w="med" len="med"/>
-            <a:tailEnd type="arrow" w="med" len="med"/>
-          </a:ln>
-        </p:spPr>
-        <p:style>
-          <a:lnRef idx="0">
-            <a:scrgbClr r="0" g="0" b="0"/>
-          </a:lnRef>
-          <a:fillRef idx="0">
-            <a:scrgbClr r="0" g="0" b="0"/>
-          </a:fillRef>
-          <a:effectRef idx="0">
-            <a:scrgbClr r="0" g="0" b="0"/>
-          </a:effectRef>
-          <a:fontRef idx="minor">
-            <a:schemeClr val="tx1"/>
-          </a:fontRef>
-        </p:style>
-      </p:cxnSp>
-      <p:cxnSp>
-        <p:nvCxnSpPr>
-          <p:cNvPr id="34" name="直線單箭頭接點 33">
-            <a:extLst>
-              <a:ext uri="{FF2B5EF4-FFF2-40B4-BE49-F238E27FC236}">
-                <a16:creationId xmlns:a16="http://schemas.microsoft.com/office/drawing/2014/main" id="{5E3B5B1D-CAEF-A690-EBED-0CFC0D5EC744}"/>
-              </a:ext>
-            </a:extLst>
-          </p:cNvPr>
-          <p:cNvCxnSpPr>
-            <a:cxnSpLocks/>
-            <a:endCxn id="20" idx="0"/>
-          </p:cNvCxnSpPr>
-          <p:nvPr/>
-        </p:nvCxnSpPr>
-        <p:spPr>
-          <a:xfrm>
-            <a:off x="8046718" y="3777714"/>
-            <a:ext cx="0" cy="481866"/>
-          </a:xfrm>
-          <a:prstGeom prst="straightConnector1">
-            <a:avLst/>
-          </a:prstGeom>
-          <a:ln w="19050" cap="flat" cmpd="sng" algn="ctr">
-            <a:solidFill>
-              <a:schemeClr val="dk1"/>
-            </a:solidFill>
-            <a:prstDash val="solid"/>
-            <a:round/>
-            <a:headEnd type="none" w="med" len="med"/>
-            <a:tailEnd type="arrow" w="med" len="med"/>
-          </a:ln>
-        </p:spPr>
-        <p:style>
-          <a:lnRef idx="0">
-            <a:scrgbClr r="0" g="0" b="0"/>
-          </a:lnRef>
-          <a:fillRef idx="0">
-            <a:scrgbClr r="0" g="0" b="0"/>
-          </a:fillRef>
-          <a:effectRef idx="0">
-            <a:scrgbClr r="0" g="0" b="0"/>
-          </a:effectRef>
-          <a:fontRef idx="minor">
-            <a:schemeClr val="tx1"/>
-          </a:fontRef>
-        </p:style>
-      </p:cxnSp>
-      <p:cxnSp>
-        <p:nvCxnSpPr>
-          <p:cNvPr id="37" name="直線單箭頭接點 36">
-            <a:extLst>
-              <a:ext uri="{FF2B5EF4-FFF2-40B4-BE49-F238E27FC236}">
-                <a16:creationId xmlns:a16="http://schemas.microsoft.com/office/drawing/2014/main" id="{26B32417-86E8-25A0-ABF8-EB9EF1AE8C39}"/>
-              </a:ext>
-            </a:extLst>
-          </p:cNvPr>
-          <p:cNvCxnSpPr>
-            <a:cxnSpLocks/>
-            <a:endCxn id="14" idx="0"/>
-          </p:cNvCxnSpPr>
-          <p:nvPr/>
-        </p:nvCxnSpPr>
-        <p:spPr>
-          <a:xfrm>
-            <a:off x="3556000" y="2468663"/>
-            <a:ext cx="0" cy="358357"/>
-          </a:xfrm>
-          <a:prstGeom prst="straightConnector1">
-            <a:avLst/>
-          </a:prstGeom>
-          <a:ln w="19050" cap="flat" cmpd="sng" algn="ctr">
-            <a:solidFill>
-              <a:schemeClr val="dk1"/>
-            </a:solidFill>
-            <a:prstDash val="solid"/>
-            <a:round/>
-            <a:headEnd type="none" w="med" len="med"/>
-            <a:tailEnd type="arrow" w="med" len="med"/>
-          </a:ln>
-        </p:spPr>
-        <p:style>
-          <a:lnRef idx="0">
-            <a:scrgbClr r="0" g="0" b="0"/>
-          </a:lnRef>
-          <a:fillRef idx="0">
-            <a:scrgbClr r="0" g="0" b="0"/>
-          </a:fillRef>
-          <a:effectRef idx="0">
-            <a:scrgbClr r="0" g="0" b="0"/>
-          </a:effectRef>
-          <a:fontRef idx="minor">
-            <a:schemeClr val="tx1"/>
-          </a:fontRef>
-        </p:style>
-      </p:cxnSp>
-      <p:sp>
-        <p:nvSpPr>
-          <p:cNvPr id="2" name="矩形 1">
-            <a:extLst>
-              <a:ext uri="{FF2B5EF4-FFF2-40B4-BE49-F238E27FC236}">
-                <a16:creationId xmlns:a16="http://schemas.microsoft.com/office/drawing/2014/main" id="{1E272CA5-28D4-0D9F-D625-42FF13BF08F7}"/>
-              </a:ext>
-            </a:extLst>
-          </p:cNvPr>
-          <p:cNvSpPr/>
-          <p:nvPr/>
-        </p:nvSpPr>
-        <p:spPr>
-          <a:xfrm>
-            <a:off x="-313821" y="2967335"/>
-            <a:ext cx="10533653" cy="923330"/>
-          </a:xfrm>
-          <a:prstGeom prst="rect">
-            <a:avLst/>
-          </a:prstGeom>
-          <a:noFill/>
-        </p:spPr>
-        <p:txBody>
-          <a:bodyPr wrap="none" lIns="91440" tIns="45720" rIns="91440" bIns="45720">
-            <a:spAutoFit/>
-          </a:bodyPr>
-          <a:lstStyle/>
-          <a:p>
-            <a:pPr algn="ctr"/>
-            <a:r>
-              <a:rPr lang="en-US" altLang="zh-TW" sz="5400" b="0" cap="none" spc="0" dirty="0">
-                <a:ln w="0"/>
-                <a:solidFill>
-                  <a:srgbClr val="FF0000"/>
-                </a:solidFill>
-                <a:effectLst>
-                  <a:outerShdw blurRad="38100" dist="19050" dir="2700000" algn="tl" rotWithShape="0">
-                    <a:schemeClr val="dk1">
-                      <a:alpha val="40000"/>
-                    </a:schemeClr>
-                  </a:outerShdw>
-                </a:effectLst>
-              </a:rPr>
-              <a:t>CMS</a:t>
-            </a:r>
-            <a:r>
-              <a:rPr lang="zh-TW" altLang="en-US" sz="5400" b="0" cap="none" spc="0" dirty="0">
-                <a:ln w="0"/>
-                <a:solidFill>
-                  <a:srgbClr val="FF0000"/>
-                </a:solidFill>
-                <a:effectLst>
-                  <a:outerShdw blurRad="38100" dist="19050" dir="2700000" algn="tl" rotWithShape="0">
-                    <a:schemeClr val="dk1">
-                      <a:alpha val="40000"/>
-                    </a:schemeClr>
-                  </a:outerShdw>
-                </a:effectLst>
-              </a:rPr>
-              <a:t> </a:t>
-            </a:r>
-            <a:r>
-              <a:rPr lang="en-US" altLang="zh-TW" sz="5400" b="0" cap="none" spc="0" dirty="0">
-                <a:ln w="0"/>
-                <a:solidFill>
-                  <a:srgbClr val="FF0000"/>
-                </a:solidFill>
-                <a:effectLst>
-                  <a:outerShdw blurRad="38100" dist="19050" dir="2700000" algn="tl" rotWithShape="0">
-                    <a:schemeClr val="dk1">
-                      <a:alpha val="40000"/>
-                    </a:schemeClr>
-                  </a:outerShdw>
-                </a:effectLst>
-              </a:rPr>
-              <a:t>OS</a:t>
-            </a:r>
-            <a:r>
-              <a:rPr lang="zh-TW" altLang="en-US" sz="5400" b="0" cap="none" spc="0" dirty="0">
-                <a:ln w="0"/>
-                <a:solidFill>
-                  <a:srgbClr val="FF0000"/>
-                </a:solidFill>
-                <a:effectLst>
-                  <a:outerShdw blurRad="38100" dist="19050" dir="2700000" algn="tl" rotWithShape="0">
-                    <a:schemeClr val="dk1">
-                      <a:alpha val="40000"/>
-                    </a:schemeClr>
-                  </a:outerShdw>
-                </a:effectLst>
-              </a:rPr>
-              <a:t>關係搞清楚，重劃流程圖</a:t>
-            </a:r>
-          </a:p>
-        </p:txBody>
-      </p:sp>
     </p:spTree>
     <p:extLst>
       <p:ext uri="{BB962C8B-B14F-4D97-AF65-F5344CB8AC3E}">
-        <p14:creationId xmlns:p14="http://schemas.microsoft.com/office/powerpoint/2010/main" val="3448153164"/>
-      </p:ext>
-    </p:extLst>
-  </p:cSld>
-  <p:clrMapOvr>
-    <a:masterClrMapping/>
-  </p:clrMapOvr>
-</p:sld>
-</file>
-
-<file path=ppt/slides/slide12.xml><?xml version="1.0" encoding="utf-8"?>
-<p:sld xmlns:a="http://schemas.openxmlformats.org/drawingml/2006/main" xmlns:r="http://schemas.openxmlformats.org/officeDocument/2006/relationships" xmlns:p="http://schemas.openxmlformats.org/presentationml/2006/main">
-  <p:cSld>
-    <p:spTree>
-      <p:nvGrpSpPr>
-        <p:cNvPr id="1" name="">
-          <a:extLst>
-            <a:ext uri="{FF2B5EF4-FFF2-40B4-BE49-F238E27FC236}">
-              <a16:creationId xmlns:a16="http://schemas.microsoft.com/office/drawing/2014/main" id="{4C524AA7-A8A7-A341-3AC3-0E3E342460FB}"/>
-            </a:ext>
-          </a:extLst>
-        </p:cNvPr>
-        <p:cNvGrpSpPr/>
-        <p:nvPr/>
-      </p:nvGrpSpPr>
-      <p:grpSpPr>
-        <a:xfrm>
-          <a:off x="0" y="0"/>
-          <a:ext cx="0" cy="0"/>
-          <a:chOff x="0" y="0"/>
-          <a:chExt cx="0" cy="0"/>
-        </a:xfrm>
-      </p:grpSpPr>
-      <p:sp>
-        <p:nvSpPr>
-          <p:cNvPr id="8" name="文字版面配置區 6">
-            <a:extLst>
-              <a:ext uri="{FF2B5EF4-FFF2-40B4-BE49-F238E27FC236}">
-                <a16:creationId xmlns:a16="http://schemas.microsoft.com/office/drawing/2014/main" id="{70AA535C-35C8-9CAA-5BCE-9D60896E7559}"/>
-              </a:ext>
-            </a:extLst>
-          </p:cNvPr>
-          <p:cNvSpPr txBox="1"/>
-          <p:nvPr/>
-        </p:nvSpPr>
-        <p:spPr>
-          <a:xfrm>
-            <a:off x="609602" y="1223724"/>
-            <a:ext cx="8686796" cy="4700685"/>
-          </a:xfrm>
-          <a:prstGeom prst="rect">
-            <a:avLst/>
-          </a:prstGeom>
-          <a:noFill/>
-          <a:ln>
-            <a:noFill/>
-          </a:ln>
-        </p:spPr>
-        <p:txBody>
-          <a:bodyPr spcFirstLastPara="1" wrap="square" lIns="91425" tIns="45700" rIns="91425" bIns="45700" anchor="t" anchorCtr="0">
-            <a:noAutofit/>
-          </a:bodyPr>
-          <a:lstStyle>
-            <a:defPPr marR="0" lvl="0" algn="l" rtl="0">
-              <a:lnSpc>
-                <a:spcPct val="100000"/>
-              </a:lnSpc>
-              <a:spcBef>
-                <a:spcPts val="0"/>
-              </a:spcBef>
-              <a:spcAft>
-                <a:spcPts val="0"/>
-              </a:spcAft>
-            </a:defPPr>
-            <a:lvl1pPr marL="457200" marR="0" lvl="0" indent="-406400" algn="l" rtl="0">
-              <a:lnSpc>
-                <a:spcPct val="100000"/>
-              </a:lnSpc>
-              <a:spcBef>
-                <a:spcPts val="560"/>
-              </a:spcBef>
-              <a:spcAft>
-                <a:spcPts val="0"/>
-              </a:spcAft>
-              <a:buClr>
-                <a:schemeClr val="accent2"/>
-              </a:buClr>
-              <a:buSzPts val="2800"/>
-              <a:buFont typeface="Noto Sans Symbols"/>
-              <a:buChar char="❖"/>
-              <a:defRPr sz="2800" b="0" i="0" u="none" strike="noStrike" cap="none">
-                <a:solidFill>
-                  <a:schemeClr val="dk1"/>
-                </a:solidFill>
-                <a:latin typeface="Times New Roman"/>
-                <a:ea typeface="Times New Roman"/>
-                <a:cs typeface="Times New Roman"/>
-                <a:sym typeface="Times New Roman"/>
-              </a:defRPr>
-            </a:lvl1pPr>
-            <a:lvl2pPr marL="914400" marR="0" lvl="1" indent="-381000" algn="l" rtl="0">
-              <a:lnSpc>
-                <a:spcPct val="100000"/>
-              </a:lnSpc>
-              <a:spcBef>
-                <a:spcPts val="480"/>
-              </a:spcBef>
-              <a:spcAft>
-                <a:spcPts val="0"/>
-              </a:spcAft>
-              <a:buClr>
-                <a:srgbClr val="FF5050"/>
-              </a:buClr>
-              <a:buSzPts val="2400"/>
-              <a:buFont typeface="Noto Sans Symbols"/>
-              <a:buChar char="▪"/>
-              <a:defRPr sz="2400" b="0" i="0" u="none" strike="noStrike" cap="none">
-                <a:solidFill>
-                  <a:schemeClr val="dk1"/>
-                </a:solidFill>
-                <a:latin typeface="Times New Roman"/>
-                <a:ea typeface="Times New Roman"/>
-                <a:cs typeface="Times New Roman"/>
-                <a:sym typeface="Times New Roman"/>
-              </a:defRPr>
-            </a:lvl2pPr>
-            <a:lvl3pPr marL="1371600" marR="0" lvl="2" indent="-355600" algn="l" rtl="0">
-              <a:lnSpc>
-                <a:spcPct val="100000"/>
-              </a:lnSpc>
-              <a:spcBef>
-                <a:spcPts val="400"/>
-              </a:spcBef>
-              <a:spcAft>
-                <a:spcPts val="0"/>
-              </a:spcAft>
-              <a:buClr>
-                <a:srgbClr val="6699FF"/>
-              </a:buClr>
-              <a:buSzPts val="2000"/>
-              <a:buFont typeface="Times New Roman"/>
-              <a:buChar char="•"/>
-              <a:defRPr sz="2000" b="0" i="0" u="none" strike="noStrike" cap="none">
-                <a:solidFill>
-                  <a:schemeClr val="dk1"/>
-                </a:solidFill>
-                <a:latin typeface="Times New Roman"/>
-                <a:ea typeface="Times New Roman"/>
-                <a:cs typeface="Times New Roman"/>
-                <a:sym typeface="Times New Roman"/>
-              </a:defRPr>
-            </a:lvl3pPr>
-            <a:lvl4pPr marL="1828800" marR="0" lvl="3" indent="-355600" algn="l" rtl="0">
-              <a:lnSpc>
-                <a:spcPct val="100000"/>
-              </a:lnSpc>
-              <a:spcBef>
-                <a:spcPts val="400"/>
-              </a:spcBef>
-              <a:spcAft>
-                <a:spcPts val="0"/>
-              </a:spcAft>
-              <a:buClr>
-                <a:srgbClr val="FF5050"/>
-              </a:buClr>
-              <a:buSzPts val="2000"/>
-              <a:buFont typeface="Times New Roman"/>
-              <a:buChar char="o"/>
-              <a:defRPr sz="2000" b="0" i="0" u="none" strike="noStrike" cap="none">
-                <a:solidFill>
-                  <a:schemeClr val="dk1"/>
-                </a:solidFill>
-                <a:latin typeface="Times New Roman"/>
-                <a:ea typeface="Times New Roman"/>
-                <a:cs typeface="Times New Roman"/>
-                <a:sym typeface="Times New Roman"/>
-              </a:defRPr>
-            </a:lvl4pPr>
-            <a:lvl5pPr marL="2286000" marR="0" lvl="4" indent="-355600" algn="l" rtl="0">
-              <a:lnSpc>
-                <a:spcPct val="100000"/>
-              </a:lnSpc>
-              <a:spcBef>
-                <a:spcPts val="400"/>
-              </a:spcBef>
-              <a:spcAft>
-                <a:spcPts val="0"/>
-              </a:spcAft>
-              <a:buClr>
-                <a:srgbClr val="FF5050"/>
-              </a:buClr>
-              <a:buSzPts val="2000"/>
-              <a:buFont typeface="Times New Roman"/>
-              <a:buChar char="o"/>
-              <a:defRPr sz="2000" b="0" i="0" u="none" strike="noStrike" cap="none">
-                <a:solidFill>
-                  <a:schemeClr val="dk1"/>
-                </a:solidFill>
-                <a:latin typeface="Times New Roman"/>
-                <a:ea typeface="Times New Roman"/>
-                <a:cs typeface="Times New Roman"/>
-                <a:sym typeface="Times New Roman"/>
-              </a:defRPr>
-            </a:lvl5pPr>
-            <a:lvl6pPr marL="2743200" marR="0" lvl="5" indent="-355600" algn="l" rtl="0">
-              <a:lnSpc>
-                <a:spcPct val="100000"/>
-              </a:lnSpc>
-              <a:spcBef>
-                <a:spcPts val="400"/>
-              </a:spcBef>
-              <a:spcAft>
-                <a:spcPts val="0"/>
-              </a:spcAft>
-              <a:buClr>
-                <a:srgbClr val="FF5050"/>
-              </a:buClr>
-              <a:buSzPts val="2000"/>
-              <a:buFont typeface="Times New Roman"/>
-              <a:buChar char="o"/>
-              <a:defRPr sz="2000" b="0" i="0" u="none" strike="noStrike" cap="none">
-                <a:solidFill>
-                  <a:schemeClr val="dk1"/>
-                </a:solidFill>
-                <a:latin typeface="Times New Roman"/>
-                <a:ea typeface="Times New Roman"/>
-                <a:cs typeface="Times New Roman"/>
-                <a:sym typeface="Times New Roman"/>
-              </a:defRPr>
-            </a:lvl6pPr>
-            <a:lvl7pPr marL="3200400" marR="0" lvl="6" indent="-355600" algn="l" rtl="0">
-              <a:lnSpc>
-                <a:spcPct val="100000"/>
-              </a:lnSpc>
-              <a:spcBef>
-                <a:spcPts val="400"/>
-              </a:spcBef>
-              <a:spcAft>
-                <a:spcPts val="0"/>
-              </a:spcAft>
-              <a:buClr>
-                <a:srgbClr val="FF5050"/>
-              </a:buClr>
-              <a:buSzPts val="2000"/>
-              <a:buFont typeface="Times New Roman"/>
-              <a:buChar char="o"/>
-              <a:defRPr sz="2000" b="0" i="0" u="none" strike="noStrike" cap="none">
-                <a:solidFill>
-                  <a:schemeClr val="dk1"/>
-                </a:solidFill>
-                <a:latin typeface="Times New Roman"/>
-                <a:ea typeface="Times New Roman"/>
-                <a:cs typeface="Times New Roman"/>
-                <a:sym typeface="Times New Roman"/>
-              </a:defRPr>
-            </a:lvl7pPr>
-            <a:lvl8pPr marL="3657600" marR="0" lvl="7" indent="-355600" algn="l" rtl="0">
-              <a:lnSpc>
-                <a:spcPct val="100000"/>
-              </a:lnSpc>
-              <a:spcBef>
-                <a:spcPts val="400"/>
-              </a:spcBef>
-              <a:spcAft>
-                <a:spcPts val="0"/>
-              </a:spcAft>
-              <a:buClr>
-                <a:srgbClr val="FF5050"/>
-              </a:buClr>
-              <a:buSzPts val="2000"/>
-              <a:buFont typeface="Times New Roman"/>
-              <a:buChar char="o"/>
-              <a:defRPr sz="2000" b="0" i="0" u="none" strike="noStrike" cap="none">
-                <a:solidFill>
-                  <a:schemeClr val="dk1"/>
-                </a:solidFill>
-                <a:latin typeface="Times New Roman"/>
-                <a:ea typeface="Times New Roman"/>
-                <a:cs typeface="Times New Roman"/>
-                <a:sym typeface="Times New Roman"/>
-              </a:defRPr>
-            </a:lvl8pPr>
-            <a:lvl9pPr marL="4114800" marR="0" lvl="8" indent="-355600" algn="l" rtl="0">
-              <a:lnSpc>
-                <a:spcPct val="100000"/>
-              </a:lnSpc>
-              <a:spcBef>
-                <a:spcPts val="400"/>
-              </a:spcBef>
-              <a:spcAft>
-                <a:spcPts val="0"/>
-              </a:spcAft>
-              <a:buClr>
-                <a:srgbClr val="FF5050"/>
-              </a:buClr>
-              <a:buSzPts val="2000"/>
-              <a:buFont typeface="Times New Roman"/>
-              <a:buChar char="o"/>
-              <a:defRPr sz="2000" b="0" i="0" u="none" strike="noStrike" cap="none">
-                <a:solidFill>
-                  <a:schemeClr val="dk1"/>
-                </a:solidFill>
-                <a:latin typeface="Times New Roman"/>
-                <a:ea typeface="Times New Roman"/>
-                <a:cs typeface="Times New Roman"/>
-                <a:sym typeface="Times New Roman"/>
-              </a:defRPr>
-            </a:lvl9pPr>
-          </a:lstStyle>
-          <a:p>
-            <a:pPr marL="457200" lvl="1" indent="-406400">
-              <a:spcBef>
-                <a:spcPts val="560"/>
-              </a:spcBef>
-              <a:buClr>
-                <a:schemeClr val="accent2"/>
-              </a:buClr>
-              <a:buSzPts val="2800"/>
-              <a:buFont typeface="Noto Sans Symbols"/>
-              <a:buChar char="❖"/>
-            </a:pPr>
-            <a:endParaRPr lang="en-US" altLang="zh-TW" dirty="0">
-              <a:solidFill>
-                <a:schemeClr val="tx1"/>
-              </a:solidFill>
-              <a:latin typeface="Times New Roman" panose="02020603050405020304" pitchFamily="18" charset="0"/>
-              <a:ea typeface="標楷體" panose="03000509000000000000" pitchFamily="65" charset="-120"/>
-              <a:cs typeface="Times New Roman" panose="02020603050405020304" pitchFamily="18" charset="0"/>
-            </a:endParaRPr>
-          </a:p>
-        </p:txBody>
-      </p:sp>
-      <p:sp>
-        <p:nvSpPr>
-          <p:cNvPr id="12" name="矩形 11">
-            <a:extLst>
-              <a:ext uri="{FF2B5EF4-FFF2-40B4-BE49-F238E27FC236}">
-                <a16:creationId xmlns:a16="http://schemas.microsoft.com/office/drawing/2014/main" id="{650C616D-3C14-C08D-8569-D9AD85C5DC81}"/>
-              </a:ext>
-            </a:extLst>
-          </p:cNvPr>
-          <p:cNvSpPr/>
-          <p:nvPr/>
-        </p:nvSpPr>
-        <p:spPr>
-          <a:xfrm>
-            <a:off x="538481" y="3289586"/>
-            <a:ext cx="1747520" cy="919480"/>
-          </a:xfrm>
-          <a:prstGeom prst="rect">
-            <a:avLst/>
-          </a:prstGeom>
-          <a:solidFill>
-            <a:schemeClr val="bg1"/>
-          </a:solidFill>
-          <a:ln>
-            <a:solidFill>
-              <a:schemeClr val="tx1"/>
-            </a:solidFill>
-          </a:ln>
-        </p:spPr>
-        <p:style>
-          <a:lnRef idx="2">
-            <a:schemeClr val="accent1">
-              <a:shade val="15000"/>
-            </a:schemeClr>
-          </a:lnRef>
-          <a:fillRef idx="1">
-            <a:schemeClr val="accent1"/>
-          </a:fillRef>
-          <a:effectRef idx="0">
-            <a:schemeClr val="accent1"/>
-          </a:effectRef>
-          <a:fontRef idx="minor">
-            <a:schemeClr val="lt1"/>
-          </a:fontRef>
-        </p:style>
-        <p:txBody>
-          <a:bodyPr rtlCol="0" anchor="ctr"/>
-          <a:lstStyle/>
-          <a:p>
-            <a:pPr algn="ctr"/>
-            <a:r>
-              <a:rPr lang="zh-TW" altLang="zh-TW" sz="1600" dirty="0">
-                <a:solidFill>
-                  <a:schemeClr val="tx1"/>
-                </a:solidFill>
-                <a:latin typeface="Times New Roman" panose="02020603050405020304" pitchFamily="18" charset="0"/>
-                <a:cs typeface="Times New Roman" panose="02020603050405020304" pitchFamily="18" charset="0"/>
-              </a:rPr>
-              <a:t>ICC Profile</a:t>
-            </a:r>
-            <a:endParaRPr lang="zh-TW" altLang="en-US" sz="1600" dirty="0">
-              <a:solidFill>
-                <a:schemeClr val="tx1"/>
-              </a:solidFill>
-              <a:latin typeface="Times New Roman" panose="02020603050405020304" pitchFamily="18" charset="0"/>
-              <a:ea typeface="標楷體" panose="03000509000000000000" pitchFamily="65" charset="-120"/>
-              <a:cs typeface="Times New Roman" panose="02020603050405020304" pitchFamily="18" charset="0"/>
-            </a:endParaRPr>
-          </a:p>
-        </p:txBody>
-      </p:sp>
-      <p:sp>
-        <p:nvSpPr>
-          <p:cNvPr id="3" name="矩形 2">
-            <a:extLst>
-              <a:ext uri="{FF2B5EF4-FFF2-40B4-BE49-F238E27FC236}">
-                <a16:creationId xmlns:a16="http://schemas.microsoft.com/office/drawing/2014/main" id="{ED4440B2-D934-67C7-39A3-FE56C3443B86}"/>
-              </a:ext>
-            </a:extLst>
-          </p:cNvPr>
-          <p:cNvSpPr/>
-          <p:nvPr/>
-        </p:nvSpPr>
-        <p:spPr>
-          <a:xfrm>
-            <a:off x="3423921" y="2156174"/>
-            <a:ext cx="1747520" cy="919480"/>
-          </a:xfrm>
-          <a:prstGeom prst="rect">
-            <a:avLst/>
-          </a:prstGeom>
-          <a:solidFill>
-            <a:schemeClr val="bg1"/>
-          </a:solidFill>
-          <a:ln>
-            <a:solidFill>
-              <a:schemeClr val="tx1"/>
-            </a:solidFill>
-          </a:ln>
-        </p:spPr>
-        <p:style>
-          <a:lnRef idx="2">
-            <a:schemeClr val="accent1">
-              <a:shade val="15000"/>
-            </a:schemeClr>
-          </a:lnRef>
-          <a:fillRef idx="1">
-            <a:schemeClr val="accent1"/>
-          </a:fillRef>
-          <a:effectRef idx="0">
-            <a:schemeClr val="accent1"/>
-          </a:effectRef>
-          <a:fontRef idx="minor">
-            <a:schemeClr val="lt1"/>
-          </a:fontRef>
-        </p:style>
-        <p:txBody>
-          <a:bodyPr rtlCol="0" anchor="ctr"/>
-          <a:lstStyle/>
-          <a:p>
-            <a:pPr algn="ctr"/>
-            <a:r>
-              <a:rPr lang="en-US" altLang="zh-TW" sz="1600" dirty="0">
-                <a:solidFill>
-                  <a:schemeClr val="tx1"/>
-                </a:solidFill>
-                <a:latin typeface="Times New Roman" panose="02020603050405020304" pitchFamily="18" charset="0"/>
-                <a:ea typeface="標楷體" panose="03000509000000000000" pitchFamily="65" charset="-120"/>
-                <a:cs typeface="Times New Roman" panose="02020603050405020304" pitchFamily="18" charset="0"/>
-              </a:rPr>
-              <a:t>CMM</a:t>
-            </a:r>
-            <a:endParaRPr lang="zh-TW" altLang="en-US" sz="1600" dirty="0">
-              <a:solidFill>
-                <a:schemeClr val="tx1"/>
-              </a:solidFill>
-              <a:latin typeface="Times New Roman" panose="02020603050405020304" pitchFamily="18" charset="0"/>
-              <a:ea typeface="標楷體" panose="03000509000000000000" pitchFamily="65" charset="-120"/>
-              <a:cs typeface="Times New Roman" panose="02020603050405020304" pitchFamily="18" charset="0"/>
-            </a:endParaRPr>
-          </a:p>
-        </p:txBody>
-      </p:sp>
-      <p:sp>
-        <p:nvSpPr>
-          <p:cNvPr id="5" name="矩形 4">
-            <a:extLst>
-              <a:ext uri="{FF2B5EF4-FFF2-40B4-BE49-F238E27FC236}">
-                <a16:creationId xmlns:a16="http://schemas.microsoft.com/office/drawing/2014/main" id="{F9DD2B38-5863-2279-1592-91EB1F252E2D}"/>
-              </a:ext>
-            </a:extLst>
-          </p:cNvPr>
-          <p:cNvSpPr/>
-          <p:nvPr/>
-        </p:nvSpPr>
-        <p:spPr>
-          <a:xfrm>
-            <a:off x="3423921" y="4338876"/>
-            <a:ext cx="1747520" cy="919480"/>
-          </a:xfrm>
-          <a:prstGeom prst="rect">
-            <a:avLst/>
-          </a:prstGeom>
-          <a:solidFill>
-            <a:schemeClr val="bg1"/>
-          </a:solidFill>
-          <a:ln>
-            <a:solidFill>
-              <a:schemeClr val="tx1"/>
-            </a:solidFill>
-          </a:ln>
-        </p:spPr>
-        <p:style>
-          <a:lnRef idx="2">
-            <a:schemeClr val="accent1">
-              <a:shade val="15000"/>
-            </a:schemeClr>
-          </a:lnRef>
-          <a:fillRef idx="1">
-            <a:schemeClr val="accent1"/>
-          </a:fillRef>
-          <a:effectRef idx="0">
-            <a:schemeClr val="accent1"/>
-          </a:effectRef>
-          <a:fontRef idx="minor">
-            <a:schemeClr val="lt1"/>
-          </a:fontRef>
-        </p:style>
-        <p:txBody>
-          <a:bodyPr rtlCol="0" anchor="ctr"/>
-          <a:lstStyle/>
-          <a:p>
-            <a:pPr algn="ctr"/>
-            <a:r>
-              <a:rPr lang="en-US" altLang="zh-TW" sz="1600" dirty="0">
-                <a:solidFill>
-                  <a:schemeClr val="tx1"/>
-                </a:solidFill>
-                <a:latin typeface="Times New Roman" panose="02020603050405020304" pitchFamily="18" charset="0"/>
-                <a:ea typeface="標楷體" panose="03000509000000000000" pitchFamily="65" charset="-120"/>
-                <a:cs typeface="Times New Roman" panose="02020603050405020304" pitchFamily="18" charset="0"/>
-              </a:rPr>
-              <a:t>OS/GPU</a:t>
-            </a:r>
-            <a:endParaRPr lang="zh-TW" altLang="en-US" sz="1600" dirty="0">
-              <a:solidFill>
-                <a:schemeClr val="tx1"/>
-              </a:solidFill>
-              <a:latin typeface="Times New Roman" panose="02020603050405020304" pitchFamily="18" charset="0"/>
-              <a:ea typeface="標楷體" panose="03000509000000000000" pitchFamily="65" charset="-120"/>
-              <a:cs typeface="Times New Roman" panose="02020603050405020304" pitchFamily="18" charset="0"/>
-            </a:endParaRPr>
-          </a:p>
-        </p:txBody>
-      </p:sp>
-      <p:sp>
-        <p:nvSpPr>
-          <p:cNvPr id="9" name="矩形 8">
-            <a:extLst>
-              <a:ext uri="{FF2B5EF4-FFF2-40B4-BE49-F238E27FC236}">
-                <a16:creationId xmlns:a16="http://schemas.microsoft.com/office/drawing/2014/main" id="{7CE50360-4991-7137-8AAB-9BACBD0D98BF}"/>
-              </a:ext>
-            </a:extLst>
-          </p:cNvPr>
-          <p:cNvSpPr/>
-          <p:nvPr/>
-        </p:nvSpPr>
-        <p:spPr>
-          <a:xfrm>
-            <a:off x="7071361" y="2156174"/>
-            <a:ext cx="1747520" cy="919480"/>
-          </a:xfrm>
-          <a:prstGeom prst="rect">
-            <a:avLst/>
-          </a:prstGeom>
-          <a:solidFill>
-            <a:schemeClr val="bg1"/>
-          </a:solidFill>
-          <a:ln>
-            <a:solidFill>
-              <a:schemeClr val="tx1"/>
-            </a:solidFill>
-          </a:ln>
-        </p:spPr>
-        <p:style>
-          <a:lnRef idx="2">
-            <a:schemeClr val="accent1">
-              <a:shade val="15000"/>
-            </a:schemeClr>
-          </a:lnRef>
-          <a:fillRef idx="1">
-            <a:schemeClr val="accent1"/>
-          </a:fillRef>
-          <a:effectRef idx="0">
-            <a:schemeClr val="accent1"/>
-          </a:effectRef>
-          <a:fontRef idx="minor">
-            <a:schemeClr val="lt1"/>
-          </a:fontRef>
-        </p:style>
-        <p:txBody>
-          <a:bodyPr rtlCol="0" anchor="ctr"/>
-          <a:lstStyle/>
-          <a:p>
-            <a:pPr algn="ctr"/>
-            <a:r>
-              <a:rPr lang="zh-TW" altLang="zh-TW" sz="1600" dirty="0">
-                <a:solidFill>
-                  <a:schemeClr val="tx1"/>
-                </a:solidFill>
-                <a:latin typeface="Times New Roman" panose="02020603050405020304" pitchFamily="18" charset="0"/>
-                <a:cs typeface="Times New Roman" panose="02020603050405020304" pitchFamily="18" charset="0"/>
-              </a:rPr>
-              <a:t>Display RGB</a:t>
-            </a:r>
-            <a:endParaRPr lang="zh-TW" altLang="en-US" sz="1600" dirty="0">
-              <a:solidFill>
-                <a:schemeClr val="tx1"/>
-              </a:solidFill>
-              <a:latin typeface="Times New Roman" panose="02020603050405020304" pitchFamily="18" charset="0"/>
-              <a:ea typeface="標楷體" panose="03000509000000000000" pitchFamily="65" charset="-120"/>
-              <a:cs typeface="Times New Roman" panose="02020603050405020304" pitchFamily="18" charset="0"/>
-            </a:endParaRPr>
-          </a:p>
-        </p:txBody>
-      </p:sp>
-      <p:sp>
-        <p:nvSpPr>
-          <p:cNvPr id="13" name="矩形 12">
-            <a:extLst>
-              <a:ext uri="{FF2B5EF4-FFF2-40B4-BE49-F238E27FC236}">
-                <a16:creationId xmlns:a16="http://schemas.microsoft.com/office/drawing/2014/main" id="{AE5CC085-F68F-A65E-FCB3-C00C72B7D390}"/>
-              </a:ext>
-            </a:extLst>
-          </p:cNvPr>
-          <p:cNvSpPr/>
-          <p:nvPr/>
-        </p:nvSpPr>
-        <p:spPr>
-          <a:xfrm>
-            <a:off x="7071361" y="4338876"/>
-            <a:ext cx="1747520" cy="919480"/>
-          </a:xfrm>
-          <a:prstGeom prst="rect">
-            <a:avLst/>
-          </a:prstGeom>
-          <a:solidFill>
-            <a:schemeClr val="bg1"/>
-          </a:solidFill>
-          <a:ln>
-            <a:solidFill>
-              <a:schemeClr val="tx1"/>
-            </a:solidFill>
-          </a:ln>
-        </p:spPr>
-        <p:style>
-          <a:lnRef idx="2">
-            <a:schemeClr val="accent1">
-              <a:shade val="15000"/>
-            </a:schemeClr>
-          </a:lnRef>
-          <a:fillRef idx="1">
-            <a:schemeClr val="accent1"/>
-          </a:fillRef>
-          <a:effectRef idx="0">
-            <a:schemeClr val="accent1"/>
-          </a:effectRef>
-          <a:fontRef idx="minor">
-            <a:schemeClr val="lt1"/>
-          </a:fontRef>
-        </p:style>
-        <p:txBody>
-          <a:bodyPr rtlCol="0" anchor="ctr"/>
-          <a:lstStyle/>
-          <a:p>
-            <a:pPr algn="ctr"/>
-            <a:r>
-              <a:rPr lang="zh-TW" altLang="zh-TW" sz="1600" dirty="0">
-                <a:solidFill>
-                  <a:schemeClr val="tx1"/>
-                </a:solidFill>
-                <a:latin typeface="Times New Roman" panose="02020603050405020304" pitchFamily="18" charset="0"/>
-                <a:cs typeface="Times New Roman" panose="02020603050405020304" pitchFamily="18" charset="0"/>
-              </a:rPr>
-              <a:t>Corrected RGB</a:t>
-            </a:r>
-            <a:endParaRPr lang="zh-TW" altLang="en-US" sz="1600" dirty="0">
-              <a:solidFill>
-                <a:schemeClr val="tx1"/>
-              </a:solidFill>
-              <a:latin typeface="Times New Roman" panose="02020603050405020304" pitchFamily="18" charset="0"/>
-              <a:ea typeface="標楷體" panose="03000509000000000000" pitchFamily="65" charset="-120"/>
-              <a:cs typeface="Times New Roman" panose="02020603050405020304" pitchFamily="18" charset="0"/>
-            </a:endParaRPr>
-          </a:p>
-        </p:txBody>
-      </p:sp>
-      <p:sp>
-        <p:nvSpPr>
-          <p:cNvPr id="15" name="文字方塊 14">
-            <a:extLst>
-              <a:ext uri="{FF2B5EF4-FFF2-40B4-BE49-F238E27FC236}">
-                <a16:creationId xmlns:a16="http://schemas.microsoft.com/office/drawing/2014/main" id="{A6668260-2771-F381-C71B-D54F678C8A36}"/>
-              </a:ext>
-            </a:extLst>
-          </p:cNvPr>
-          <p:cNvSpPr txBox="1"/>
-          <p:nvPr/>
-        </p:nvSpPr>
-        <p:spPr>
-          <a:xfrm>
-            <a:off x="5639592" y="4884798"/>
-            <a:ext cx="1111202" cy="338554"/>
-          </a:xfrm>
-          <a:prstGeom prst="rect">
-            <a:avLst/>
-          </a:prstGeom>
-          <a:noFill/>
-        </p:spPr>
-        <p:txBody>
-          <a:bodyPr wrap="none" rtlCol="0">
-            <a:spAutoFit/>
-          </a:bodyPr>
-          <a:lstStyle/>
-          <a:p>
-            <a:r>
-              <a:rPr lang="zh-TW" altLang="zh-TW" sz="1600" dirty="0">
-                <a:solidFill>
-                  <a:schemeClr val="tx1"/>
-                </a:solidFill>
-                <a:latin typeface="Times New Roman" panose="02020603050405020304" pitchFamily="18" charset="0"/>
-                <a:cs typeface="Times New Roman" panose="02020603050405020304" pitchFamily="18" charset="0"/>
-              </a:rPr>
-              <a:t>Calibration</a:t>
-            </a:r>
-            <a:endParaRPr lang="zh-TW" altLang="en-US" sz="1600" dirty="0">
-              <a:solidFill>
-                <a:schemeClr val="tx1"/>
-              </a:solidFill>
-              <a:latin typeface="Times New Roman" panose="02020603050405020304" pitchFamily="18" charset="0"/>
-              <a:cs typeface="Times New Roman" panose="02020603050405020304" pitchFamily="18" charset="0"/>
-            </a:endParaRPr>
-          </a:p>
-        </p:txBody>
-      </p:sp>
-      <p:sp>
-        <p:nvSpPr>
-          <p:cNvPr id="17" name="文字方塊 16">
-            <a:extLst>
-              <a:ext uri="{FF2B5EF4-FFF2-40B4-BE49-F238E27FC236}">
-                <a16:creationId xmlns:a16="http://schemas.microsoft.com/office/drawing/2014/main" id="{378ECEDB-098A-A787-87A8-96D722F9D4AF}"/>
-              </a:ext>
-            </a:extLst>
-          </p:cNvPr>
-          <p:cNvSpPr txBox="1"/>
-          <p:nvPr/>
-        </p:nvSpPr>
-        <p:spPr>
-          <a:xfrm>
-            <a:off x="5337372" y="2110033"/>
-            <a:ext cx="1651414" cy="338554"/>
-          </a:xfrm>
-          <a:prstGeom prst="rect">
-            <a:avLst/>
-          </a:prstGeom>
-          <a:noFill/>
-        </p:spPr>
-        <p:txBody>
-          <a:bodyPr wrap="none" rtlCol="0">
-            <a:spAutoFit/>
-          </a:bodyPr>
-          <a:lstStyle/>
-          <a:p>
-            <a:r>
-              <a:rPr lang="zh-TW" altLang="zh-TW" sz="1600" dirty="0">
-                <a:solidFill>
-                  <a:schemeClr val="tx1"/>
-                </a:solidFill>
-                <a:latin typeface="Times New Roman" panose="02020603050405020304" pitchFamily="18" charset="0"/>
-                <a:cs typeface="Times New Roman" panose="02020603050405020304" pitchFamily="18" charset="0"/>
-              </a:rPr>
-              <a:t>Color</a:t>
-            </a:r>
-            <a:r>
-              <a:rPr lang="en-US" altLang="zh-TW" sz="1600" dirty="0">
-                <a:solidFill>
-                  <a:schemeClr val="tx1"/>
-                </a:solidFill>
-                <a:latin typeface="Times New Roman" panose="02020603050405020304" pitchFamily="18" charset="0"/>
-                <a:cs typeface="Times New Roman" panose="02020603050405020304" pitchFamily="18" charset="0"/>
-              </a:rPr>
-              <a:t> </a:t>
-            </a:r>
-            <a:r>
-              <a:rPr lang="zh-TW" altLang="zh-TW" sz="1600" dirty="0">
-                <a:solidFill>
-                  <a:schemeClr val="tx1"/>
-                </a:solidFill>
-                <a:latin typeface="Times New Roman" panose="02020603050405020304" pitchFamily="18" charset="0"/>
-                <a:cs typeface="Times New Roman" panose="02020603050405020304" pitchFamily="18" charset="0"/>
-              </a:rPr>
-              <a:t>Conversion</a:t>
-            </a:r>
-            <a:endParaRPr lang="zh-TW" altLang="en-US" sz="1600" dirty="0">
-              <a:solidFill>
-                <a:schemeClr val="tx1"/>
-              </a:solidFill>
-              <a:latin typeface="Times New Roman" panose="02020603050405020304" pitchFamily="18" charset="0"/>
-              <a:cs typeface="Times New Roman" panose="02020603050405020304" pitchFamily="18" charset="0"/>
-            </a:endParaRPr>
-          </a:p>
-        </p:txBody>
-      </p:sp>
-      <p:sp>
-        <p:nvSpPr>
-          <p:cNvPr id="19" name="文字方塊 18">
-            <a:extLst>
-              <a:ext uri="{FF2B5EF4-FFF2-40B4-BE49-F238E27FC236}">
-                <a16:creationId xmlns:a16="http://schemas.microsoft.com/office/drawing/2014/main" id="{20124EDF-B4FC-F6C1-EB1E-C16D8613D5B9}"/>
-              </a:ext>
-            </a:extLst>
-          </p:cNvPr>
-          <p:cNvSpPr txBox="1"/>
-          <p:nvPr/>
-        </p:nvSpPr>
-        <p:spPr>
-          <a:xfrm>
-            <a:off x="1799684" y="2115561"/>
-            <a:ext cx="1725152" cy="338554"/>
-          </a:xfrm>
-          <a:prstGeom prst="rect">
-            <a:avLst/>
-          </a:prstGeom>
-          <a:noFill/>
-        </p:spPr>
-        <p:txBody>
-          <a:bodyPr wrap="none" rtlCol="0">
-            <a:spAutoFit/>
-          </a:bodyPr>
-          <a:lstStyle/>
-          <a:p>
-            <a:r>
-              <a:rPr lang="zh-TW" altLang="zh-TW" sz="1600" dirty="0">
-                <a:solidFill>
-                  <a:schemeClr val="tx1"/>
-                </a:solidFill>
-                <a:latin typeface="Times New Roman" panose="02020603050405020304" pitchFamily="18" charset="0"/>
-                <a:cs typeface="Times New Roman" panose="02020603050405020304" pitchFamily="18" charset="0"/>
-              </a:rPr>
-              <a:t>TRC / XYZ / wtpt</a:t>
-            </a:r>
-            <a:endParaRPr lang="zh-TW" altLang="en-US" sz="1600" dirty="0">
-              <a:solidFill>
-                <a:schemeClr val="tx1"/>
-              </a:solidFill>
-              <a:latin typeface="Times New Roman" panose="02020603050405020304" pitchFamily="18" charset="0"/>
-              <a:cs typeface="Times New Roman" panose="02020603050405020304" pitchFamily="18" charset="0"/>
-            </a:endParaRPr>
-          </a:p>
-        </p:txBody>
-      </p:sp>
-      <p:sp>
-        <p:nvSpPr>
-          <p:cNvPr id="22" name="文字方塊 21">
-            <a:extLst>
-              <a:ext uri="{FF2B5EF4-FFF2-40B4-BE49-F238E27FC236}">
-                <a16:creationId xmlns:a16="http://schemas.microsoft.com/office/drawing/2014/main" id="{004DC6C4-F258-3DB0-B9DD-DEC53EDBA4C2}"/>
-              </a:ext>
-            </a:extLst>
-          </p:cNvPr>
-          <p:cNvSpPr txBox="1"/>
-          <p:nvPr/>
-        </p:nvSpPr>
-        <p:spPr>
-          <a:xfrm>
-            <a:off x="1309165" y="4884798"/>
-            <a:ext cx="2215671" cy="338554"/>
-          </a:xfrm>
-          <a:prstGeom prst="rect">
-            <a:avLst/>
-          </a:prstGeom>
-          <a:noFill/>
-        </p:spPr>
-        <p:txBody>
-          <a:bodyPr wrap="none" rtlCol="0">
-            <a:spAutoFit/>
-          </a:bodyPr>
-          <a:lstStyle/>
-          <a:p>
-            <a:r>
-              <a:rPr lang="zh-TW" altLang="zh-TW" sz="1600" dirty="0">
-                <a:solidFill>
-                  <a:schemeClr val="tx1"/>
-                </a:solidFill>
-                <a:latin typeface="Times New Roman" panose="02020603050405020304" pitchFamily="18" charset="0"/>
-                <a:cs typeface="Times New Roman" panose="02020603050405020304" pitchFamily="18" charset="0"/>
-              </a:rPr>
-              <a:t>VCGT</a:t>
-            </a:r>
-            <a:r>
-              <a:rPr lang="en-US" altLang="zh-TW" sz="1600" dirty="0">
-                <a:solidFill>
-                  <a:schemeClr val="tx1"/>
-                </a:solidFill>
-                <a:latin typeface="Times New Roman" panose="02020603050405020304" pitchFamily="18" charset="0"/>
-                <a:cs typeface="Times New Roman" panose="02020603050405020304" pitchFamily="18" charset="0"/>
-              </a:rPr>
-              <a:t> </a:t>
-            </a:r>
-            <a:r>
-              <a:rPr lang="zh-TW" altLang="zh-TW" sz="1600" dirty="0">
-                <a:solidFill>
-                  <a:schemeClr val="tx1"/>
-                </a:solidFill>
-                <a:latin typeface="Times New Roman" panose="02020603050405020304" pitchFamily="18" charset="0"/>
-                <a:cs typeface="Times New Roman" panose="02020603050405020304" pitchFamily="18" charset="0"/>
-              </a:rPr>
-              <a:t>/</a:t>
-            </a:r>
-            <a:r>
-              <a:rPr lang="en-US" altLang="zh-TW" sz="1600" dirty="0">
-                <a:solidFill>
-                  <a:schemeClr val="tx1"/>
-                </a:solidFill>
-                <a:latin typeface="Times New Roman" panose="02020603050405020304" pitchFamily="18" charset="0"/>
-                <a:cs typeface="Times New Roman" panose="02020603050405020304" pitchFamily="18" charset="0"/>
-              </a:rPr>
-              <a:t> </a:t>
-            </a:r>
-            <a:r>
-              <a:rPr lang="zh-TW" altLang="zh-TW" sz="1600" dirty="0">
-                <a:solidFill>
-                  <a:schemeClr val="tx1"/>
-                </a:solidFill>
-                <a:latin typeface="Times New Roman" panose="02020603050405020304" pitchFamily="18" charset="0"/>
-                <a:cs typeface="Times New Roman" panose="02020603050405020304" pitchFamily="18" charset="0"/>
-              </a:rPr>
-              <a:t>MS00</a:t>
-            </a:r>
-            <a:r>
-              <a:rPr lang="en-US" altLang="zh-TW" sz="1600" dirty="0">
-                <a:solidFill>
-                  <a:schemeClr val="tx1"/>
-                </a:solidFill>
-                <a:latin typeface="Times New Roman" panose="02020603050405020304" pitchFamily="18" charset="0"/>
-                <a:cs typeface="Times New Roman" panose="02020603050405020304" pitchFamily="18" charset="0"/>
-              </a:rPr>
-              <a:t> </a:t>
-            </a:r>
-            <a:r>
-              <a:rPr lang="zh-TW" altLang="zh-TW" sz="1600" dirty="0">
-                <a:solidFill>
-                  <a:schemeClr val="tx1"/>
-                </a:solidFill>
-                <a:latin typeface="Times New Roman" panose="02020603050405020304" pitchFamily="18" charset="0"/>
-                <a:cs typeface="Times New Roman" panose="02020603050405020304" pitchFamily="18" charset="0"/>
-              </a:rPr>
-              <a:t>/</a:t>
-            </a:r>
-            <a:r>
-              <a:rPr lang="en-US" altLang="zh-TW" sz="1600" dirty="0">
-                <a:solidFill>
-                  <a:schemeClr val="tx1"/>
-                </a:solidFill>
-                <a:latin typeface="Times New Roman" panose="02020603050405020304" pitchFamily="18" charset="0"/>
-                <a:cs typeface="Times New Roman" panose="02020603050405020304" pitchFamily="18" charset="0"/>
-              </a:rPr>
-              <a:t> </a:t>
-            </a:r>
-            <a:r>
-              <a:rPr lang="zh-TW" altLang="zh-TW" sz="1600" dirty="0">
-                <a:solidFill>
-                  <a:schemeClr val="tx1"/>
-                </a:solidFill>
-                <a:latin typeface="Times New Roman" panose="02020603050405020304" pitchFamily="18" charset="0"/>
-                <a:cs typeface="Times New Roman" panose="02020603050405020304" pitchFamily="18" charset="0"/>
-              </a:rPr>
-              <a:t>MHC2</a:t>
-            </a:r>
-            <a:endParaRPr lang="zh-TW" altLang="en-US" sz="1600" dirty="0">
-              <a:solidFill>
-                <a:schemeClr val="tx1"/>
-              </a:solidFill>
-              <a:latin typeface="Times New Roman" panose="02020603050405020304" pitchFamily="18" charset="0"/>
-              <a:cs typeface="Times New Roman" panose="02020603050405020304" pitchFamily="18" charset="0"/>
-            </a:endParaRPr>
-          </a:p>
-        </p:txBody>
-      </p:sp>
-      <p:cxnSp>
-        <p:nvCxnSpPr>
-          <p:cNvPr id="26" name="接點: 肘形 25">
-            <a:extLst>
-              <a:ext uri="{FF2B5EF4-FFF2-40B4-BE49-F238E27FC236}">
-                <a16:creationId xmlns:a16="http://schemas.microsoft.com/office/drawing/2014/main" id="{9360AEC1-B2F4-4CE9-51C8-A9F375747B2D}"/>
-              </a:ext>
-            </a:extLst>
-          </p:cNvPr>
-          <p:cNvCxnSpPr>
-            <a:stCxn id="12" idx="3"/>
-            <a:endCxn id="3" idx="1"/>
-          </p:cNvCxnSpPr>
-          <p:nvPr/>
-        </p:nvCxnSpPr>
-        <p:spPr>
-          <a:xfrm flipV="1">
-            <a:off x="2286001" y="2615914"/>
-            <a:ext cx="1137920" cy="1133412"/>
-          </a:xfrm>
-          <a:prstGeom prst="bentConnector3">
-            <a:avLst/>
-          </a:prstGeom>
-          <a:ln w="19050" cap="flat" cmpd="sng" algn="ctr">
-            <a:solidFill>
-              <a:schemeClr val="dk1"/>
-            </a:solidFill>
-            <a:prstDash val="solid"/>
-            <a:round/>
-            <a:headEnd type="none" w="med" len="med"/>
-            <a:tailEnd type="arrow" w="med" len="med"/>
-          </a:ln>
-        </p:spPr>
-        <p:style>
-          <a:lnRef idx="0">
-            <a:scrgbClr r="0" g="0" b="0"/>
-          </a:lnRef>
-          <a:fillRef idx="0">
-            <a:scrgbClr r="0" g="0" b="0"/>
-          </a:fillRef>
-          <a:effectRef idx="0">
-            <a:scrgbClr r="0" g="0" b="0"/>
-          </a:effectRef>
-          <a:fontRef idx="minor">
-            <a:schemeClr val="tx1"/>
-          </a:fontRef>
-        </p:style>
-      </p:cxnSp>
-      <p:cxnSp>
-        <p:nvCxnSpPr>
-          <p:cNvPr id="30" name="接點: 肘形 29">
-            <a:extLst>
-              <a:ext uri="{FF2B5EF4-FFF2-40B4-BE49-F238E27FC236}">
-                <a16:creationId xmlns:a16="http://schemas.microsoft.com/office/drawing/2014/main" id="{1672DFFF-D0E4-2AD8-5583-21EC3CAA0F70}"/>
-              </a:ext>
-            </a:extLst>
-          </p:cNvPr>
-          <p:cNvCxnSpPr>
-            <a:cxnSpLocks/>
-            <a:stCxn id="12" idx="3"/>
-            <a:endCxn id="5" idx="1"/>
-          </p:cNvCxnSpPr>
-          <p:nvPr/>
-        </p:nvCxnSpPr>
-        <p:spPr>
-          <a:xfrm>
-            <a:off x="2286001" y="3749326"/>
-            <a:ext cx="1137920" cy="1049290"/>
-          </a:xfrm>
-          <a:prstGeom prst="bentConnector3">
-            <a:avLst>
-              <a:gd name="adj1" fmla="val 50000"/>
-            </a:avLst>
-          </a:prstGeom>
-          <a:ln w="19050" cap="flat" cmpd="sng" algn="ctr">
-            <a:solidFill>
-              <a:schemeClr val="dk1"/>
-            </a:solidFill>
-            <a:prstDash val="solid"/>
-            <a:round/>
-            <a:headEnd type="none" w="med" len="med"/>
-            <a:tailEnd type="arrow" w="med" len="med"/>
-          </a:ln>
-        </p:spPr>
-        <p:style>
-          <a:lnRef idx="0">
-            <a:scrgbClr r="0" g="0" b="0"/>
-          </a:lnRef>
-          <a:fillRef idx="0">
-            <a:scrgbClr r="0" g="0" b="0"/>
-          </a:fillRef>
-          <a:effectRef idx="0">
-            <a:scrgbClr r="0" g="0" b="0"/>
-          </a:effectRef>
-          <a:fontRef idx="minor">
-            <a:schemeClr val="tx1"/>
-          </a:fontRef>
-        </p:style>
-      </p:cxnSp>
-      <p:cxnSp>
-        <p:nvCxnSpPr>
-          <p:cNvPr id="41" name="直線單箭頭接點 40">
-            <a:extLst>
-              <a:ext uri="{FF2B5EF4-FFF2-40B4-BE49-F238E27FC236}">
-                <a16:creationId xmlns:a16="http://schemas.microsoft.com/office/drawing/2014/main" id="{0C90BB07-4D71-A062-87D4-8369AE6A8ED6}"/>
-              </a:ext>
-            </a:extLst>
-          </p:cNvPr>
-          <p:cNvCxnSpPr>
-            <a:stCxn id="3" idx="3"/>
-            <a:endCxn id="9" idx="1"/>
-          </p:cNvCxnSpPr>
-          <p:nvPr/>
-        </p:nvCxnSpPr>
-        <p:spPr>
-          <a:xfrm>
-            <a:off x="5171441" y="2615914"/>
-            <a:ext cx="1899920" cy="0"/>
-          </a:xfrm>
-          <a:prstGeom prst="straightConnector1">
-            <a:avLst/>
-          </a:prstGeom>
-          <a:ln w="19050" cap="flat" cmpd="sng" algn="ctr">
-            <a:solidFill>
-              <a:schemeClr val="dk1"/>
-            </a:solidFill>
-            <a:prstDash val="solid"/>
-            <a:round/>
-            <a:headEnd type="none" w="med" len="med"/>
-            <a:tailEnd type="arrow" w="med" len="med"/>
-          </a:ln>
-        </p:spPr>
-        <p:style>
-          <a:lnRef idx="0">
-            <a:scrgbClr r="0" g="0" b="0"/>
-          </a:lnRef>
-          <a:fillRef idx="0">
-            <a:scrgbClr r="0" g="0" b="0"/>
-          </a:fillRef>
-          <a:effectRef idx="0">
-            <a:scrgbClr r="0" g="0" b="0"/>
-          </a:effectRef>
-          <a:fontRef idx="minor">
-            <a:schemeClr val="tx1"/>
-          </a:fontRef>
-        </p:style>
-      </p:cxnSp>
-      <p:cxnSp>
-        <p:nvCxnSpPr>
-          <p:cNvPr id="42" name="直線單箭頭接點 41">
-            <a:extLst>
-              <a:ext uri="{FF2B5EF4-FFF2-40B4-BE49-F238E27FC236}">
-                <a16:creationId xmlns:a16="http://schemas.microsoft.com/office/drawing/2014/main" id="{2B2740E9-9DE2-44F4-9F79-B191641493A5}"/>
-              </a:ext>
-            </a:extLst>
-          </p:cNvPr>
-          <p:cNvCxnSpPr>
-            <a:cxnSpLocks/>
-            <a:stCxn id="5" idx="3"/>
-          </p:cNvCxnSpPr>
-          <p:nvPr/>
-        </p:nvCxnSpPr>
-        <p:spPr>
-          <a:xfrm>
-            <a:off x="5171441" y="4798616"/>
-            <a:ext cx="1899920" cy="0"/>
-          </a:xfrm>
-          <a:prstGeom prst="straightConnector1">
-            <a:avLst/>
-          </a:prstGeom>
-          <a:ln w="19050" cap="flat" cmpd="sng" algn="ctr">
-            <a:solidFill>
-              <a:schemeClr val="dk1"/>
-            </a:solidFill>
-            <a:prstDash val="solid"/>
-            <a:round/>
-            <a:headEnd type="none" w="med" len="med"/>
-            <a:tailEnd type="arrow" w="med" len="med"/>
-          </a:ln>
-        </p:spPr>
-        <p:style>
-          <a:lnRef idx="0">
-            <a:scrgbClr r="0" g="0" b="0"/>
-          </a:lnRef>
-          <a:fillRef idx="0">
-            <a:scrgbClr r="0" g="0" b="0"/>
-          </a:fillRef>
-          <a:effectRef idx="0">
-            <a:scrgbClr r="0" g="0" b="0"/>
-          </a:effectRef>
-          <a:fontRef idx="minor">
-            <a:schemeClr val="tx1"/>
-          </a:fontRef>
-        </p:style>
-      </p:cxnSp>
-      <p:sp>
-        <p:nvSpPr>
-          <p:cNvPr id="48" name="標題 1">
-            <a:extLst>
-              <a:ext uri="{FF2B5EF4-FFF2-40B4-BE49-F238E27FC236}">
-                <a16:creationId xmlns:a16="http://schemas.microsoft.com/office/drawing/2014/main" id="{8D095D36-8CDE-8903-759D-B3DC6978455E}"/>
-              </a:ext>
-            </a:extLst>
-          </p:cNvPr>
-          <p:cNvSpPr>
-            <a:spLocks noGrp="1"/>
-          </p:cNvSpPr>
-          <p:nvPr>
-            <p:ph type="title"/>
-          </p:nvPr>
-        </p:nvSpPr>
-        <p:spPr>
-          <a:xfrm>
-            <a:off x="609602" y="609600"/>
-            <a:ext cx="8077200" cy="533400"/>
-          </a:xfrm>
-          <a:ln>
-            <a:noFill/>
-          </a:ln>
-        </p:spPr>
-        <p:txBody>
-          <a:bodyPr/>
-          <a:lstStyle/>
-          <a:p>
-            <a:r>
-              <a:rPr lang="zh-TW" altLang="en-US" dirty="0">
-                <a:latin typeface="Times New Roman" panose="02020603050405020304" pitchFamily="18" charset="0"/>
-                <a:ea typeface="標楷體" panose="03000509000000000000" pitchFamily="65" charset="-120"/>
-                <a:cs typeface="Times New Roman" panose="02020603050405020304" pitchFamily="18" charset="0"/>
-              </a:rPr>
-              <a:t>本次進度</a:t>
-            </a:r>
-            <a:r>
-              <a:rPr lang="en-US" altLang="zh-TW" dirty="0">
-                <a:latin typeface="Times New Roman" panose="02020603050405020304" pitchFamily="18" charset="0"/>
-                <a:ea typeface="標楷體" panose="03000509000000000000" pitchFamily="65" charset="-120"/>
-                <a:cs typeface="Times New Roman" panose="02020603050405020304" pitchFamily="18" charset="0"/>
-              </a:rPr>
-              <a:t>:</a:t>
-            </a:r>
-            <a:r>
-              <a:rPr lang="zh-TW" altLang="zh-TW" dirty="0">
-                <a:latin typeface="Times New Roman" panose="02020603050405020304" pitchFamily="18" charset="0"/>
-                <a:ea typeface="標楷體" panose="03000509000000000000" pitchFamily="65" charset="-120"/>
-                <a:cs typeface="Times New Roman" panose="02020603050405020304" pitchFamily="18" charset="0"/>
-              </a:rPr>
-              <a:t>Windows 的 ICC 流程</a:t>
-            </a:r>
-            <a:r>
-              <a:rPr lang="en-US" altLang="zh-TW" dirty="0">
-                <a:latin typeface="Times New Roman" panose="02020603050405020304" pitchFamily="18" charset="0"/>
-                <a:ea typeface="標楷體" panose="03000509000000000000" pitchFamily="65" charset="-120"/>
-                <a:cs typeface="Times New Roman" panose="02020603050405020304" pitchFamily="18" charset="0"/>
-              </a:rPr>
-              <a:t> </a:t>
-            </a:r>
-            <a:endParaRPr lang="zh-TW" altLang="en-US" dirty="0">
-              <a:latin typeface="Times New Roman" panose="02020603050405020304" pitchFamily="18" charset="0"/>
-              <a:ea typeface="標楷體" panose="03000509000000000000" pitchFamily="65" charset="-120"/>
-              <a:cs typeface="Times New Roman" panose="02020603050405020304" pitchFamily="18" charset="0"/>
-            </a:endParaRPr>
-          </a:p>
-        </p:txBody>
-      </p:sp>
-      <p:sp>
-        <p:nvSpPr>
-          <p:cNvPr id="2" name="矩形 1">
-            <a:extLst>
-              <a:ext uri="{FF2B5EF4-FFF2-40B4-BE49-F238E27FC236}">
-                <a16:creationId xmlns:a16="http://schemas.microsoft.com/office/drawing/2014/main" id="{FA88793D-5321-5C32-9E1A-F1735C86BAD9}"/>
-              </a:ext>
-            </a:extLst>
-          </p:cNvPr>
-          <p:cNvSpPr/>
-          <p:nvPr/>
-        </p:nvSpPr>
-        <p:spPr>
-          <a:xfrm>
-            <a:off x="3475673" y="2967335"/>
-            <a:ext cx="2954655" cy="923330"/>
-          </a:xfrm>
-          <a:prstGeom prst="rect">
-            <a:avLst/>
-          </a:prstGeom>
-          <a:noFill/>
-        </p:spPr>
-        <p:txBody>
-          <a:bodyPr wrap="none" lIns="91440" tIns="45720" rIns="91440" bIns="45720">
-            <a:spAutoFit/>
-          </a:bodyPr>
-          <a:lstStyle/>
-          <a:p>
-            <a:pPr algn="ctr"/>
-            <a:r>
-              <a:rPr lang="zh-TW" altLang="en-US" sz="5400" b="0" cap="none" spc="0" dirty="0">
-                <a:ln w="0"/>
-                <a:solidFill>
-                  <a:srgbClr val="FF0000"/>
-                </a:solidFill>
-                <a:effectLst>
-                  <a:outerShdw blurRad="38100" dist="19050" dir="2700000" algn="tl" rotWithShape="0">
-                    <a:schemeClr val="dk1">
-                      <a:alpha val="40000"/>
-                    </a:schemeClr>
-                  </a:outerShdw>
-                </a:effectLst>
-              </a:rPr>
-              <a:t>不要箭頭</a:t>
-            </a:r>
-          </a:p>
-        </p:txBody>
-      </p:sp>
-    </p:spTree>
-    <p:extLst>
-      <p:ext uri="{BB962C8B-B14F-4D97-AF65-F5344CB8AC3E}">
-        <p14:creationId xmlns:p14="http://schemas.microsoft.com/office/powerpoint/2010/main" val="3024968246"/>
+        <p14:creationId xmlns:p14="http://schemas.microsoft.com/office/powerpoint/2010/main" val="2297188540"/>
       </p:ext>
     </p:extLst>
   </p:cSld>
@@ -13128,7 +12756,7 @@
                 <a:ea typeface="標楷體" panose="03000509000000000000" pitchFamily="65" charset="-120"/>
                 <a:cs typeface="Times New Roman" panose="02020603050405020304" pitchFamily="18" charset="0"/>
               </a:rPr>
-              <a:t>的數據</a:t>
+              <a:t>的各項數據</a:t>
             </a:r>
             <a:endParaRPr lang="en-US" altLang="zh-TW" sz="1600" dirty="0">
               <a:latin typeface="Times New Roman" panose="02020603050405020304" pitchFamily="18" charset="0"/>
@@ -13192,7 +12820,7 @@
                 <a:ea typeface="標楷體" panose="03000509000000000000" pitchFamily="65" charset="-120"/>
                 <a:cs typeface="Times New Roman" panose="02020603050405020304" pitchFamily="18" charset="0"/>
               </a:rPr>
-              <a:t>6</a:t>
+              <a:t>3</a:t>
             </a:r>
             <a:r>
               <a:rPr lang="zh-TW" altLang="zh-TW" dirty="0">
@@ -14408,10 +14036,7 @@
                   <a:pPr/>
                   <a14:m>
                     <m:oMathPara xmlns:m="http://schemas.openxmlformats.org/officeDocument/2006/math">
-                      <m:oMathParaPr>
-                        <m:jc m:val="centerGroup"/>
-                      </m:oMathParaPr>
-                      <m:oMath xmlns:m="http://schemas.openxmlformats.org/officeDocument/2006/math">
+                      <m:oMath>
                         <m:r>
                           <a:rPr lang="pl-PL" altLang="zh-TW" sz="1600" i="1">
                             <a:latin typeface="Cambria Math" panose="02040503050406030204" pitchFamily="18" charset="0"/>
@@ -14557,15 +14182,12 @@
                   <a:pPr/>
                   <a14:m>
                     <m:oMathPara xmlns:m="http://schemas.openxmlformats.org/officeDocument/2006/math">
-                      <m:oMathParaPr>
-                        <m:jc m:val="centerGroup"/>
-                      </m:oMathParaPr>
-                      <m:oMath xmlns:m="http://schemas.openxmlformats.org/officeDocument/2006/math">
+                      <m:oMath>
                         <m:r>
                           <m:rPr>
                             <m:nor/>
                           </m:rPr>
-                          <a:rPr lang="en-US" altLang="zh-TW" sz="1600">
+                          <a:rPr lang="en-US" altLang="zh-TW" sz="1600" i="0">
                             <a:latin typeface="Times New Roman" panose="02020603050405020304" pitchFamily="18" charset="0"/>
                             <a:ea typeface="標楷體" panose="03000509000000000000" pitchFamily="65" charset="-120"/>
                             <a:cs typeface="Times New Roman" panose="02020603050405020304" pitchFamily="18" charset="0"/>
@@ -14576,7 +14198,7 @@
                           <m:rPr>
                             <m:nor/>
                           </m:rPr>
-                          <a:rPr lang="en-US" altLang="zh-TW" sz="1600" baseline="-25000">
+                          <a:rPr lang="en-US" altLang="zh-TW" sz="1600" i="0" baseline="-25000">
                             <a:latin typeface="Times New Roman" panose="02020603050405020304" pitchFamily="18" charset="0"/>
                             <a:ea typeface="標楷體" panose="03000509000000000000" pitchFamily="65" charset="-120"/>
                             <a:cs typeface="Times New Roman" panose="02020603050405020304" pitchFamily="18" charset="0"/>
@@ -14587,7 +14209,7 @@
                           <m:rPr>
                             <m:nor/>
                           </m:rPr>
-                          <a:rPr lang="en-US" altLang="zh-TW" sz="1600">
+                          <a:rPr lang="en-US" altLang="zh-TW" sz="1600" i="0">
                             <a:latin typeface="Times New Roman" panose="02020603050405020304" pitchFamily="18" charset="0"/>
                             <a:ea typeface="標楷體" panose="03000509000000000000" pitchFamily="65" charset="-120"/>
                             <a:cs typeface="Times New Roman" panose="02020603050405020304" pitchFamily="18" charset="0"/>
@@ -14684,15 +14306,12 @@
                   <a:pPr/>
                   <a14:m>
                     <m:oMathPara xmlns:m="http://schemas.openxmlformats.org/officeDocument/2006/math">
-                      <m:oMathParaPr>
-                        <m:jc m:val="centerGroup"/>
-                      </m:oMathParaPr>
-                      <m:oMath xmlns:m="http://schemas.openxmlformats.org/officeDocument/2006/math">
+                      <m:oMath>
                         <m:r>
                           <m:rPr>
                             <m:nor/>
                           </m:rPr>
-                          <a:rPr lang="en-US" altLang="zh-TW" sz="1600">
+                          <a:rPr lang="en-US" altLang="zh-TW" sz="1600" i="0">
                             <a:latin typeface="Times New Roman" panose="02020603050405020304" pitchFamily="18" charset="0"/>
                             <a:ea typeface="標楷體" panose="03000509000000000000" pitchFamily="65" charset="-120"/>
                             <a:cs typeface="Times New Roman" panose="02020603050405020304" pitchFamily="18" charset="0"/>
@@ -14703,7 +14322,7 @@
                           <m:rPr>
                             <m:nor/>
                           </m:rPr>
-                          <a:rPr lang="en-US" altLang="zh-TW" sz="1600" baseline="-25000">
+                          <a:rPr lang="en-US" altLang="zh-TW" sz="1600" i="0" baseline="-25000">
                             <a:latin typeface="Times New Roman" panose="02020603050405020304" pitchFamily="18" charset="0"/>
                             <a:ea typeface="標楷體" panose="03000509000000000000" pitchFamily="65" charset="-120"/>
                             <a:cs typeface="Times New Roman" panose="02020603050405020304" pitchFamily="18" charset="0"/>
@@ -14714,7 +14333,7 @@
                           <m:rPr>
                             <m:nor/>
                           </m:rPr>
-                          <a:rPr lang="en-US" altLang="zh-TW" sz="1600">
+                          <a:rPr lang="en-US" altLang="zh-TW" sz="1600" i="0">
                             <a:latin typeface="Times New Roman" panose="02020603050405020304" pitchFamily="18" charset="0"/>
                             <a:ea typeface="標楷體" panose="03000509000000000000" pitchFamily="65" charset="-120"/>
                             <a:cs typeface="Times New Roman" panose="02020603050405020304" pitchFamily="18" charset="0"/>
@@ -14724,8 +14343,8 @@
                         <m:f>
                           <m:fPr>
                             <m:ctrlPr>
-                              <a:rPr lang="en-US" altLang="zh-TW" sz="1600" i="1">
-                                <a:latin typeface="Cambria Math" panose="02040503050406030204" pitchFamily="18" charset="0"/>
+                              <a:rPr lang="en-US" altLang="zh-TW" sz="1600" i="0">
+                                <a:latin typeface="Times New Roman" panose="02020603050405020304" pitchFamily="18" charset="0"/>
                                 <a:ea typeface="標楷體" panose="03000509000000000000" pitchFamily="65" charset="-120"/>
                                 <a:cs typeface="Times New Roman" panose="02020603050405020304" pitchFamily="18" charset="0"/>
                               </a:rPr>
@@ -14736,56 +14355,12 @@
                               <m:rPr>
                                 <m:nor/>
                               </m:rPr>
-                              <a:rPr lang="en-US" altLang="zh-TW" sz="1600">
+                              <a:rPr lang="en-US" altLang="zh-TW" sz="1600" i="0">
                                 <a:latin typeface="Times New Roman" panose="02020603050405020304" pitchFamily="18" charset="0"/>
                                 <a:ea typeface="標楷體" panose="03000509000000000000" pitchFamily="65" charset="-120"/>
                                 <a:cs typeface="Times New Roman" panose="02020603050405020304" pitchFamily="18" charset="0"/>
                               </a:rPr>
-                              <m:t>(1 − </m:t>
-                            </m:r>
-                            <m:r>
-                              <m:rPr>
-                                <m:nor/>
-                              </m:rPr>
-                              <a:rPr lang="en-US" altLang="zh-TW" sz="1600">
-                                <a:latin typeface="Times New Roman" panose="02020603050405020304" pitchFamily="18" charset="0"/>
-                                <a:ea typeface="標楷體" panose="03000509000000000000" pitchFamily="65" charset="-120"/>
-                                <a:cs typeface="Times New Roman" panose="02020603050405020304" pitchFamily="18" charset="0"/>
-                              </a:rPr>
-                              <m:t>xW</m:t>
-                            </m:r>
-                            <m:r>
-                              <m:rPr>
-                                <m:nor/>
-                              </m:rPr>
-                              <a:rPr lang="en-US" altLang="zh-TW" sz="1600">
-                                <a:latin typeface="Times New Roman" panose="02020603050405020304" pitchFamily="18" charset="0"/>
-                                <a:ea typeface="標楷體" panose="03000509000000000000" pitchFamily="65" charset="-120"/>
-                                <a:cs typeface="Times New Roman" panose="02020603050405020304" pitchFamily="18" charset="0"/>
-                              </a:rPr>
-                              <m:t> − </m:t>
-                            </m:r>
-                            <m:r>
-                              <m:rPr>
-                                <m:nor/>
-                              </m:rPr>
-                              <a:rPr lang="en-US" altLang="zh-TW" sz="1600">
-                                <a:latin typeface="Times New Roman" panose="02020603050405020304" pitchFamily="18" charset="0"/>
-                                <a:ea typeface="標楷體" panose="03000509000000000000" pitchFamily="65" charset="-120"/>
-                                <a:cs typeface="Times New Roman" panose="02020603050405020304" pitchFamily="18" charset="0"/>
-                              </a:rPr>
-                              <m:t>yW</m:t>
-                            </m:r>
-                            <m:r>
-                              <m:rPr>
-                                <m:nor/>
-                              </m:rPr>
-                              <a:rPr lang="en-US" altLang="zh-TW" sz="1600">
-                                <a:latin typeface="Times New Roman" panose="02020603050405020304" pitchFamily="18" charset="0"/>
-                                <a:ea typeface="標楷體" panose="03000509000000000000" pitchFamily="65" charset="-120"/>
-                                <a:cs typeface="Times New Roman" panose="02020603050405020304" pitchFamily="18" charset="0"/>
-                              </a:rPr>
-                              <m:t>)</m:t>
+                              <m:t>(1 − xW − yW)</m:t>
                             </m:r>
                           </m:num>
                           <m:den>
@@ -14793,7 +14368,7 @@
                               <m:rPr>
                                 <m:nor/>
                               </m:rPr>
-                              <a:rPr lang="en-US" altLang="zh-TW" sz="1600">
+                              <a:rPr lang="en-US" altLang="zh-TW" sz="1600" i="0">
                                 <a:latin typeface="Times New Roman" panose="02020603050405020304" pitchFamily="18" charset="0"/>
                                 <a:ea typeface="標楷體" panose="03000509000000000000" pitchFamily="65" charset="-120"/>
                                 <a:cs typeface="Times New Roman" panose="02020603050405020304" pitchFamily="18" charset="0"/>
@@ -14804,7 +14379,7 @@
                               <m:rPr>
                                 <m:nor/>
                               </m:rPr>
-                              <a:rPr lang="en-US" altLang="zh-TW" sz="1600" baseline="-25000">
+                              <a:rPr lang="en-US" altLang="zh-TW" sz="1600" i="0" baseline="-25000">
                                 <a:latin typeface="Times New Roman" panose="02020603050405020304" pitchFamily="18" charset="0"/>
                                 <a:ea typeface="標楷體" panose="03000509000000000000" pitchFamily="65" charset="-120"/>
                                 <a:cs typeface="Times New Roman" panose="02020603050405020304" pitchFamily="18" charset="0"/>
@@ -15311,10 +14886,7 @@
                   <a:pPr/>
                   <a14:m>
                     <m:oMathPara xmlns:m="http://schemas.openxmlformats.org/officeDocument/2006/math">
-                      <m:oMathParaPr>
-                        <m:jc m:val="centerGroup"/>
-                      </m:oMathParaPr>
-                      <m:oMath xmlns:m="http://schemas.openxmlformats.org/officeDocument/2006/math">
+                      <m:oMath>
                         <m:sSub>
                           <m:sSubPr>
                             <m:ctrlPr>
@@ -15349,7 +14921,7 @@
                         <m:f>
                           <m:fPr>
                             <m:ctrlPr>
-                              <a:rPr lang="zh-TW" altLang="en-US" i="1">
+                              <a:rPr lang="zh-TW" altLang="en-US" i="0">
                                 <a:latin typeface="Cambria Math" panose="02040503050406030204" pitchFamily="18" charset="0"/>
                               </a:rPr>
                             </m:ctrlPr>
@@ -15467,10 +15039,7 @@
                   <a:pPr/>
                   <a14:m>
                     <m:oMathPara xmlns:m="http://schemas.openxmlformats.org/officeDocument/2006/math">
-                      <m:oMathParaPr>
-                        <m:jc m:val="centerGroup"/>
-                      </m:oMathParaPr>
-                      <m:oMath xmlns:m="http://schemas.openxmlformats.org/officeDocument/2006/math">
+                      <m:oMath>
                         <m:sSub>
                           <m:sSubPr>
                             <m:ctrlPr>
@@ -15505,7 +15074,7 @@
                         <m:f>
                           <m:fPr>
                             <m:ctrlPr>
-                              <a:rPr lang="zh-TW" altLang="en-US" i="1">
+                              <a:rPr lang="zh-TW" altLang="en-US" i="0">
                                 <a:latin typeface="Cambria Math" panose="02040503050406030204" pitchFamily="18" charset="0"/>
                               </a:rPr>
                             </m:ctrlPr>
@@ -19507,7 +19076,7 @@
             </a:r>
             <a:r>
               <a:rPr lang="en-US" altLang="zh-TW" sz="1200" dirty="0"/>
-              <a:t>2</a:t>
+              <a:t>1</a:t>
             </a:r>
             <a:r>
               <a:rPr lang="zh-TW" altLang="zh-TW" sz="1200" dirty="0"/>
@@ -20612,8 +20181,8 @@
           </a:prstGeom>
         </p:spPr>
       </p:pic>
-      <mc:AlternateContent xmlns:mc="http://schemas.openxmlformats.org/markup-compatibility/2006">
-        <mc:Choice xmlns:a14="http://schemas.microsoft.com/office/drawing/2010/main" Requires="a14">
+      <mc:AlternateContent xmlns:mc="http://schemas.openxmlformats.org/markup-compatibility/2006" xmlns:a14="http://schemas.microsoft.com/office/drawing/2010/main">
+        <mc:Choice Requires="a14">
           <p:sp>
             <p:nvSpPr>
               <p:cNvPr id="5" name="文字方塊 4">
@@ -20645,15 +20214,12 @@
                 <a:pPr/>
                 <a14:m>
                   <m:oMathPara xmlns:m="http://schemas.openxmlformats.org/officeDocument/2006/math">
-                    <m:oMathParaPr>
-                      <m:jc m:val="centerGroup"/>
-                    </m:oMathParaPr>
-                    <m:oMath xmlns:m="http://schemas.openxmlformats.org/officeDocument/2006/math">
+                    <m:oMath>
                       <m:r>
                         <m:rPr>
                           <m:nor/>
                         </m:rPr>
-                        <a:rPr lang="en-US" altLang="zh-TW" sz="2000"/>
+                        <a:rPr lang="en-US" altLang="zh-TW" sz="2000" i="0"/>
                         <m:t>XYZ</m:t>
                       </m:r>
                       <m:r>
@@ -20666,7 +20232,7 @@
                         <m:rPr>
                           <m:nor/>
                         </m:rPr>
-                        <a:rPr lang="en-US" altLang="zh-TW" sz="2000"/>
+                        <a:rPr lang="en-US" altLang="zh-TW" sz="2000" i="0"/>
                         <m:t>=</m:t>
                       </m:r>
                       <m:r>
@@ -20679,21 +20245,21 @@
                         <m:rPr>
                           <m:nor/>
                         </m:rPr>
-                        <a:rPr lang="en-US" altLang="zh-TW" sz="2000"/>
+                        <a:rPr lang="en-US" altLang="zh-TW" sz="2000" i="0"/>
                         <m:t>MRGB</m:t>
                       </m:r>
                       <m:r>
                         <m:rPr>
                           <m:nor/>
                         </m:rPr>
-                        <a:rPr lang="en-US" altLang="zh-TW" sz="2000" baseline="-25000" smtClean="0"/>
+                        <a:rPr lang="en-US" altLang="zh-TW" sz="2000" i="0" baseline="-25000" smtClean="0"/>
                         <m:t>linear</m:t>
                       </m:r>
                       <m:r>
                         <m:rPr>
                           <m:nor/>
                         </m:rPr>
-                        <a:rPr lang="en-US" altLang="zh-TW" sz="2000"/>
+                        <a:rPr lang="en-US" altLang="zh-TW" sz="2000" i="0"/>
                         <m:t>​</m:t>
                       </m:r>
                     </m:oMath>
@@ -20704,7 +20270,7 @@
             </p:txBody>
           </p:sp>
         </mc:Choice>
-        <mc:Fallback>
+        <mc:Fallback xmlns="">
           <p:sp>
             <p:nvSpPr>
               <p:cNvPr id="5" name="文字方塊 4">
@@ -21457,7 +21023,7 @@
         <p:cNvPr id="1" name="">
           <a:extLst>
             <a:ext uri="{FF2B5EF4-FFF2-40B4-BE49-F238E27FC236}">
-              <a16:creationId xmlns:a16="http://schemas.microsoft.com/office/drawing/2014/main" id="{00E3FA89-4E74-50B1-9E1F-3455B72FC7C8}"/>
+              <a16:creationId xmlns:a16="http://schemas.microsoft.com/office/drawing/2014/main" id="{4C524AA7-A8A7-A341-3AC3-0E3E342460FB}"/>
             </a:ext>
           </a:extLst>
         </p:cNvPr>
@@ -21474,68 +21040,10 @@
       </p:grpSpPr>
       <p:sp>
         <p:nvSpPr>
-          <p:cNvPr id="5" name="標題 1">
-            <a:extLst>
-              <a:ext uri="{FF2B5EF4-FFF2-40B4-BE49-F238E27FC236}">
-                <a16:creationId xmlns:a16="http://schemas.microsoft.com/office/drawing/2014/main" id="{5A496009-97E3-5EBF-303F-885B565890A2}"/>
-              </a:ext>
-            </a:extLst>
-          </p:cNvPr>
-          <p:cNvSpPr>
-            <a:spLocks noGrp="1"/>
-          </p:cNvSpPr>
-          <p:nvPr>
-            <p:ph type="title"/>
-          </p:nvPr>
-        </p:nvSpPr>
-        <p:spPr>
-          <a:xfrm>
-            <a:off x="609602" y="609600"/>
-            <a:ext cx="8077200" cy="533400"/>
-          </a:xfrm>
-        </p:spPr>
-        <p:txBody>
-          <a:bodyPr/>
-          <a:lstStyle/>
-          <a:p>
-            <a:r>
-              <a:rPr lang="zh-TW" altLang="en-US" dirty="0">
-                <a:latin typeface="Times New Roman" panose="02020603050405020304" pitchFamily="18" charset="0"/>
-                <a:ea typeface="標楷體" panose="03000509000000000000" pitchFamily="65" charset="-120"/>
-                <a:cs typeface="Times New Roman" panose="02020603050405020304" pitchFamily="18" charset="0"/>
-              </a:rPr>
-              <a:t>本次進度</a:t>
-            </a:r>
-            <a:r>
-              <a:rPr lang="en-US" altLang="zh-TW" dirty="0">
-                <a:latin typeface="Times New Roman" panose="02020603050405020304" pitchFamily="18" charset="0"/>
-                <a:ea typeface="標楷體" panose="03000509000000000000" pitchFamily="65" charset="-120"/>
-                <a:cs typeface="Times New Roman" panose="02020603050405020304" pitchFamily="18" charset="0"/>
-              </a:rPr>
-              <a:t>:</a:t>
-            </a:r>
-            <a:r>
-              <a:rPr lang="zh-TW" altLang="zh-TW" dirty="0">
-                <a:latin typeface="Times New Roman" panose="02020603050405020304" pitchFamily="18" charset="0"/>
-                <a:ea typeface="標楷體" panose="03000509000000000000" pitchFamily="65" charset="-120"/>
-                <a:cs typeface="Times New Roman" panose="02020603050405020304" pitchFamily="18" charset="0"/>
-              </a:rPr>
-              <a:t>ICC Profile 與 Calibration</a:t>
-            </a:r>
-            <a:endParaRPr lang="zh-TW" altLang="en-US" dirty="0">
-              <a:latin typeface="Times New Roman" panose="02020603050405020304" pitchFamily="18" charset="0"/>
-              <a:ea typeface="標楷體" panose="03000509000000000000" pitchFamily="65" charset="-120"/>
-              <a:cs typeface="Times New Roman" panose="02020603050405020304" pitchFamily="18" charset="0"/>
-            </a:endParaRPr>
-          </a:p>
-        </p:txBody>
-      </p:sp>
-      <p:sp>
-        <p:nvSpPr>
           <p:cNvPr id="8" name="文字版面配置區 6">
             <a:extLst>
               <a:ext uri="{FF2B5EF4-FFF2-40B4-BE49-F238E27FC236}">
-                <a16:creationId xmlns:a16="http://schemas.microsoft.com/office/drawing/2014/main" id="{195C21E2-F9E7-4DB1-C25F-84B88D0BB972}"/>
+                <a16:creationId xmlns:a16="http://schemas.microsoft.com/office/drawing/2014/main" id="{70AA535C-35C8-9CAA-5BCE-9D60896E7559}"/>
               </a:ext>
             </a:extLst>
           </p:cNvPr>
@@ -21808,9 +21316,6 @@
           </a:lstStyle>
           <a:p>
             <a:pPr marL="457200" lvl="1" indent="-406400">
-              <a:lnSpc>
-                <a:spcPct val="150000"/>
-              </a:lnSpc>
               <a:spcBef>
                 <a:spcPts val="560"/>
               </a:spcBef>
@@ -21821,65 +21326,7 @@
               <a:buFont typeface="Noto Sans Symbols"/>
               <a:buChar char="❖"/>
             </a:pPr>
-            <a:r>
-              <a:rPr lang="zh-TW" altLang="zh-TW" sz="2000" dirty="0">
-                <a:solidFill>
-                  <a:schemeClr val="tx1"/>
-                </a:solidFill>
-                <a:latin typeface="Times New Roman" panose="02020603050405020304" pitchFamily="18" charset="0"/>
-                <a:ea typeface="標楷體" panose="03000509000000000000" pitchFamily="65" charset="-120"/>
-                <a:cs typeface="Times New Roman" panose="02020603050405020304" pitchFamily="18" charset="0"/>
-              </a:rPr>
-              <a:t>ICC 官方對 Device Profile 的定義</a:t>
-            </a:r>
-            <a:r>
-              <a:rPr lang="en-US" altLang="zh-TW" sz="2000" dirty="0">
-                <a:solidFill>
-                  <a:schemeClr val="tx1"/>
-                </a:solidFill>
-                <a:latin typeface="Times New Roman" panose="02020603050405020304" pitchFamily="18" charset="0"/>
-                <a:ea typeface="標楷體" panose="03000509000000000000" pitchFamily="65" charset="-120"/>
-                <a:cs typeface="Times New Roman" panose="02020603050405020304" pitchFamily="18" charset="0"/>
-              </a:rPr>
-              <a:t> </a:t>
-            </a:r>
             <a:endParaRPr lang="en-US" altLang="zh-TW" dirty="0">
-              <a:solidFill>
-                <a:schemeClr val="tx1"/>
-              </a:solidFill>
-              <a:latin typeface="Times New Roman" panose="02020603050405020304" pitchFamily="18" charset="0"/>
-              <a:ea typeface="標楷體" panose="03000509000000000000" pitchFamily="65" charset="-120"/>
-              <a:cs typeface="Times New Roman" panose="02020603050405020304" pitchFamily="18" charset="0"/>
-            </a:endParaRPr>
-          </a:p>
-          <a:p>
-            <a:pPr lvl="1">
-              <a:lnSpc>
-                <a:spcPct val="150000"/>
-              </a:lnSpc>
-            </a:pPr>
-            <a:r>
-              <a:rPr lang="zh-TW" altLang="zh-TW" sz="1600" dirty="0">
-                <a:solidFill>
-                  <a:schemeClr val="tx1"/>
-                </a:solidFill>
-                <a:latin typeface="Times New Roman" panose="02020603050405020304" pitchFamily="18" charset="0"/>
-                <a:ea typeface="標楷體" panose="03000509000000000000" pitchFamily="65" charset="-120"/>
-                <a:cs typeface="Times New Roman" panose="02020603050405020304" pitchFamily="18" charset="0"/>
-              </a:rPr>
-              <a:t>Device profiles provide color management systems with the information necessary to convert color data between native device color spaces and device independent color spaces.</a:t>
-            </a:r>
-            <a:endParaRPr lang="en-US" altLang="zh-TW" sz="1600" dirty="0">
-              <a:solidFill>
-                <a:schemeClr val="tx1"/>
-              </a:solidFill>
-              <a:latin typeface="Times New Roman" panose="02020603050405020304" pitchFamily="18" charset="0"/>
-              <a:ea typeface="標楷體" panose="03000509000000000000" pitchFamily="65" charset="-120"/>
-              <a:cs typeface="Times New Roman" panose="02020603050405020304" pitchFamily="18" charset="0"/>
-            </a:endParaRPr>
-          </a:p>
-          <a:p>
-            <a:endParaRPr lang="en-US" altLang="zh-TW" sz="2000" dirty="0">
               <a:solidFill>
                 <a:schemeClr val="tx1"/>
               </a:solidFill>
@@ -21892,10 +21339,10 @@
       </p:sp>
       <p:sp>
         <p:nvSpPr>
-          <p:cNvPr id="9" name="矩形 8">
+          <p:cNvPr id="12" name="矩形 11">
             <a:extLst>
               <a:ext uri="{FF2B5EF4-FFF2-40B4-BE49-F238E27FC236}">
-                <a16:creationId xmlns:a16="http://schemas.microsoft.com/office/drawing/2014/main" id="{48A74D8B-01C0-F984-0DEB-2EB41E60D81B}"/>
+                <a16:creationId xmlns:a16="http://schemas.microsoft.com/office/drawing/2014/main" id="{650C616D-3C14-C08D-8569-D9AD85C5DC81}"/>
               </a:ext>
             </a:extLst>
           </p:cNvPr>
@@ -21904,8 +21351,8 @@
         </p:nvSpPr>
         <p:spPr>
           <a:xfrm>
-            <a:off x="609602" y="3800404"/>
-            <a:ext cx="1910080" cy="985520"/>
+            <a:off x="538481" y="3289586"/>
+            <a:ext cx="1747520" cy="919480"/>
           </a:xfrm>
           <a:prstGeom prst="rect">
             <a:avLst/>
@@ -21941,17 +21388,16 @@
           <a:p>
             <a:pPr algn="ctr"/>
             <a:r>
-              <a:rPr lang="zh-TW" altLang="zh-TW" dirty="0">
+              <a:rPr lang="zh-TW" altLang="zh-TW" sz="1600" dirty="0">
                 <a:solidFill>
                   <a:schemeClr val="tx1"/>
                 </a:solidFill>
                 <a:latin typeface="Times New Roman" panose="02020603050405020304" pitchFamily="18" charset="0"/>
-                <a:ea typeface="標楷體" panose="03000509000000000000" pitchFamily="65" charset="-120"/>
-                <a:cs typeface="Times New Roman" panose="02020603050405020304" pitchFamily="18" charset="0"/>
-              </a:rPr>
-              <a:t>原始 Display</a:t>
-            </a:r>
-            <a:endParaRPr lang="zh-TW" altLang="en-US" dirty="0">
+                <a:cs typeface="Times New Roman" panose="02020603050405020304" pitchFamily="18" charset="0"/>
+              </a:rPr>
+              <a:t>ICC Profile</a:t>
+            </a:r>
+            <a:endParaRPr lang="zh-TW" altLang="en-US" sz="1600" dirty="0">
               <a:solidFill>
                 <a:schemeClr val="tx1"/>
               </a:solidFill>
@@ -21964,10 +21410,10 @@
       </p:sp>
       <p:sp>
         <p:nvSpPr>
-          <p:cNvPr id="12" name="矩形 11">
+          <p:cNvPr id="3" name="矩形 2">
             <a:extLst>
               <a:ext uri="{FF2B5EF4-FFF2-40B4-BE49-F238E27FC236}">
-                <a16:creationId xmlns:a16="http://schemas.microsoft.com/office/drawing/2014/main" id="{E64E068D-36E8-16DA-CE03-C31A60F79A4C}"/>
+                <a16:creationId xmlns:a16="http://schemas.microsoft.com/office/drawing/2014/main" id="{ED4440B2-D934-67C7-39A3-FE56C3443B86}"/>
               </a:ext>
             </a:extLst>
           </p:cNvPr>
@@ -21976,8 +21422,8 @@
         </p:nvSpPr>
         <p:spPr>
           <a:xfrm>
-            <a:off x="3996692" y="3800404"/>
-            <a:ext cx="1910080" cy="985520"/>
+            <a:off x="3423921" y="2156174"/>
+            <a:ext cx="1747520" cy="919480"/>
           </a:xfrm>
           <a:prstGeom prst="rect">
             <a:avLst/>
@@ -22013,7 +21459,7 @@
           <a:p>
             <a:pPr algn="ctr"/>
             <a:r>
-              <a:rPr lang="zh-TW" altLang="zh-TW" dirty="0">
+              <a:rPr lang="en-US" altLang="zh-TW" sz="1600" dirty="0">
                 <a:solidFill>
                   <a:schemeClr val="tx1"/>
                 </a:solidFill>
@@ -22021,9 +21467,9 @@
                 <a:ea typeface="標楷體" panose="03000509000000000000" pitchFamily="65" charset="-120"/>
                 <a:cs typeface="Times New Roman" panose="02020603050405020304" pitchFamily="18" charset="0"/>
               </a:rPr>
-              <a:t>校正後的 Display</a:t>
-            </a:r>
-            <a:endParaRPr lang="zh-TW" altLang="en-US" dirty="0">
+              <a:t>CMM</a:t>
+            </a:r>
+            <a:endParaRPr lang="zh-TW" altLang="en-US" sz="1600" dirty="0">
               <a:solidFill>
                 <a:schemeClr val="tx1"/>
               </a:solidFill>
@@ -22036,10 +21482,10 @@
       </p:sp>
       <p:sp>
         <p:nvSpPr>
-          <p:cNvPr id="14" name="矩形 13">
+          <p:cNvPr id="5" name="矩形 4">
             <a:extLst>
               <a:ext uri="{FF2B5EF4-FFF2-40B4-BE49-F238E27FC236}">
-                <a16:creationId xmlns:a16="http://schemas.microsoft.com/office/drawing/2014/main" id="{8153D5B5-9C99-8FF4-3F82-CBB9E77B433E}"/>
+                <a16:creationId xmlns:a16="http://schemas.microsoft.com/office/drawing/2014/main" id="{F9DD2B38-5863-2279-1592-91EB1F252E2D}"/>
               </a:ext>
             </a:extLst>
           </p:cNvPr>
@@ -22048,8 +21494,8 @@
         </p:nvSpPr>
         <p:spPr>
           <a:xfrm>
-            <a:off x="7193282" y="3800404"/>
-            <a:ext cx="1910080" cy="985520"/>
+            <a:off x="3423921" y="4338876"/>
+            <a:ext cx="1747520" cy="919480"/>
           </a:xfrm>
           <a:prstGeom prst="rect">
             <a:avLst/>
@@ -22085,7 +21531,7 @@
           <a:p>
             <a:pPr algn="ctr"/>
             <a:r>
-              <a:rPr lang="zh-TW" altLang="zh-TW" dirty="0">
+              <a:rPr lang="en-US" altLang="zh-TW" sz="1600" dirty="0">
                 <a:solidFill>
                   <a:schemeClr val="tx1"/>
                 </a:solidFill>
@@ -22093,64 +21539,9 @@
                 <a:ea typeface="標楷體" panose="03000509000000000000" pitchFamily="65" charset="-120"/>
                 <a:cs typeface="Times New Roman" panose="02020603050405020304" pitchFamily="18" charset="0"/>
               </a:rPr>
-              <a:t>ICC Profile</a:t>
-            </a:r>
-            <a:endParaRPr lang="en-US" altLang="zh-TW" dirty="0">
-              <a:solidFill>
-                <a:schemeClr val="tx1"/>
-              </a:solidFill>
-              <a:latin typeface="Times New Roman" panose="02020603050405020304" pitchFamily="18" charset="0"/>
-              <a:ea typeface="標楷體" panose="03000509000000000000" pitchFamily="65" charset="-120"/>
-              <a:cs typeface="Times New Roman" panose="02020603050405020304" pitchFamily="18" charset="0"/>
-            </a:endParaRPr>
-          </a:p>
-          <a:p>
-            <a:pPr algn="ctr"/>
-            <a:r>
-              <a:rPr lang="en-US" altLang="zh-TW" dirty="0">
-                <a:solidFill>
-                  <a:schemeClr val="tx1"/>
-                </a:solidFill>
-                <a:latin typeface="Times New Roman" panose="02020603050405020304" pitchFamily="18" charset="0"/>
-                <a:ea typeface="標楷體" panose="03000509000000000000" pitchFamily="65" charset="-120"/>
-                <a:cs typeface="Times New Roman" panose="02020603050405020304" pitchFamily="18" charset="0"/>
-              </a:rPr>
-              <a:t>(</a:t>
-            </a:r>
-            <a:r>
-              <a:rPr lang="zh-TW" altLang="en-US" dirty="0">
-                <a:solidFill>
-                  <a:schemeClr val="tx1"/>
-                </a:solidFill>
-                <a:latin typeface="Times New Roman" panose="02020603050405020304" pitchFamily="18" charset="0"/>
-                <a:ea typeface="標楷體" panose="03000509000000000000" pitchFamily="65" charset="-120"/>
-                <a:cs typeface="Times New Roman" panose="02020603050405020304" pitchFamily="18" charset="0"/>
-              </a:rPr>
-              <a:t>描述</a:t>
-            </a:r>
-            <a:r>
-              <a:rPr lang="zh-TW" altLang="zh-TW" dirty="0">
-                <a:solidFill>
-                  <a:schemeClr val="tx1"/>
-                </a:solidFill>
-                <a:latin typeface="Times New Roman" panose="02020603050405020304" pitchFamily="18" charset="0"/>
-                <a:ea typeface="標楷體" panose="03000509000000000000" pitchFamily="65" charset="-120"/>
-                <a:cs typeface="Times New Roman" panose="02020603050405020304" pitchFamily="18" charset="0"/>
-              </a:rPr>
-              <a:t>校正後的 Display</a:t>
-            </a:r>
-            <a:r>
-              <a:rPr lang="en-US" altLang="zh-TW" dirty="0">
-                <a:solidFill>
-                  <a:schemeClr val="tx1"/>
-                </a:solidFill>
-                <a:latin typeface="Times New Roman" panose="02020603050405020304" pitchFamily="18" charset="0"/>
-                <a:ea typeface="標楷體" panose="03000509000000000000" pitchFamily="65" charset="-120"/>
-                <a:cs typeface="Times New Roman" panose="02020603050405020304" pitchFamily="18" charset="0"/>
-              </a:rPr>
-              <a:t>)</a:t>
-            </a:r>
-            <a:endParaRPr lang="zh-TW" altLang="en-US" dirty="0">
+              <a:t>OS/GPU</a:t>
+            </a:r>
+            <a:endParaRPr lang="zh-TW" altLang="en-US" sz="1600" dirty="0">
               <a:solidFill>
                 <a:schemeClr val="tx1"/>
               </a:solidFill>
@@ -22163,44 +21554,65 @@
       </p:sp>
       <p:sp>
         <p:nvSpPr>
-          <p:cNvPr id="16" name="文字方塊 15">
+          <p:cNvPr id="9" name="矩形 8">
             <a:extLst>
               <a:ext uri="{FF2B5EF4-FFF2-40B4-BE49-F238E27FC236}">
-                <a16:creationId xmlns:a16="http://schemas.microsoft.com/office/drawing/2014/main" id="{97D640E0-2062-5E74-A18D-25594149EC78}"/>
+                <a16:creationId xmlns:a16="http://schemas.microsoft.com/office/drawing/2014/main" id="{7CE50360-4991-7137-8AAB-9BACBD0D98BF}"/>
               </a:ext>
             </a:extLst>
           </p:cNvPr>
-          <p:cNvSpPr txBox="1"/>
+          <p:cNvSpPr/>
           <p:nvPr/>
         </p:nvSpPr>
         <p:spPr>
           <a:xfrm>
-            <a:off x="2675892" y="3787426"/>
-            <a:ext cx="1130300" cy="307777"/>
+            <a:off x="7071361" y="2156174"/>
+            <a:ext cx="1747520" cy="919480"/>
           </a:xfrm>
           <a:prstGeom prst="rect">
             <a:avLst/>
           </a:prstGeom>
-          <a:noFill/>
+          <a:solidFill>
+            <a:schemeClr val="bg1"/>
+          </a:solidFill>
+          <a:ln>
+            <a:solidFill>
+              <a:schemeClr val="tx1"/>
+            </a:solidFill>
+          </a:ln>
         </p:spPr>
+        <p:style>
+          <a:lnRef idx="2">
+            <a:schemeClr val="accent1">
+              <a:shade val="15000"/>
+            </a:schemeClr>
+          </a:lnRef>
+          <a:fillRef idx="1">
+            <a:schemeClr val="accent1"/>
+          </a:fillRef>
+          <a:effectRef idx="0">
+            <a:schemeClr val="accent1"/>
+          </a:effectRef>
+          <a:fontRef idx="minor">
+            <a:schemeClr val="lt1"/>
+          </a:fontRef>
+        </p:style>
         <p:txBody>
-          <a:bodyPr wrap="square">
-            <a:spAutoFit/>
-          </a:bodyPr>
+          <a:bodyPr rtlCol="0" anchor="ctr"/>
           <a:lstStyle/>
           <a:p>
-            <a:r>
-              <a:rPr lang="zh-TW" altLang="zh-TW" dirty="0">
+            <a:pPr algn="ctr"/>
+            <a:r>
+              <a:rPr lang="zh-TW" altLang="zh-TW" sz="1600" dirty="0">
                 <a:solidFill>
                   <a:schemeClr val="tx1"/>
                 </a:solidFill>
                 <a:latin typeface="Times New Roman" panose="02020603050405020304" pitchFamily="18" charset="0"/>
-                <a:ea typeface="標楷體" panose="03000509000000000000" pitchFamily="65" charset="-120"/>
-                <a:cs typeface="Times New Roman" panose="02020603050405020304" pitchFamily="18" charset="0"/>
-              </a:rPr>
-              <a:t>Calibration</a:t>
-            </a:r>
-            <a:endParaRPr lang="zh-TW" altLang="en-US" dirty="0">
+                <a:cs typeface="Times New Roman" panose="02020603050405020304" pitchFamily="18" charset="0"/>
+              </a:rPr>
+              <a:t>Display RGB</a:t>
+            </a:r>
+            <a:endParaRPr lang="zh-TW" altLang="en-US" sz="1600" dirty="0">
               <a:solidFill>
                 <a:schemeClr val="tx1"/>
               </a:solidFill>
@@ -22213,44 +21625,65 @@
       </p:sp>
       <p:sp>
         <p:nvSpPr>
-          <p:cNvPr id="18" name="文字方塊 17">
+          <p:cNvPr id="13" name="矩形 12">
             <a:extLst>
               <a:ext uri="{FF2B5EF4-FFF2-40B4-BE49-F238E27FC236}">
-                <a16:creationId xmlns:a16="http://schemas.microsoft.com/office/drawing/2014/main" id="{53FAAD05-5423-8425-D079-E87F7D7D0DF4}"/>
+                <a16:creationId xmlns:a16="http://schemas.microsoft.com/office/drawing/2014/main" id="{AE5CC085-F68F-A65E-FCB3-C00C72B7D390}"/>
               </a:ext>
             </a:extLst>
           </p:cNvPr>
-          <p:cNvSpPr txBox="1"/>
+          <p:cNvSpPr/>
           <p:nvPr/>
         </p:nvSpPr>
         <p:spPr>
           <a:xfrm>
-            <a:off x="6097272" y="3800968"/>
-            <a:ext cx="977900" cy="307777"/>
+            <a:off x="7071361" y="4338876"/>
+            <a:ext cx="1747520" cy="919480"/>
           </a:xfrm>
           <a:prstGeom prst="rect">
             <a:avLst/>
           </a:prstGeom>
-          <a:noFill/>
+          <a:solidFill>
+            <a:schemeClr val="bg1"/>
+          </a:solidFill>
+          <a:ln>
+            <a:solidFill>
+              <a:schemeClr val="tx1"/>
+            </a:solidFill>
+          </a:ln>
         </p:spPr>
+        <p:style>
+          <a:lnRef idx="2">
+            <a:schemeClr val="accent1">
+              <a:shade val="15000"/>
+            </a:schemeClr>
+          </a:lnRef>
+          <a:fillRef idx="1">
+            <a:schemeClr val="accent1"/>
+          </a:fillRef>
+          <a:effectRef idx="0">
+            <a:schemeClr val="accent1"/>
+          </a:effectRef>
+          <a:fontRef idx="minor">
+            <a:schemeClr val="lt1"/>
+          </a:fontRef>
+        </p:style>
         <p:txBody>
-          <a:bodyPr wrap="square">
-            <a:spAutoFit/>
-          </a:bodyPr>
+          <a:bodyPr rtlCol="0" anchor="ctr"/>
           <a:lstStyle/>
           <a:p>
-            <a:r>
-              <a:rPr lang="zh-TW" altLang="zh-TW" dirty="0">
+            <a:pPr algn="ctr"/>
+            <a:r>
+              <a:rPr lang="zh-TW" altLang="zh-TW" sz="1600" dirty="0">
                 <a:solidFill>
                   <a:schemeClr val="tx1"/>
                 </a:solidFill>
                 <a:latin typeface="Times New Roman" panose="02020603050405020304" pitchFamily="18" charset="0"/>
-                <a:ea typeface="標楷體" panose="03000509000000000000" pitchFamily="65" charset="-120"/>
-                <a:cs typeface="Times New Roman" panose="02020603050405020304" pitchFamily="18" charset="0"/>
-              </a:rPr>
-              <a:t>Profiling</a:t>
-            </a:r>
-            <a:endParaRPr lang="zh-TW" altLang="en-US" dirty="0">
+                <a:cs typeface="Times New Roman" panose="02020603050405020304" pitchFamily="18" charset="0"/>
+              </a:rPr>
+              <a:t>Corrected RGB</a:t>
+            </a:r>
+            <a:endParaRPr lang="zh-TW" altLang="en-US" sz="1600" dirty="0">
               <a:solidFill>
                 <a:schemeClr val="tx1"/>
               </a:solidFill>
@@ -22261,48 +21694,401 @@
           </a:p>
         </p:txBody>
       </p:sp>
+      <p:sp>
+        <p:nvSpPr>
+          <p:cNvPr id="15" name="文字方塊 14">
+            <a:extLst>
+              <a:ext uri="{FF2B5EF4-FFF2-40B4-BE49-F238E27FC236}">
+                <a16:creationId xmlns:a16="http://schemas.microsoft.com/office/drawing/2014/main" id="{A6668260-2771-F381-C71B-D54F678C8A36}"/>
+              </a:ext>
+            </a:extLst>
+          </p:cNvPr>
+          <p:cNvSpPr txBox="1"/>
+          <p:nvPr/>
+        </p:nvSpPr>
+        <p:spPr>
+          <a:xfrm>
+            <a:off x="5639592" y="4884798"/>
+            <a:ext cx="1111202" cy="338554"/>
+          </a:xfrm>
+          <a:prstGeom prst="rect">
+            <a:avLst/>
+          </a:prstGeom>
+          <a:noFill/>
+        </p:spPr>
+        <p:txBody>
+          <a:bodyPr wrap="none" rtlCol="0">
+            <a:spAutoFit/>
+          </a:bodyPr>
+          <a:lstStyle/>
+          <a:p>
+            <a:r>
+              <a:rPr lang="zh-TW" altLang="zh-TW" sz="1600" dirty="0">
+                <a:solidFill>
+                  <a:schemeClr val="tx1"/>
+                </a:solidFill>
+                <a:latin typeface="Times New Roman" panose="02020603050405020304" pitchFamily="18" charset="0"/>
+                <a:cs typeface="Times New Roman" panose="02020603050405020304" pitchFamily="18" charset="0"/>
+              </a:rPr>
+              <a:t>Calibration</a:t>
+            </a:r>
+            <a:endParaRPr lang="zh-TW" altLang="en-US" sz="1600" dirty="0">
+              <a:solidFill>
+                <a:schemeClr val="tx1"/>
+              </a:solidFill>
+              <a:latin typeface="Times New Roman" panose="02020603050405020304" pitchFamily="18" charset="0"/>
+              <a:cs typeface="Times New Roman" panose="02020603050405020304" pitchFamily="18" charset="0"/>
+            </a:endParaRPr>
+          </a:p>
+        </p:txBody>
+      </p:sp>
+      <p:sp>
+        <p:nvSpPr>
+          <p:cNvPr id="17" name="文字方塊 16">
+            <a:extLst>
+              <a:ext uri="{FF2B5EF4-FFF2-40B4-BE49-F238E27FC236}">
+                <a16:creationId xmlns:a16="http://schemas.microsoft.com/office/drawing/2014/main" id="{378ECEDB-098A-A787-87A8-96D722F9D4AF}"/>
+              </a:ext>
+            </a:extLst>
+          </p:cNvPr>
+          <p:cNvSpPr txBox="1"/>
+          <p:nvPr/>
+        </p:nvSpPr>
+        <p:spPr>
+          <a:xfrm>
+            <a:off x="5337372" y="2110033"/>
+            <a:ext cx="1651414" cy="338554"/>
+          </a:xfrm>
+          <a:prstGeom prst="rect">
+            <a:avLst/>
+          </a:prstGeom>
+          <a:noFill/>
+        </p:spPr>
+        <p:txBody>
+          <a:bodyPr wrap="none" rtlCol="0">
+            <a:spAutoFit/>
+          </a:bodyPr>
+          <a:lstStyle/>
+          <a:p>
+            <a:r>
+              <a:rPr lang="zh-TW" altLang="zh-TW" sz="1600" dirty="0">
+                <a:solidFill>
+                  <a:schemeClr val="tx1"/>
+                </a:solidFill>
+                <a:latin typeface="Times New Roman" panose="02020603050405020304" pitchFamily="18" charset="0"/>
+                <a:cs typeface="Times New Roman" panose="02020603050405020304" pitchFamily="18" charset="0"/>
+              </a:rPr>
+              <a:t>Color</a:t>
+            </a:r>
+            <a:r>
+              <a:rPr lang="en-US" altLang="zh-TW" sz="1600" dirty="0">
+                <a:solidFill>
+                  <a:schemeClr val="tx1"/>
+                </a:solidFill>
+                <a:latin typeface="Times New Roman" panose="02020603050405020304" pitchFamily="18" charset="0"/>
+                <a:cs typeface="Times New Roman" panose="02020603050405020304" pitchFamily="18" charset="0"/>
+              </a:rPr>
+              <a:t> </a:t>
+            </a:r>
+            <a:r>
+              <a:rPr lang="zh-TW" altLang="zh-TW" sz="1600" dirty="0">
+                <a:solidFill>
+                  <a:schemeClr val="tx1"/>
+                </a:solidFill>
+                <a:latin typeface="Times New Roman" panose="02020603050405020304" pitchFamily="18" charset="0"/>
+                <a:cs typeface="Times New Roman" panose="02020603050405020304" pitchFamily="18" charset="0"/>
+              </a:rPr>
+              <a:t>Conversion</a:t>
+            </a:r>
+            <a:endParaRPr lang="zh-TW" altLang="en-US" sz="1600" dirty="0">
+              <a:solidFill>
+                <a:schemeClr val="tx1"/>
+              </a:solidFill>
+              <a:latin typeface="Times New Roman" panose="02020603050405020304" pitchFamily="18" charset="0"/>
+              <a:cs typeface="Times New Roman" panose="02020603050405020304" pitchFamily="18" charset="0"/>
+            </a:endParaRPr>
+          </a:p>
+        </p:txBody>
+      </p:sp>
+      <p:sp>
+        <p:nvSpPr>
+          <p:cNvPr id="19" name="文字方塊 18">
+            <a:extLst>
+              <a:ext uri="{FF2B5EF4-FFF2-40B4-BE49-F238E27FC236}">
+                <a16:creationId xmlns:a16="http://schemas.microsoft.com/office/drawing/2014/main" id="{20124EDF-B4FC-F6C1-EB1E-C16D8613D5B9}"/>
+              </a:ext>
+            </a:extLst>
+          </p:cNvPr>
+          <p:cNvSpPr txBox="1"/>
+          <p:nvPr/>
+        </p:nvSpPr>
+        <p:spPr>
+          <a:xfrm>
+            <a:off x="1799684" y="2115561"/>
+            <a:ext cx="1725152" cy="338554"/>
+          </a:xfrm>
+          <a:prstGeom prst="rect">
+            <a:avLst/>
+          </a:prstGeom>
+          <a:noFill/>
+        </p:spPr>
+        <p:txBody>
+          <a:bodyPr wrap="none" rtlCol="0">
+            <a:spAutoFit/>
+          </a:bodyPr>
+          <a:lstStyle/>
+          <a:p>
+            <a:r>
+              <a:rPr lang="zh-TW" altLang="zh-TW" sz="1600" dirty="0">
+                <a:solidFill>
+                  <a:schemeClr val="tx1"/>
+                </a:solidFill>
+                <a:latin typeface="Times New Roman" panose="02020603050405020304" pitchFamily="18" charset="0"/>
+                <a:cs typeface="Times New Roman" panose="02020603050405020304" pitchFamily="18" charset="0"/>
+              </a:rPr>
+              <a:t>TRC / XYZ / wtpt</a:t>
+            </a:r>
+            <a:endParaRPr lang="zh-TW" altLang="en-US" sz="1600" dirty="0">
+              <a:solidFill>
+                <a:schemeClr val="tx1"/>
+              </a:solidFill>
+              <a:latin typeface="Times New Roman" panose="02020603050405020304" pitchFamily="18" charset="0"/>
+              <a:cs typeface="Times New Roman" panose="02020603050405020304" pitchFamily="18" charset="0"/>
+            </a:endParaRPr>
+          </a:p>
+        </p:txBody>
+      </p:sp>
+      <p:sp>
+        <p:nvSpPr>
+          <p:cNvPr id="22" name="文字方塊 21">
+            <a:extLst>
+              <a:ext uri="{FF2B5EF4-FFF2-40B4-BE49-F238E27FC236}">
+                <a16:creationId xmlns:a16="http://schemas.microsoft.com/office/drawing/2014/main" id="{004DC6C4-F258-3DB0-B9DD-DEC53EDBA4C2}"/>
+              </a:ext>
+            </a:extLst>
+          </p:cNvPr>
+          <p:cNvSpPr txBox="1"/>
+          <p:nvPr/>
+        </p:nvSpPr>
+        <p:spPr>
+          <a:xfrm>
+            <a:off x="1309165" y="4884798"/>
+            <a:ext cx="2215671" cy="338554"/>
+          </a:xfrm>
+          <a:prstGeom prst="rect">
+            <a:avLst/>
+          </a:prstGeom>
+          <a:noFill/>
+        </p:spPr>
+        <p:txBody>
+          <a:bodyPr wrap="none" rtlCol="0">
+            <a:spAutoFit/>
+          </a:bodyPr>
+          <a:lstStyle/>
+          <a:p>
+            <a:r>
+              <a:rPr lang="zh-TW" altLang="zh-TW" sz="1600" dirty="0">
+                <a:solidFill>
+                  <a:schemeClr val="tx1"/>
+                </a:solidFill>
+                <a:latin typeface="Times New Roman" panose="02020603050405020304" pitchFamily="18" charset="0"/>
+                <a:cs typeface="Times New Roman" panose="02020603050405020304" pitchFamily="18" charset="0"/>
+              </a:rPr>
+              <a:t>VCGT</a:t>
+            </a:r>
+            <a:r>
+              <a:rPr lang="en-US" altLang="zh-TW" sz="1600" dirty="0">
+                <a:solidFill>
+                  <a:schemeClr val="tx1"/>
+                </a:solidFill>
+                <a:latin typeface="Times New Roman" panose="02020603050405020304" pitchFamily="18" charset="0"/>
+                <a:cs typeface="Times New Roman" panose="02020603050405020304" pitchFamily="18" charset="0"/>
+              </a:rPr>
+              <a:t> </a:t>
+            </a:r>
+            <a:r>
+              <a:rPr lang="zh-TW" altLang="zh-TW" sz="1600" dirty="0">
+                <a:solidFill>
+                  <a:schemeClr val="tx1"/>
+                </a:solidFill>
+                <a:latin typeface="Times New Roman" panose="02020603050405020304" pitchFamily="18" charset="0"/>
+                <a:cs typeface="Times New Roman" panose="02020603050405020304" pitchFamily="18" charset="0"/>
+              </a:rPr>
+              <a:t>/</a:t>
+            </a:r>
+            <a:r>
+              <a:rPr lang="en-US" altLang="zh-TW" sz="1600" dirty="0">
+                <a:solidFill>
+                  <a:schemeClr val="tx1"/>
+                </a:solidFill>
+                <a:latin typeface="Times New Roman" panose="02020603050405020304" pitchFamily="18" charset="0"/>
+                <a:cs typeface="Times New Roman" panose="02020603050405020304" pitchFamily="18" charset="0"/>
+              </a:rPr>
+              <a:t> </a:t>
+            </a:r>
+            <a:r>
+              <a:rPr lang="zh-TW" altLang="zh-TW" sz="1600" dirty="0">
+                <a:solidFill>
+                  <a:schemeClr val="tx1"/>
+                </a:solidFill>
+                <a:latin typeface="Times New Roman" panose="02020603050405020304" pitchFamily="18" charset="0"/>
+                <a:cs typeface="Times New Roman" panose="02020603050405020304" pitchFamily="18" charset="0"/>
+              </a:rPr>
+              <a:t>MS00</a:t>
+            </a:r>
+            <a:r>
+              <a:rPr lang="en-US" altLang="zh-TW" sz="1600" dirty="0">
+                <a:solidFill>
+                  <a:schemeClr val="tx1"/>
+                </a:solidFill>
+                <a:latin typeface="Times New Roman" panose="02020603050405020304" pitchFamily="18" charset="0"/>
+                <a:cs typeface="Times New Roman" panose="02020603050405020304" pitchFamily="18" charset="0"/>
+              </a:rPr>
+              <a:t> </a:t>
+            </a:r>
+            <a:r>
+              <a:rPr lang="zh-TW" altLang="zh-TW" sz="1600" dirty="0">
+                <a:solidFill>
+                  <a:schemeClr val="tx1"/>
+                </a:solidFill>
+                <a:latin typeface="Times New Roman" panose="02020603050405020304" pitchFamily="18" charset="0"/>
+                <a:cs typeface="Times New Roman" panose="02020603050405020304" pitchFamily="18" charset="0"/>
+              </a:rPr>
+              <a:t>/</a:t>
+            </a:r>
+            <a:r>
+              <a:rPr lang="en-US" altLang="zh-TW" sz="1600" dirty="0">
+                <a:solidFill>
+                  <a:schemeClr val="tx1"/>
+                </a:solidFill>
+                <a:latin typeface="Times New Roman" panose="02020603050405020304" pitchFamily="18" charset="0"/>
+                <a:cs typeface="Times New Roman" panose="02020603050405020304" pitchFamily="18" charset="0"/>
+              </a:rPr>
+              <a:t> </a:t>
+            </a:r>
+            <a:r>
+              <a:rPr lang="zh-TW" altLang="zh-TW" sz="1600" dirty="0">
+                <a:solidFill>
+                  <a:schemeClr val="tx1"/>
+                </a:solidFill>
+                <a:latin typeface="Times New Roman" panose="02020603050405020304" pitchFamily="18" charset="0"/>
+                <a:cs typeface="Times New Roman" panose="02020603050405020304" pitchFamily="18" charset="0"/>
+              </a:rPr>
+              <a:t>MHC2</a:t>
+            </a:r>
+            <a:endParaRPr lang="zh-TW" altLang="en-US" sz="1600" dirty="0">
+              <a:solidFill>
+                <a:schemeClr val="tx1"/>
+              </a:solidFill>
+              <a:latin typeface="Times New Roman" panose="02020603050405020304" pitchFamily="18" charset="0"/>
+              <a:cs typeface="Times New Roman" panose="02020603050405020304" pitchFamily="18" charset="0"/>
+            </a:endParaRPr>
+          </a:p>
+        </p:txBody>
+      </p:sp>
+      <p:sp>
+        <p:nvSpPr>
+          <p:cNvPr id="48" name="標題 1">
+            <a:extLst>
+              <a:ext uri="{FF2B5EF4-FFF2-40B4-BE49-F238E27FC236}">
+                <a16:creationId xmlns:a16="http://schemas.microsoft.com/office/drawing/2014/main" id="{8D095D36-8CDE-8903-759D-B3DC6978455E}"/>
+              </a:ext>
+            </a:extLst>
+          </p:cNvPr>
+          <p:cNvSpPr>
+            <a:spLocks noGrp="1"/>
+          </p:cNvSpPr>
+          <p:nvPr>
+            <p:ph type="title"/>
+          </p:nvPr>
+        </p:nvSpPr>
+        <p:spPr>
+          <a:xfrm>
+            <a:off x="609602" y="609600"/>
+            <a:ext cx="8077200" cy="533400"/>
+          </a:xfrm>
+          <a:ln>
+            <a:noFill/>
+          </a:ln>
+        </p:spPr>
+        <p:txBody>
+          <a:bodyPr/>
+          <a:lstStyle/>
+          <a:p>
+            <a:r>
+              <a:rPr lang="zh-TW" altLang="en-US" dirty="0">
+                <a:latin typeface="Times New Roman" panose="02020603050405020304" pitchFamily="18" charset="0"/>
+                <a:ea typeface="標楷體" panose="03000509000000000000" pitchFamily="65" charset="-120"/>
+                <a:cs typeface="Times New Roman" panose="02020603050405020304" pitchFamily="18" charset="0"/>
+              </a:rPr>
+              <a:t>本次進度</a:t>
+            </a:r>
+            <a:r>
+              <a:rPr lang="en-US" altLang="zh-TW" dirty="0">
+                <a:latin typeface="Times New Roman" panose="02020603050405020304" pitchFamily="18" charset="0"/>
+                <a:ea typeface="標楷體" panose="03000509000000000000" pitchFamily="65" charset="-120"/>
+                <a:cs typeface="Times New Roman" panose="02020603050405020304" pitchFamily="18" charset="0"/>
+              </a:rPr>
+              <a:t>: ICC</a:t>
+            </a:r>
+            <a:r>
+              <a:rPr lang="zh-TW" altLang="en-US" dirty="0">
+                <a:latin typeface="Times New Roman" panose="02020603050405020304" pitchFamily="18" charset="0"/>
+                <a:ea typeface="標楷體" panose="03000509000000000000" pitchFamily="65" charset="-120"/>
+                <a:cs typeface="Times New Roman" panose="02020603050405020304" pitchFamily="18" charset="0"/>
+              </a:rPr>
+              <a:t>與</a:t>
+            </a:r>
+            <a:r>
+              <a:rPr lang="zh-TW" altLang="zh-TW" dirty="0">
+                <a:latin typeface="Times New Roman" panose="02020603050405020304" pitchFamily="18" charset="0"/>
+                <a:ea typeface="標楷體" panose="03000509000000000000" pitchFamily="65" charset="-120"/>
+                <a:cs typeface="Times New Roman" panose="02020603050405020304" pitchFamily="18" charset="0"/>
+              </a:rPr>
+              <a:t>校正資料</a:t>
+            </a:r>
+            <a:endParaRPr lang="zh-TW" altLang="en-US" dirty="0">
+              <a:latin typeface="Times New Roman" panose="02020603050405020304" pitchFamily="18" charset="0"/>
+              <a:ea typeface="標楷體" panose="03000509000000000000" pitchFamily="65" charset="-120"/>
+              <a:cs typeface="Times New Roman" panose="02020603050405020304" pitchFamily="18" charset="0"/>
+            </a:endParaRPr>
+          </a:p>
+        </p:txBody>
+      </p:sp>
       <p:cxnSp>
         <p:nvCxnSpPr>
-          <p:cNvPr id="20" name="直線單箭頭接點 19">
+          <p:cNvPr id="6" name="直線接點 5">
             <a:extLst>
               <a:ext uri="{FF2B5EF4-FFF2-40B4-BE49-F238E27FC236}">
-                <a16:creationId xmlns:a16="http://schemas.microsoft.com/office/drawing/2014/main" id="{A28111C5-679B-4B99-F41B-CF93AF10E80A}"/>
+                <a16:creationId xmlns:a16="http://schemas.microsoft.com/office/drawing/2014/main" id="{6D20DBCA-6384-9E49-44A5-B651C92313FD}"/>
               </a:ext>
             </a:extLst>
           </p:cNvPr>
           <p:cNvCxnSpPr>
-            <a:stCxn id="9" idx="3"/>
-            <a:endCxn id="12" idx="1"/>
+            <a:cxnSpLocks/>
+            <a:stCxn id="5" idx="3"/>
+            <a:endCxn id="13" idx="1"/>
           </p:cNvCxnSpPr>
           <p:nvPr/>
         </p:nvCxnSpPr>
         <p:spPr>
           <a:xfrm>
-            <a:off x="2519682" y="4293164"/>
-            <a:ext cx="1477010" cy="0"/>
+            <a:off x="5171441" y="4798616"/>
+            <a:ext cx="1899920" cy="0"/>
           </a:xfrm>
-          <a:prstGeom prst="straightConnector1">
+          <a:prstGeom prst="line">
             <a:avLst/>
           </a:prstGeom>
-          <a:ln w="19050" cap="flat" cmpd="sng" algn="ctr">
-            <a:solidFill>
-              <a:schemeClr val="dk1"/>
-            </a:solidFill>
-            <a:prstDash val="solid"/>
-            <a:round/>
-            <a:headEnd type="none" w="med" len="med"/>
-            <a:tailEnd type="arrow" w="med" len="med"/>
-          </a:ln>
         </p:spPr>
         <p:style>
-          <a:lnRef idx="0">
-            <a:scrgbClr r="0" g="0" b="0"/>
+          <a:lnRef idx="2">
+            <a:schemeClr val="dk1"/>
           </a:lnRef>
           <a:fillRef idx="0">
-            <a:scrgbClr r="0" g="0" b="0"/>
+            <a:schemeClr val="dk1"/>
           </a:fillRef>
-          <a:effectRef idx="0">
-            <a:scrgbClr r="0" g="0" b="0"/>
+          <a:effectRef idx="1">
+            <a:schemeClr val="dk1"/>
           </a:effectRef>
           <a:fontRef idx="minor">
             <a:schemeClr val="tx1"/>
@@ -22311,47 +22097,118 @@
       </p:cxnSp>
       <p:cxnSp>
         <p:nvCxnSpPr>
-          <p:cNvPr id="21" name="直線單箭頭接點 20">
+          <p:cNvPr id="7" name="直線接點 6">
             <a:extLst>
               <a:ext uri="{FF2B5EF4-FFF2-40B4-BE49-F238E27FC236}">
-                <a16:creationId xmlns:a16="http://schemas.microsoft.com/office/drawing/2014/main" id="{83BD4C12-E585-313C-A3BF-2862C76AFCC5}"/>
+                <a16:creationId xmlns:a16="http://schemas.microsoft.com/office/drawing/2014/main" id="{07A16EC5-F29F-9583-72F5-FFE82D567074}"/>
               </a:ext>
             </a:extLst>
           </p:cNvPr>
           <p:cNvCxnSpPr>
             <a:cxnSpLocks/>
-            <a:stCxn id="12" idx="3"/>
-            <a:endCxn id="14" idx="1"/>
+            <a:stCxn id="3" idx="3"/>
+            <a:endCxn id="9" idx="1"/>
           </p:cNvCxnSpPr>
           <p:nvPr/>
         </p:nvCxnSpPr>
         <p:spPr>
           <a:xfrm>
-            <a:off x="5906772" y="4293164"/>
-            <a:ext cx="1286510" cy="0"/>
+            <a:off x="5171441" y="2615914"/>
+            <a:ext cx="1899920" cy="0"/>
           </a:xfrm>
-          <a:prstGeom prst="straightConnector1">
+          <a:prstGeom prst="line">
             <a:avLst/>
           </a:prstGeom>
-          <a:ln w="19050" cap="flat" cmpd="sng" algn="ctr">
-            <a:solidFill>
-              <a:schemeClr val="dk1"/>
-            </a:solidFill>
-            <a:prstDash val="solid"/>
-            <a:round/>
-            <a:headEnd type="none" w="med" len="med"/>
-            <a:tailEnd type="arrow" w="med" len="med"/>
-          </a:ln>
         </p:spPr>
         <p:style>
-          <a:lnRef idx="0">
-            <a:scrgbClr r="0" g="0" b="0"/>
+          <a:lnRef idx="2">
+            <a:schemeClr val="dk1"/>
           </a:lnRef>
           <a:fillRef idx="0">
-            <a:scrgbClr r="0" g="0" b="0"/>
+            <a:schemeClr val="dk1"/>
           </a:fillRef>
-          <a:effectRef idx="0">
-            <a:scrgbClr r="0" g="0" b="0"/>
+          <a:effectRef idx="1">
+            <a:schemeClr val="dk1"/>
+          </a:effectRef>
+          <a:fontRef idx="minor">
+            <a:schemeClr val="tx1"/>
+          </a:fontRef>
+        </p:style>
+      </p:cxnSp>
+      <p:cxnSp>
+        <p:nvCxnSpPr>
+          <p:cNvPr id="16" name="接點: 肘形 15">
+            <a:extLst>
+              <a:ext uri="{FF2B5EF4-FFF2-40B4-BE49-F238E27FC236}">
+                <a16:creationId xmlns:a16="http://schemas.microsoft.com/office/drawing/2014/main" id="{CD68CE2B-EDE8-D826-AB19-B6FAE4FE733F}"/>
+              </a:ext>
+            </a:extLst>
+          </p:cNvPr>
+          <p:cNvCxnSpPr>
+            <a:cxnSpLocks/>
+            <a:stCxn id="3" idx="1"/>
+            <a:endCxn id="12" idx="3"/>
+          </p:cNvCxnSpPr>
+          <p:nvPr/>
+        </p:nvCxnSpPr>
+        <p:spPr>
+          <a:xfrm rot="10800000" flipV="1">
+            <a:off x="2286001" y="2615914"/>
+            <a:ext cx="1137920" cy="1133412"/>
+          </a:xfrm>
+          <a:prstGeom prst="bentConnector3">
+            <a:avLst/>
+          </a:prstGeom>
+        </p:spPr>
+        <p:style>
+          <a:lnRef idx="2">
+            <a:schemeClr val="dk1"/>
+          </a:lnRef>
+          <a:fillRef idx="0">
+            <a:schemeClr val="dk1"/>
+          </a:fillRef>
+          <a:effectRef idx="1">
+            <a:schemeClr val="dk1"/>
+          </a:effectRef>
+          <a:fontRef idx="minor">
+            <a:schemeClr val="tx1"/>
+          </a:fontRef>
+        </p:style>
+      </p:cxnSp>
+      <p:cxnSp>
+        <p:nvCxnSpPr>
+          <p:cNvPr id="18" name="接點: 肘形 17">
+            <a:extLst>
+              <a:ext uri="{FF2B5EF4-FFF2-40B4-BE49-F238E27FC236}">
+                <a16:creationId xmlns:a16="http://schemas.microsoft.com/office/drawing/2014/main" id="{834256DB-2ECB-B600-2909-4DADCB795645}"/>
+              </a:ext>
+            </a:extLst>
+          </p:cNvPr>
+          <p:cNvCxnSpPr>
+            <a:cxnSpLocks/>
+            <a:stCxn id="5" idx="1"/>
+            <a:endCxn id="12" idx="3"/>
+          </p:cNvCxnSpPr>
+          <p:nvPr/>
+        </p:nvCxnSpPr>
+        <p:spPr>
+          <a:xfrm rot="10800000">
+            <a:off x="2286001" y="3749326"/>
+            <a:ext cx="1137920" cy="1049290"/>
+          </a:xfrm>
+          <a:prstGeom prst="bentConnector3">
+            <a:avLst/>
+          </a:prstGeom>
+        </p:spPr>
+        <p:style>
+          <a:lnRef idx="2">
+            <a:schemeClr val="dk1"/>
+          </a:lnRef>
+          <a:fillRef idx="0">
+            <a:schemeClr val="dk1"/>
+          </a:fillRef>
+          <a:effectRef idx="1">
+            <a:schemeClr val="dk1"/>
           </a:effectRef>
           <a:fontRef idx="minor">
             <a:schemeClr val="tx1"/>
@@ -22361,7 +22218,7 @@
     </p:spTree>
     <p:extLst>
       <p:ext uri="{BB962C8B-B14F-4D97-AF65-F5344CB8AC3E}">
-        <p14:creationId xmlns:p14="http://schemas.microsoft.com/office/powerpoint/2010/main" val="2297188540"/>
+        <p14:creationId xmlns:p14="http://schemas.microsoft.com/office/powerpoint/2010/main" val="3024968246"/>
       </p:ext>
     </p:extLst>
   </p:cSld>
